--- a/INVENTORY 1ST REVIEW.pptx
+++ b/INVENTORY 1ST REVIEW.pptx
@@ -10,11 +10,13 @@
     <p:sldId id="2147470493" r:id="rId4"/>
     <p:sldId id="2147470494" r:id="rId5"/>
     <p:sldId id="2147470495" r:id="rId6"/>
-    <p:sldId id="2147470496" r:id="rId7"/>
-    <p:sldId id="2147470497" r:id="rId8"/>
-    <p:sldId id="2147470491" r:id="rId9"/>
-    <p:sldId id="2147470487" r:id="rId10"/>
-    <p:sldId id="2147470498" r:id="rId11"/>
+    <p:sldId id="2147470506" r:id="rId7"/>
+    <p:sldId id="2147470496" r:id="rId8"/>
+    <p:sldId id="2147470497" r:id="rId9"/>
+    <p:sldId id="2147470491" r:id="rId10"/>
+    <p:sldId id="2147470503" r:id="rId11"/>
+    <p:sldId id="2147470504" r:id="rId12"/>
+    <p:sldId id="2147470498" r:id="rId13"/>
   </p:sldIdLst>
   <p:sldSz cx="12192000" cy="6858000"/>
   <p:notesSz cx="6858000" cy="9144000"/>
@@ -4068,7 +4070,7 @@
         <p:cNvPr id="1" name="">
           <a:extLst>
             <a:ext uri="{FF2B5EF4-FFF2-40B4-BE49-F238E27FC236}">
-              <a16:creationId xmlns:a16="http://schemas.microsoft.com/office/drawing/2014/main" id="{DC1DCFAF-7FB5-2DAD-B684-91616B7825E4}"/>
+              <a16:creationId xmlns:a16="http://schemas.microsoft.com/office/drawing/2014/main" id="{096F1433-4411-54F7-9C5D-821E6A4A6B3F}"/>
             </a:ext>
           </a:extLst>
         </p:cNvPr>
@@ -4085,10 +4087,382 @@
       </p:grpSpPr>
       <p:sp>
         <p:nvSpPr>
-          <p:cNvPr id="5" name="Text Placeholder 1">
+          <p:cNvPr id="2" name="Text Placeholder 1">
             <a:extLst>
               <a:ext uri="{FF2B5EF4-FFF2-40B4-BE49-F238E27FC236}">
-                <a16:creationId xmlns:a16="http://schemas.microsoft.com/office/drawing/2014/main" id="{9B29F3DD-471E-12F1-C051-4FF0DA0865DD}"/>
+                <a16:creationId xmlns:a16="http://schemas.microsoft.com/office/drawing/2014/main" id="{EB36EF2B-91BC-3EC5-56BD-ADC740F18F82}"/>
+              </a:ext>
+            </a:extLst>
+          </p:cNvPr>
+          <p:cNvSpPr>
+            <a:spLocks noGrp="1"/>
+          </p:cNvSpPr>
+          <p:nvPr>
+            <p:ph type="body" sz="quarter" idx="13"/>
+          </p:nvPr>
+        </p:nvSpPr>
+        <p:spPr>
+          <a:xfrm>
+            <a:off x="181047" y="917603"/>
+            <a:ext cx="11631203" cy="2621374"/>
+          </a:xfrm>
+        </p:spPr>
+        <p:txBody>
+          <a:bodyPr tIns="18000" bIns="18000"/>
+          <a:lstStyle/>
+          <a:p>
+            <a:pPr lvl="0" indent="-144000" algn="just">
+              <a:lnSpc>
+                <a:spcPct val="85000"/>
+              </a:lnSpc>
+              <a:spcBef>
+                <a:spcPts val="0"/>
+              </a:spcBef>
+            </a:pPr>
+            <a:r>
+              <a:rPr lang="en-IN" dirty="0"/>
+              <a:t>Data Source: </a:t>
+            </a:r>
+            <a:r>
+              <a:rPr lang="en-IN" b="0" dirty="0"/>
+              <a:t>Instacart order and product transaction files. </a:t>
+            </a:r>
+          </a:p>
+          <a:p>
+            <a:pPr lvl="0" indent="-144000" algn="just">
+              <a:lnSpc>
+                <a:spcPct val="85000"/>
+              </a:lnSpc>
+              <a:spcBef>
+                <a:spcPts val="0"/>
+              </a:spcBef>
+            </a:pPr>
+            <a:r>
+              <a:rPr lang="en-IN" dirty="0"/>
+              <a:t>Data Processing: </a:t>
+            </a:r>
+            <a:r>
+              <a:rPr lang="en-IN" b="0" dirty="0"/>
+              <a:t>Cleans, joins, and filters incomplete records across order-related tables. </a:t>
+            </a:r>
+          </a:p>
+          <a:p>
+            <a:pPr lvl="0" indent="-144000" algn="just">
+              <a:lnSpc>
+                <a:spcPct val="85000"/>
+              </a:lnSpc>
+              <a:spcBef>
+                <a:spcPts val="0"/>
+              </a:spcBef>
+            </a:pPr>
+            <a:r>
+              <a:rPr lang="en-IN" dirty="0"/>
+              <a:t>Basket Creation: </a:t>
+            </a:r>
+            <a:r>
+              <a:rPr lang="en-IN" b="0" dirty="0"/>
+              <a:t>Builds a basket-level dataset with product lists and purchase timing. </a:t>
+            </a:r>
+          </a:p>
+          <a:p>
+            <a:pPr lvl="0" indent="-144000" algn="just">
+              <a:lnSpc>
+                <a:spcPct val="85000"/>
+              </a:lnSpc>
+              <a:spcBef>
+                <a:spcPts val="0"/>
+              </a:spcBef>
+            </a:pPr>
+            <a:r>
+              <a:rPr lang="en-IN" dirty="0"/>
+              <a:t>Storage &amp; Automation: </a:t>
+            </a:r>
+            <a:r>
+              <a:rPr lang="en-IN" b="0" dirty="0"/>
+              <a:t>Stores clean data in SQLite and automatically skips already-processed files.</a:t>
+            </a:r>
+          </a:p>
+        </p:txBody>
+      </p:sp>
+      <p:sp>
+        <p:nvSpPr>
+          <p:cNvPr id="3" name="TextBox 2">
+            <a:extLst>
+              <a:ext uri="{FF2B5EF4-FFF2-40B4-BE49-F238E27FC236}">
+                <a16:creationId xmlns:a16="http://schemas.microsoft.com/office/drawing/2014/main" id="{52029E63-0B38-7BD4-357B-857EF0644742}"/>
+              </a:ext>
+            </a:extLst>
+          </p:cNvPr>
+          <p:cNvSpPr txBox="1"/>
+          <p:nvPr/>
+        </p:nvSpPr>
+        <p:spPr>
+          <a:xfrm>
+            <a:off x="221274" y="221789"/>
+            <a:ext cx="10624338" cy="646331"/>
+          </a:xfrm>
+          <a:prstGeom prst="rect">
+            <a:avLst/>
+          </a:prstGeom>
+          <a:noFill/>
+        </p:spPr>
+        <p:txBody>
+          <a:bodyPr wrap="square" rtlCol="0">
+            <a:spAutoFit/>
+          </a:bodyPr>
+          <a:lstStyle/>
+          <a:p>
+            <a:pPr lvl="0">
+              <a:defRPr/>
+            </a:pPr>
+            <a:r>
+              <a:rPr lang="en-US" sz="3600" b="1" dirty="0">
+                <a:solidFill>
+                  <a:srgbClr val="5B9BD5">
+                    <a:lumMod val="50000"/>
+                  </a:srgbClr>
+                </a:solidFill>
+                <a:latin typeface="Calibri" panose="020F0502020204030204"/>
+              </a:rPr>
+              <a:t>Data Engineering</a:t>
+            </a:r>
+            <a:endParaRPr kumimoji="0" lang="en-US" sz="3600" b="1" i="0" u="none" strike="noStrike" kern="1200" cap="none" spc="0" normalizeH="0" baseline="0" noProof="0" dirty="0">
+              <a:ln>
+                <a:noFill/>
+              </a:ln>
+              <a:solidFill>
+                <a:srgbClr val="5B9BD5">
+                  <a:lumMod val="50000"/>
+                </a:srgbClr>
+              </a:solidFill>
+              <a:effectLst/>
+              <a:uLnTx/>
+              <a:uFillTx/>
+              <a:latin typeface="Calibri" panose="020F0502020204030204"/>
+              <a:ea typeface="+mn-ea"/>
+              <a:cs typeface="+mn-cs"/>
+            </a:endParaRPr>
+          </a:p>
+        </p:txBody>
+      </p:sp>
+      <p:cxnSp>
+        <p:nvCxnSpPr>
+          <p:cNvPr id="4" name="Straight Connector 3">
+            <a:extLst>
+              <a:ext uri="{FF2B5EF4-FFF2-40B4-BE49-F238E27FC236}">
+                <a16:creationId xmlns:a16="http://schemas.microsoft.com/office/drawing/2014/main" id="{B2A34B48-3F9B-2267-813D-F52A5FE02FAE}"/>
+              </a:ext>
+            </a:extLst>
+          </p:cNvPr>
+          <p:cNvCxnSpPr>
+            <a:cxnSpLocks/>
+          </p:cNvCxnSpPr>
+          <p:nvPr/>
+        </p:nvCxnSpPr>
+        <p:spPr>
+          <a:xfrm>
+            <a:off x="221274" y="868120"/>
+            <a:ext cx="7305799" cy="0"/>
+          </a:xfrm>
+          <a:prstGeom prst="line">
+            <a:avLst/>
+          </a:prstGeom>
+          <a:ln w="28575">
+            <a:solidFill>
+              <a:schemeClr val="accent6"/>
+            </a:solidFill>
+          </a:ln>
+        </p:spPr>
+        <p:style>
+          <a:lnRef idx="1">
+            <a:schemeClr val="accent1"/>
+          </a:lnRef>
+          <a:fillRef idx="0">
+            <a:schemeClr val="accent1"/>
+          </a:fillRef>
+          <a:effectRef idx="0">
+            <a:schemeClr val="accent1"/>
+          </a:effectRef>
+          <a:fontRef idx="minor">
+            <a:schemeClr val="tx1"/>
+          </a:fontRef>
+        </p:style>
+      </p:cxnSp>
+      <p:sp>
+        <p:nvSpPr>
+          <p:cNvPr id="13" name="TextBox 12">
+            <a:extLst>
+              <a:ext uri="{FF2B5EF4-FFF2-40B4-BE49-F238E27FC236}">
+                <a16:creationId xmlns:a16="http://schemas.microsoft.com/office/drawing/2014/main" id="{9FF8D38D-C739-042A-21A4-E9BD2EF43133}"/>
+              </a:ext>
+            </a:extLst>
+          </p:cNvPr>
+          <p:cNvSpPr txBox="1"/>
+          <p:nvPr/>
+        </p:nvSpPr>
+        <p:spPr>
+          <a:xfrm>
+            <a:off x="3182111" y="57036"/>
+            <a:ext cx="9009889" cy="369332"/>
+          </a:xfrm>
+          <a:prstGeom prst="rect">
+            <a:avLst/>
+          </a:prstGeom>
+          <a:noFill/>
+        </p:spPr>
+        <p:txBody>
+          <a:bodyPr wrap="square" rtlCol="0">
+            <a:spAutoFit/>
+          </a:bodyPr>
+          <a:lstStyle/>
+          <a:p>
+            <a:pPr lvl="0" algn="r">
+              <a:defRPr/>
+            </a:pPr>
+            <a:r>
+              <a:rPr lang="en-IN" b="1" dirty="0">
+                <a:solidFill>
+                  <a:schemeClr val="bg1"/>
+                </a:solidFill>
+              </a:rPr>
+              <a:t>Signature-Driven Inventory: Profiling Shopper </a:t>
+            </a:r>
+            <a:r>
+              <a:rPr lang="en-IN" b="1" dirty="0" err="1">
+                <a:solidFill>
+                  <a:schemeClr val="bg1"/>
+                </a:solidFill>
+              </a:rPr>
+              <a:t>Behavior</a:t>
+            </a:r>
+            <a:r>
+              <a:rPr lang="en-IN" b="1" dirty="0">
+                <a:solidFill>
+                  <a:schemeClr val="bg1"/>
+                </a:solidFill>
+              </a:rPr>
+              <a:t> From Basket Data</a:t>
+            </a:r>
+            <a:endParaRPr lang="en-US" sz="3200" b="1" dirty="0">
+              <a:solidFill>
+                <a:schemeClr val="bg1"/>
+              </a:solidFill>
+              <a:latin typeface="Frutiger 45 bold"/>
+              <a:cs typeface="Calibri" panose="020F0502020204030204" pitchFamily="34" charset="0"/>
+            </a:endParaRPr>
+          </a:p>
+        </p:txBody>
+      </p:sp>
+      <p:sp>
+        <p:nvSpPr>
+          <p:cNvPr id="5" name="TextBox 4">
+            <a:extLst>
+              <a:ext uri="{FF2B5EF4-FFF2-40B4-BE49-F238E27FC236}">
+                <a16:creationId xmlns:a16="http://schemas.microsoft.com/office/drawing/2014/main" id="{FA27D97E-5433-76CD-0B2A-99FE8A7AB44E}"/>
+              </a:ext>
+            </a:extLst>
+          </p:cNvPr>
+          <p:cNvSpPr txBox="1"/>
+          <p:nvPr/>
+        </p:nvSpPr>
+        <p:spPr>
+          <a:xfrm>
+            <a:off x="236264" y="3375970"/>
+            <a:ext cx="10624338" cy="646331"/>
+          </a:xfrm>
+          <a:prstGeom prst="rect">
+            <a:avLst/>
+          </a:prstGeom>
+          <a:noFill/>
+        </p:spPr>
+        <p:txBody>
+          <a:bodyPr wrap="square" rtlCol="0">
+            <a:spAutoFit/>
+          </a:bodyPr>
+          <a:lstStyle/>
+          <a:p>
+            <a:pPr lvl="0">
+              <a:defRPr/>
+            </a:pPr>
+            <a:r>
+              <a:rPr lang="en-US" sz="3600" b="1" dirty="0">
+                <a:solidFill>
+                  <a:srgbClr val="5B9BD5">
+                    <a:lumMod val="50000"/>
+                  </a:srgbClr>
+                </a:solidFill>
+                <a:latin typeface="Calibri" panose="020F0502020204030204"/>
+              </a:rPr>
+              <a:t>LLM Feature Engineering</a:t>
+            </a:r>
+            <a:endParaRPr kumimoji="0" lang="en-US" sz="3600" b="1" i="0" u="none" strike="noStrike" kern="1200" cap="none" spc="0" normalizeH="0" baseline="0" noProof="0" dirty="0">
+              <a:ln>
+                <a:noFill/>
+              </a:ln>
+              <a:solidFill>
+                <a:srgbClr val="5B9BD5">
+                  <a:lumMod val="50000"/>
+                </a:srgbClr>
+              </a:solidFill>
+              <a:effectLst/>
+              <a:uLnTx/>
+              <a:uFillTx/>
+              <a:latin typeface="Calibri" panose="020F0502020204030204"/>
+              <a:ea typeface="+mn-ea"/>
+              <a:cs typeface="+mn-cs"/>
+            </a:endParaRPr>
+          </a:p>
+        </p:txBody>
+      </p:sp>
+      <p:cxnSp>
+        <p:nvCxnSpPr>
+          <p:cNvPr id="6" name="Straight Connector 5">
+            <a:extLst>
+              <a:ext uri="{FF2B5EF4-FFF2-40B4-BE49-F238E27FC236}">
+                <a16:creationId xmlns:a16="http://schemas.microsoft.com/office/drawing/2014/main" id="{A7B74D6C-ABDF-7945-B43E-5D03E4DEAE17}"/>
+              </a:ext>
+            </a:extLst>
+          </p:cNvPr>
+          <p:cNvCxnSpPr>
+            <a:cxnSpLocks/>
+          </p:cNvCxnSpPr>
+          <p:nvPr/>
+        </p:nvCxnSpPr>
+        <p:spPr>
+          <a:xfrm>
+            <a:off x="236264" y="4007311"/>
+            <a:ext cx="7305799" cy="0"/>
+          </a:xfrm>
+          <a:prstGeom prst="line">
+            <a:avLst/>
+          </a:prstGeom>
+          <a:ln w="28575">
+            <a:solidFill>
+              <a:schemeClr val="accent6"/>
+            </a:solidFill>
+          </a:ln>
+        </p:spPr>
+        <p:style>
+          <a:lnRef idx="1">
+            <a:schemeClr val="accent1"/>
+          </a:lnRef>
+          <a:fillRef idx="0">
+            <a:schemeClr val="accent1"/>
+          </a:fillRef>
+          <a:effectRef idx="0">
+            <a:schemeClr val="accent1"/>
+          </a:effectRef>
+          <a:fontRef idx="minor">
+            <a:schemeClr val="tx1"/>
+          </a:fontRef>
+        </p:style>
+      </p:cxnSp>
+      <p:sp>
+        <p:nvSpPr>
+          <p:cNvPr id="7" name="Text Placeholder 1">
+            <a:extLst>
+              <a:ext uri="{FF2B5EF4-FFF2-40B4-BE49-F238E27FC236}">
+                <a16:creationId xmlns:a16="http://schemas.microsoft.com/office/drawing/2014/main" id="{542A936B-5649-815F-8A98-397CFC033A1C}"/>
               </a:ext>
             </a:extLst>
           </p:cNvPr>
@@ -4099,8 +4473,450 @@
         </p:nvSpPr>
         <p:spPr>
           <a:xfrm>
-            <a:off x="423672" y="1660371"/>
-            <a:ext cx="11375172" cy="1243382"/>
+            <a:off x="156065" y="4054161"/>
+            <a:ext cx="12000960" cy="2057400"/>
+          </a:xfrm>
+          <a:prstGeom prst="rect">
+            <a:avLst/>
+          </a:prstGeom>
+        </p:spPr>
+        <p:txBody>
+          <a:bodyPr vert="horz" lIns="91440" tIns="18000" rIns="91440" bIns="18000" rtlCol="0">
+            <a:noAutofit/>
+          </a:bodyPr>
+          <a:lstStyle>
+            <a:lvl1pPr marL="228600" indent="-228600" algn="l" defTabSz="914400" rtl="0" eaLnBrk="1" latinLnBrk="0" hangingPunct="1">
+              <a:lnSpc>
+                <a:spcPct val="90000"/>
+              </a:lnSpc>
+              <a:spcBef>
+                <a:spcPts val="1000"/>
+              </a:spcBef>
+              <a:buFont typeface="Arial" panose="020B0604020202020204" pitchFamily="34" charset="0"/>
+              <a:buChar char="•"/>
+              <a:defRPr lang="en-US" sz="2800" b="1" kern="1200" dirty="0">
+                <a:solidFill>
+                  <a:srgbClr val="0070C0"/>
+                </a:solidFill>
+                <a:latin typeface="Frutiger 45 bold"/>
+                <a:ea typeface="+mn-ea"/>
+                <a:cs typeface="Calibri" panose="020F0502020204030204" pitchFamily="34" charset="0"/>
+              </a:defRPr>
+            </a:lvl1pPr>
+            <a:lvl2pPr marL="685800" indent="-228600" algn="l" defTabSz="914400" rtl="0" eaLnBrk="1" latinLnBrk="0" hangingPunct="1">
+              <a:lnSpc>
+                <a:spcPct val="90000"/>
+              </a:lnSpc>
+              <a:spcBef>
+                <a:spcPts val="500"/>
+              </a:spcBef>
+              <a:buFont typeface="Arial" panose="020B0604020202020204" pitchFamily="34" charset="0"/>
+              <a:buChar char="•"/>
+              <a:defRPr sz="2400" kern="1200">
+                <a:solidFill>
+                  <a:schemeClr val="tx1"/>
+                </a:solidFill>
+                <a:latin typeface="+mn-lt"/>
+                <a:ea typeface="+mn-ea"/>
+                <a:cs typeface="+mn-cs"/>
+              </a:defRPr>
+            </a:lvl2pPr>
+            <a:lvl3pPr marL="1143000" indent="-228600" algn="l" defTabSz="914400" rtl="0" eaLnBrk="1" latinLnBrk="0" hangingPunct="1">
+              <a:lnSpc>
+                <a:spcPct val="90000"/>
+              </a:lnSpc>
+              <a:spcBef>
+                <a:spcPts val="500"/>
+              </a:spcBef>
+              <a:buFont typeface="Arial" panose="020B0604020202020204" pitchFamily="34" charset="0"/>
+              <a:buChar char="•"/>
+              <a:defRPr sz="2000" kern="1200">
+                <a:solidFill>
+                  <a:schemeClr val="tx1"/>
+                </a:solidFill>
+                <a:latin typeface="+mn-lt"/>
+                <a:ea typeface="+mn-ea"/>
+                <a:cs typeface="+mn-cs"/>
+              </a:defRPr>
+            </a:lvl3pPr>
+            <a:lvl4pPr marL="1600200" indent="-228600" algn="l" defTabSz="914400" rtl="0" eaLnBrk="1" latinLnBrk="0" hangingPunct="1">
+              <a:lnSpc>
+                <a:spcPct val="90000"/>
+              </a:lnSpc>
+              <a:spcBef>
+                <a:spcPts val="500"/>
+              </a:spcBef>
+              <a:buFont typeface="Arial" panose="020B0604020202020204" pitchFamily="34" charset="0"/>
+              <a:buChar char="•"/>
+              <a:defRPr sz="1800" kern="1200">
+                <a:solidFill>
+                  <a:schemeClr val="tx1"/>
+                </a:solidFill>
+                <a:latin typeface="+mn-lt"/>
+                <a:ea typeface="+mn-ea"/>
+                <a:cs typeface="+mn-cs"/>
+              </a:defRPr>
+            </a:lvl4pPr>
+            <a:lvl5pPr marL="2057400" indent="-228600" algn="l" defTabSz="914400" rtl="0" eaLnBrk="1" latinLnBrk="0" hangingPunct="1">
+              <a:lnSpc>
+                <a:spcPct val="90000"/>
+              </a:lnSpc>
+              <a:spcBef>
+                <a:spcPts val="500"/>
+              </a:spcBef>
+              <a:buFont typeface="Arial" panose="020B0604020202020204" pitchFamily="34" charset="0"/>
+              <a:buChar char="•"/>
+              <a:defRPr sz="1800" kern="1200">
+                <a:solidFill>
+                  <a:schemeClr val="tx1"/>
+                </a:solidFill>
+                <a:latin typeface="+mn-lt"/>
+                <a:ea typeface="+mn-ea"/>
+                <a:cs typeface="+mn-cs"/>
+              </a:defRPr>
+            </a:lvl5pPr>
+            <a:lvl6pPr marL="2514600" indent="-228600" algn="l" defTabSz="914400" rtl="0" eaLnBrk="1" latinLnBrk="0" hangingPunct="1">
+              <a:lnSpc>
+                <a:spcPct val="90000"/>
+              </a:lnSpc>
+              <a:spcBef>
+                <a:spcPts val="500"/>
+              </a:spcBef>
+              <a:buFont typeface="Arial" panose="020B0604020202020204" pitchFamily="34" charset="0"/>
+              <a:buChar char="•"/>
+              <a:defRPr sz="1800" kern="1200">
+                <a:solidFill>
+                  <a:schemeClr val="tx1"/>
+                </a:solidFill>
+                <a:latin typeface="+mn-lt"/>
+                <a:ea typeface="+mn-ea"/>
+                <a:cs typeface="+mn-cs"/>
+              </a:defRPr>
+            </a:lvl6pPr>
+            <a:lvl7pPr marL="2971800" indent="-228600" algn="l" defTabSz="914400" rtl="0" eaLnBrk="1" latinLnBrk="0" hangingPunct="1">
+              <a:lnSpc>
+                <a:spcPct val="90000"/>
+              </a:lnSpc>
+              <a:spcBef>
+                <a:spcPts val="500"/>
+              </a:spcBef>
+              <a:buFont typeface="Arial" panose="020B0604020202020204" pitchFamily="34" charset="0"/>
+              <a:buChar char="•"/>
+              <a:defRPr sz="1800" kern="1200">
+                <a:solidFill>
+                  <a:schemeClr val="tx1"/>
+                </a:solidFill>
+                <a:latin typeface="+mn-lt"/>
+                <a:ea typeface="+mn-ea"/>
+                <a:cs typeface="+mn-cs"/>
+              </a:defRPr>
+            </a:lvl7pPr>
+            <a:lvl8pPr marL="3429000" indent="-228600" algn="l" defTabSz="914400" rtl="0" eaLnBrk="1" latinLnBrk="0" hangingPunct="1">
+              <a:lnSpc>
+                <a:spcPct val="90000"/>
+              </a:lnSpc>
+              <a:spcBef>
+                <a:spcPts val="500"/>
+              </a:spcBef>
+              <a:buFont typeface="Arial" panose="020B0604020202020204" pitchFamily="34" charset="0"/>
+              <a:buChar char="•"/>
+              <a:defRPr sz="1800" kern="1200">
+                <a:solidFill>
+                  <a:schemeClr val="tx1"/>
+                </a:solidFill>
+                <a:latin typeface="+mn-lt"/>
+                <a:ea typeface="+mn-ea"/>
+                <a:cs typeface="+mn-cs"/>
+              </a:defRPr>
+            </a:lvl8pPr>
+            <a:lvl9pPr marL="3886200" indent="-228600" algn="l" defTabSz="914400" rtl="0" eaLnBrk="1" latinLnBrk="0" hangingPunct="1">
+              <a:lnSpc>
+                <a:spcPct val="90000"/>
+              </a:lnSpc>
+              <a:spcBef>
+                <a:spcPts val="500"/>
+              </a:spcBef>
+              <a:buFont typeface="Arial" panose="020B0604020202020204" pitchFamily="34" charset="0"/>
+              <a:buChar char="•"/>
+              <a:defRPr sz="1800" kern="1200">
+                <a:solidFill>
+                  <a:schemeClr val="tx1"/>
+                </a:solidFill>
+                <a:latin typeface="+mn-lt"/>
+                <a:ea typeface="+mn-ea"/>
+                <a:cs typeface="+mn-cs"/>
+              </a:defRPr>
+            </a:lvl9pPr>
+          </a:lstStyle>
+          <a:p>
+            <a:pPr lvl="0" indent="-144000">
+              <a:lnSpc>
+                <a:spcPct val="85000"/>
+              </a:lnSpc>
+              <a:spcBef>
+                <a:spcPts val="0"/>
+              </a:spcBef>
+            </a:pPr>
+            <a:r>
+              <a:rPr lang="en-IN" dirty="0"/>
+              <a:t>Product </a:t>
+            </a:r>
+            <a:r>
+              <a:rPr lang="en-IN" dirty="0" err="1"/>
+              <a:t>Catalog</a:t>
+            </a:r>
+            <a:r>
+              <a:rPr lang="en-IN" dirty="0"/>
+              <a:t>: </a:t>
+            </a:r>
+            <a:r>
+              <a:rPr lang="en-IN" b="0" dirty="0"/>
+              <a:t>~49,688 unique products, tagged once. </a:t>
+            </a:r>
+          </a:p>
+          <a:p>
+            <a:pPr lvl="0" indent="-144000">
+              <a:lnSpc>
+                <a:spcPct val="85000"/>
+              </a:lnSpc>
+              <a:spcBef>
+                <a:spcPts val="0"/>
+              </a:spcBef>
+            </a:pPr>
+            <a:r>
+              <a:rPr lang="en-IN" dirty="0"/>
+              <a:t>LLM Tagging: </a:t>
+            </a:r>
+            <a:r>
+              <a:rPr lang="en-IN" b="0" dirty="0"/>
+              <a:t>GPT/Gemini/</a:t>
+            </a:r>
+            <a:r>
+              <a:rPr lang="en-IN" b="0" dirty="0" err="1"/>
+              <a:t>Ollama</a:t>
+            </a:r>
+            <a:r>
+              <a:rPr lang="en-IN" b="0" dirty="0"/>
+              <a:t> classifies household, mission, convenience, and </a:t>
+            </a:r>
+            <a:r>
+              <a:rPr lang="en-IN" b="0" dirty="0" err="1"/>
+              <a:t>behavior</a:t>
+            </a:r>
+            <a:r>
+              <a:rPr lang="en-IN" b="0" dirty="0"/>
+              <a:t>. </a:t>
+            </a:r>
+          </a:p>
+          <a:p>
+            <a:pPr lvl="0" indent="-144000">
+              <a:lnSpc>
+                <a:spcPct val="85000"/>
+              </a:lnSpc>
+              <a:spcBef>
+                <a:spcPts val="0"/>
+              </a:spcBef>
+            </a:pPr>
+            <a:r>
+              <a:rPr lang="en-IN" dirty="0"/>
+              <a:t>Feature Aggregation: </a:t>
+            </a:r>
+            <a:r>
+              <a:rPr lang="en-IN" b="0" dirty="0"/>
+              <a:t>Converts product tags into basket- and user-level features. </a:t>
+            </a:r>
+          </a:p>
+          <a:p>
+            <a:pPr lvl="0" indent="-144000">
+              <a:lnSpc>
+                <a:spcPct val="85000"/>
+              </a:lnSpc>
+              <a:spcBef>
+                <a:spcPts val="0"/>
+              </a:spcBef>
+            </a:pPr>
+            <a:r>
+              <a:rPr lang="en-IN" dirty="0"/>
+              <a:t>Caching &amp; Storage:</a:t>
+            </a:r>
+            <a:r>
+              <a:rPr lang="en-IN" b="0" dirty="0"/>
+              <a:t> Caches results and stores tagged data in SQLite.</a:t>
+            </a:r>
+          </a:p>
+        </p:txBody>
+      </p:sp>
+    </p:spTree>
+    <p:extLst>
+      <p:ext uri="{BB962C8B-B14F-4D97-AF65-F5344CB8AC3E}">
+        <p14:creationId xmlns:p14="http://schemas.microsoft.com/office/powerpoint/2010/main" val="2999161694"/>
+      </p:ext>
+    </p:extLst>
+  </p:cSld>
+  <p:clrMapOvr>
+    <a:masterClrMapping/>
+  </p:clrMapOvr>
+  <mc:AlternateContent xmlns:mc="http://schemas.openxmlformats.org/markup-compatibility/2006" xmlns:p159="http://schemas.microsoft.com/office/powerpoint/2015/09/main">
+    <mc:Choice Requires="p159">
+      <p:transition xmlns:p14="http://schemas.microsoft.com/office/powerpoint/2010/main" spd="slow" p14:dur="2000">
+        <p159:morph option="byObject"/>
+      </p:transition>
+    </mc:Choice>
+    <mc:Fallback xmlns="">
+      <p:transition spd="slow">
+        <p:fade/>
+      </p:transition>
+    </mc:Fallback>
+  </mc:AlternateContent>
+  <p:timing>
+    <p:tnLst>
+      <p:par>
+        <p:cTn id="1" dur="indefinite" restart="never" nodeType="tmRoot">
+          <p:childTnLst>
+            <p:seq concurrent="1" nextAc="seek">
+              <p:cTn id="2" dur="indefinite" nodeType="mainSeq">
+                <p:childTnLst>
+                  <p:par>
+                    <p:cTn id="3" fill="hold">
+                      <p:stCondLst>
+                        <p:cond delay="indefinite"/>
+                        <p:cond evt="onBegin" delay="0">
+                          <p:tn val="2"/>
+                        </p:cond>
+                      </p:stCondLst>
+                      <p:childTnLst>
+                        <p:par>
+                          <p:cTn id="4" fill="hold">
+                            <p:stCondLst>
+                              <p:cond delay="0"/>
+                            </p:stCondLst>
+                            <p:childTnLst>
+                              <p:par>
+                                <p:cTn id="5" presetID="1" presetClass="entr" presetSubtype="0" fill="hold" nodeType="withEffect">
+                                  <p:stCondLst>
+                                    <p:cond delay="0"/>
+                                  </p:stCondLst>
+                                  <p:childTnLst>
+                                    <p:set>
+                                      <p:cBhvr>
+                                        <p:cTn id="6" dur="1" fill="hold">
+                                          <p:stCondLst>
+                                            <p:cond delay="0"/>
+                                          </p:stCondLst>
+                                        </p:cTn>
+                                        <p:tgtEl>
+                                          <p:spTgt spid="4"/>
+                                        </p:tgtEl>
+                                        <p:attrNameLst>
+                                          <p:attrName>style.visibility</p:attrName>
+                                        </p:attrNameLst>
+                                      </p:cBhvr>
+                                      <p:to>
+                                        <p:strVal val="visible"/>
+                                      </p:to>
+                                    </p:set>
+                                  </p:childTnLst>
+                                </p:cTn>
+                              </p:par>
+                              <p:par>
+                                <p:cTn id="7" presetID="1" presetClass="entr" presetSubtype="0" fill="hold" nodeType="withEffect">
+                                  <p:stCondLst>
+                                    <p:cond delay="0"/>
+                                  </p:stCondLst>
+                                  <p:childTnLst>
+                                    <p:set>
+                                      <p:cBhvr>
+                                        <p:cTn id="8" dur="1" fill="hold">
+                                          <p:stCondLst>
+                                            <p:cond delay="0"/>
+                                          </p:stCondLst>
+                                        </p:cTn>
+                                        <p:tgtEl>
+                                          <p:spTgt spid="6"/>
+                                        </p:tgtEl>
+                                        <p:attrNameLst>
+                                          <p:attrName>style.visibility</p:attrName>
+                                        </p:attrNameLst>
+                                      </p:cBhvr>
+                                      <p:to>
+                                        <p:strVal val="visible"/>
+                                      </p:to>
+                                    </p:set>
+                                  </p:childTnLst>
+                                </p:cTn>
+                              </p:par>
+                            </p:childTnLst>
+                          </p:cTn>
+                        </p:par>
+                      </p:childTnLst>
+                    </p:cTn>
+                  </p:par>
+                </p:childTnLst>
+              </p:cTn>
+              <p:prevCondLst>
+                <p:cond evt="onPrev" delay="0">
+                  <p:tgtEl>
+                    <p:sldTgt/>
+                  </p:tgtEl>
+                </p:cond>
+              </p:prevCondLst>
+              <p:nextCondLst>
+                <p:cond evt="onNext" delay="0">
+                  <p:tgtEl>
+                    <p:sldTgt/>
+                  </p:tgtEl>
+                </p:cond>
+              </p:nextCondLst>
+            </p:seq>
+          </p:childTnLst>
+        </p:cTn>
+      </p:par>
+    </p:tnLst>
+  </p:timing>
+</p:sld>
+</file>
+
+<file path=ppt/slides/slide11.xml><?xml version="1.0" encoding="utf-8"?>
+<p:sld xmlns:a="http://schemas.openxmlformats.org/drawingml/2006/main" xmlns:r="http://schemas.openxmlformats.org/officeDocument/2006/relationships" xmlns:p="http://schemas.openxmlformats.org/presentationml/2006/main">
+  <p:cSld>
+    <p:spTree>
+      <p:nvGrpSpPr>
+        <p:cNvPr id="1" name="">
+          <a:extLst>
+            <a:ext uri="{FF2B5EF4-FFF2-40B4-BE49-F238E27FC236}">
+              <a16:creationId xmlns:a16="http://schemas.microsoft.com/office/drawing/2014/main" id="{FECA6ADC-EEFE-E79B-3BA6-8D5C2DB26797}"/>
+            </a:ext>
+          </a:extLst>
+        </p:cNvPr>
+        <p:cNvGrpSpPr/>
+        <p:nvPr/>
+      </p:nvGrpSpPr>
+      <p:grpSpPr>
+        <a:xfrm>
+          <a:off x="0" y="0"/>
+          <a:ext cx="0" cy="0"/>
+          <a:chOff x="0" y="0"/>
+          <a:chExt cx="0" cy="0"/>
+        </a:xfrm>
+      </p:grpSpPr>
+      <p:sp>
+        <p:nvSpPr>
+          <p:cNvPr id="9" name="Text Placeholder 1">
+            <a:extLst>
+              <a:ext uri="{FF2B5EF4-FFF2-40B4-BE49-F238E27FC236}">
+                <a16:creationId xmlns:a16="http://schemas.microsoft.com/office/drawing/2014/main" id="{976D6DC2-23D5-6162-00C5-BBD0509C2DFF}"/>
+              </a:ext>
+            </a:extLst>
+          </p:cNvPr>
+          <p:cNvSpPr txBox="1">
+            <a:spLocks/>
+          </p:cNvSpPr>
+          <p:nvPr/>
+        </p:nvSpPr>
+        <p:spPr>
+          <a:xfrm>
+            <a:off x="288935" y="1083836"/>
+            <a:ext cx="11598264" cy="2345162"/>
           </a:xfrm>
           <a:prstGeom prst="rect">
             <a:avLst/>
@@ -4275,51 +5091,105 @@
             </a:lvl9pPr>
           </a:lstStyle>
           <a:p>
-            <a:pPr>
-              <a:spcAft>
-                <a:spcPts val="300"/>
-              </a:spcAft>
-              <a:buSzPct val="100000"/>
+            <a:pPr lvl="0" indent="-144000">
+              <a:lnSpc>
+                <a:spcPct val="100000"/>
+              </a:lnSpc>
+              <a:spcBef>
+                <a:spcPts val="200"/>
+              </a:spcBef>
             </a:pPr>
             <a:r>
-              <a:rPr lang="en-US" b="0" dirty="0">
-                <a:latin typeface="+mn-lt"/>
-                <a:ea typeface="Calibri" pitchFamily="34" charset="-122"/>
-                <a:cs typeface="Calibri" pitchFamily="34" charset="-120"/>
-              </a:rPr>
-              <a:t>Profile clusters by category, brand, product, and pack-size mix</a:t>
-            </a:r>
-            <a:endParaRPr lang="en-US" b="0" dirty="0">
-              <a:latin typeface="+mn-lt"/>
-            </a:endParaRPr>
-          </a:p>
-          <a:p>
-            <a:pPr>
-              <a:spcAft>
-                <a:spcPts val="300"/>
-              </a:spcAft>
-              <a:buSzPct val="100000"/>
+              <a:rPr lang="en-IN" dirty="0"/>
+              <a:t>Feature Matrix: </a:t>
+            </a:r>
+            <a:r>
+              <a:rPr lang="en-IN" b="0" dirty="0"/>
+              <a:t>Combines </a:t>
+            </a:r>
+            <a:r>
+              <a:rPr lang="en-IN" b="0" dirty="0" err="1"/>
+              <a:t>behavioral</a:t>
+            </a:r>
+            <a:r>
+              <a:rPr lang="en-IN" b="0" dirty="0"/>
+              <a:t> and LLM-derived features.</a:t>
+            </a:r>
+            <a:r>
+              <a:rPr lang="en-IN" dirty="0"/>
+              <a:t> </a:t>
+            </a:r>
+          </a:p>
+          <a:p>
+            <a:pPr lvl="0" indent="-144000">
+              <a:lnSpc>
+                <a:spcPct val="100000"/>
+              </a:lnSpc>
+              <a:spcBef>
+                <a:spcPts val="200"/>
+              </a:spcBef>
             </a:pPr>
             <a:r>
-              <a:rPr lang="en-US" b="0" dirty="0">
-                <a:latin typeface="+mn-lt"/>
-                <a:ea typeface="Calibri" pitchFamily="34" charset="-122"/>
-                <a:cs typeface="Calibri" pitchFamily="34" charset="-120"/>
-              </a:rPr>
-              <a:t>Compare basket size, order timing, and reorder behavior per cluster</a:t>
-            </a:r>
-            <a:endParaRPr lang="en-US" b="0" dirty="0">
-              <a:latin typeface="+mn-lt"/>
-            </a:endParaRPr>
+              <a:rPr lang="en-IN" dirty="0"/>
+              <a:t>Dimensionality Reduction: </a:t>
+            </a:r>
+            <a:r>
+              <a:rPr lang="en-IN" b="0" dirty="0"/>
+              <a:t>Uses UMAP before clustering. </a:t>
+            </a:r>
+          </a:p>
+          <a:p>
+            <a:pPr lvl="0" indent="-144000">
+              <a:lnSpc>
+                <a:spcPct val="100000"/>
+              </a:lnSpc>
+              <a:spcBef>
+                <a:spcPts val="200"/>
+              </a:spcBef>
+            </a:pPr>
+            <a:r>
+              <a:rPr lang="en-IN" dirty="0"/>
+              <a:t>Clustering:</a:t>
+            </a:r>
+            <a:r>
+              <a:rPr lang="en-IN" b="0" dirty="0"/>
+              <a:t> Applies K-Means, GMM, Hierarchical or DBSCAN. </a:t>
+            </a:r>
+          </a:p>
+          <a:p>
+            <a:pPr lvl="0" indent="-144000">
+              <a:lnSpc>
+                <a:spcPct val="100000"/>
+              </a:lnSpc>
+              <a:spcBef>
+                <a:spcPts val="200"/>
+              </a:spcBef>
+            </a:pPr>
+            <a:r>
+              <a:rPr lang="en-IN" dirty="0"/>
+              <a:t>Evaluation &amp; Tracking: </a:t>
+            </a:r>
+            <a:r>
+              <a:rPr lang="en-IN" b="0" dirty="0"/>
+              <a:t>Uses Silhouette/DB scores and </a:t>
+            </a:r>
+            <a:r>
+              <a:rPr lang="en-IN" b="0" dirty="0" err="1"/>
+              <a:t>MLflow</a:t>
+            </a:r>
+            <a:r>
+              <a:rPr lang="en-IN" b="0" dirty="0"/>
+              <a:t>; assigns plain-language shopper signatures.</a:t>
+            </a:r>
           </a:p>
         </p:txBody>
       </p:sp>
       <p:sp>
         <p:nvSpPr>
-          <p:cNvPr id="7" name="TextBox 6">
+          <p:cNvPr id="10" name="TextBox 9">
             <a:extLst>
               <a:ext uri="{FF2B5EF4-FFF2-40B4-BE49-F238E27FC236}">
-                <a16:creationId xmlns:a16="http://schemas.microsoft.com/office/drawing/2014/main" id="{5E16D12B-6731-C6D7-6FDE-7D170413D9C1}"/>
+                <a16:creationId xmlns:a16="http://schemas.microsoft.com/office/drawing/2014/main" id="{BE1E606C-F075-8220-6E9D-3AAED16AB670}"/>
               </a:ext>
             </a:extLst>
           </p:cNvPr>
@@ -4328,7 +5198,7 @@
         </p:nvSpPr>
         <p:spPr>
           <a:xfrm>
-            <a:off x="388950" y="934577"/>
+            <a:off x="228974" y="373038"/>
             <a:ext cx="10624338" cy="646331"/>
           </a:xfrm>
           <a:prstGeom prst="rect">
@@ -4354,7 +5224,7 @@
                 </a:solidFill>
                 <a:latin typeface="Calibri" panose="020F0502020204030204"/>
               </a:rPr>
-              <a:t>Comparative Analysis</a:t>
+              <a:t>Pattern Discovery</a:t>
             </a:r>
             <a:endParaRPr kumimoji="0" lang="en-US" sz="3600" b="1" i="0" u="none" strike="noStrike" kern="1200" cap="none" spc="0" normalizeH="0" baseline="0" noProof="0" dirty="0">
               <a:ln>
@@ -4377,10 +5247,10 @@
       </p:sp>
       <p:cxnSp>
         <p:nvCxnSpPr>
-          <p:cNvPr id="8" name="Straight Connector 7">
+          <p:cNvPr id="11" name="Straight Connector 10">
             <a:extLst>
               <a:ext uri="{FF2B5EF4-FFF2-40B4-BE49-F238E27FC236}">
-                <a16:creationId xmlns:a16="http://schemas.microsoft.com/office/drawing/2014/main" id="{61CB10F8-F3D2-308E-0E1D-E874532BBADB}"/>
+                <a16:creationId xmlns:a16="http://schemas.microsoft.com/office/drawing/2014/main" id="{CB74648D-3827-A18C-0CDB-790C9D286FA3}"/>
               </a:ext>
             </a:extLst>
           </p:cNvPr>
@@ -4391,7 +5261,7 @@
         </p:nvCxnSpPr>
         <p:spPr>
           <a:xfrm>
-            <a:off x="388950" y="1580908"/>
+            <a:off x="228974" y="1019369"/>
             <a:ext cx="7305799" cy="0"/>
           </a:xfrm>
           <a:prstGeom prst="line">
@@ -4420,10 +5290,75 @@
       </p:cxnSp>
       <p:sp>
         <p:nvSpPr>
-          <p:cNvPr id="11" name="Text Placeholder 1">
+          <p:cNvPr id="13" name="TextBox 12">
             <a:extLst>
               <a:ext uri="{FF2B5EF4-FFF2-40B4-BE49-F238E27FC236}">
-                <a16:creationId xmlns:a16="http://schemas.microsoft.com/office/drawing/2014/main" id="{D7CD2B71-6606-8BE8-CCB3-BDC7ECBE7968}"/>
+                <a16:creationId xmlns:a16="http://schemas.microsoft.com/office/drawing/2014/main" id="{EEE4BFC0-5B16-1E6C-A9F7-62630D358EEE}"/>
+              </a:ext>
+            </a:extLst>
+          </p:cNvPr>
+          <p:cNvSpPr txBox="1"/>
+          <p:nvPr/>
+        </p:nvSpPr>
+        <p:spPr>
+          <a:xfrm>
+            <a:off x="3182111" y="57036"/>
+            <a:ext cx="9009889" cy="369332"/>
+          </a:xfrm>
+          <a:prstGeom prst="rect">
+            <a:avLst/>
+          </a:prstGeom>
+          <a:noFill/>
+        </p:spPr>
+        <p:txBody>
+          <a:bodyPr wrap="square" rtlCol="0">
+            <a:spAutoFit/>
+          </a:bodyPr>
+          <a:lstStyle/>
+          <a:p>
+            <a:pPr lvl="0" algn="r">
+              <a:defRPr/>
+            </a:pPr>
+            <a:r>
+              <a:rPr lang="en-IN" b="1" dirty="0">
+                <a:solidFill>
+                  <a:schemeClr val="bg1"/>
+                </a:solidFill>
+              </a:rPr>
+              <a:t>Signature-Driven Inventory: Profiling Shopper </a:t>
+            </a:r>
+            <a:r>
+              <a:rPr lang="en-IN" b="1" dirty="0" err="1">
+                <a:solidFill>
+                  <a:schemeClr val="bg1"/>
+                </a:solidFill>
+              </a:rPr>
+              <a:t>Behavior</a:t>
+            </a:r>
+            <a:r>
+              <a:rPr lang="en-IN" b="1" dirty="0">
+                <a:solidFill>
+                  <a:schemeClr val="bg1"/>
+                </a:solidFill>
+              </a:rPr>
+              <a:t> From Basket Data</a:t>
+            </a:r>
+            <a:endParaRPr lang="en-US" sz="3200" b="1" dirty="0">
+              <a:solidFill>
+                <a:schemeClr val="bg1"/>
+              </a:solidFill>
+              <a:latin typeface="Frutiger 45 bold"/>
+              <a:cs typeface="Calibri" panose="020F0502020204030204" pitchFamily="34" charset="0"/>
+            </a:endParaRPr>
+          </a:p>
+        </p:txBody>
+      </p:sp>
+      <p:sp>
+        <p:nvSpPr>
+          <p:cNvPr id="3" name="Text Placeholder 1">
+            <a:extLst>
+              <a:ext uri="{FF2B5EF4-FFF2-40B4-BE49-F238E27FC236}">
+                <a16:creationId xmlns:a16="http://schemas.microsoft.com/office/drawing/2014/main" id="{AAC37F04-E8EF-47D8-F31E-81650B24CCFE}"/>
               </a:ext>
             </a:extLst>
           </p:cNvPr>
@@ -4434,8 +5369,8 @@
         </p:nvSpPr>
         <p:spPr>
           <a:xfrm>
-            <a:off x="423672" y="3709008"/>
-            <a:ext cx="11375172" cy="1901851"/>
+            <a:off x="603727" y="4145535"/>
+            <a:ext cx="11598264" cy="2124059"/>
           </a:xfrm>
           <a:prstGeom prst="rect">
             <a:avLst/>
@@ -4610,54 +5545,941 @@
             </a:lvl9pPr>
           </a:lstStyle>
           <a:p>
-            <a:pPr>
-              <a:spcAft>
-                <a:spcPts val="300"/>
-              </a:spcAft>
-              <a:buSzPct val="100000"/>
+            <a:pPr lvl="0"/>
+            <a:r>
+              <a:rPr lang="en-IN" dirty="0"/>
+              <a:t>Cluster Profiling: </a:t>
+            </a:r>
+            <a:r>
+              <a:rPr lang="en-IN" b="0" dirty="0" err="1"/>
+              <a:t>Analyzes</a:t>
+            </a:r>
+            <a:r>
+              <a:rPr lang="en-IN" b="0" dirty="0"/>
+              <a:t> category, brand, and pack-size preferences.</a:t>
+            </a:r>
+          </a:p>
+          <a:p>
+            <a:pPr lvl="0"/>
+            <a:r>
+              <a:rPr lang="en-IN" dirty="0"/>
+              <a:t>Basket &amp; Reorder: </a:t>
+            </a:r>
+            <a:r>
+              <a:rPr lang="en-IN" b="0" dirty="0"/>
+              <a:t>Compares basket size, reorders, and timing patterns.</a:t>
+            </a:r>
+          </a:p>
+          <a:p>
+            <a:pPr lvl="0"/>
+            <a:r>
+              <a:rPr lang="en-IN" dirty="0"/>
+              <a:t>Inventory Insights: </a:t>
+            </a:r>
+            <a:r>
+              <a:rPr lang="en-IN" b="0" dirty="0"/>
+              <a:t>Identifies bulk vs. convenience demand.</a:t>
+            </a:r>
+          </a:p>
+          <a:p>
+            <a:pPr lvl="0"/>
+            <a:r>
+              <a:rPr lang="en-IN" dirty="0"/>
+              <a:t>Dashboard Output:</a:t>
+            </a:r>
+            <a:r>
+              <a:rPr lang="en-IN" b="0" dirty="0"/>
+              <a:t> Generates summary tables for Power BI.</a:t>
+            </a:r>
+          </a:p>
+        </p:txBody>
+      </p:sp>
+      <p:sp>
+        <p:nvSpPr>
+          <p:cNvPr id="4" name="TextBox 3">
+            <a:extLst>
+              <a:ext uri="{FF2B5EF4-FFF2-40B4-BE49-F238E27FC236}">
+                <a16:creationId xmlns:a16="http://schemas.microsoft.com/office/drawing/2014/main" id="{8645B7F0-A130-27EA-4758-413A26BC0CC0}"/>
+              </a:ext>
+            </a:extLst>
+          </p:cNvPr>
+          <p:cNvSpPr txBox="1"/>
+          <p:nvPr/>
+        </p:nvSpPr>
+        <p:spPr>
+          <a:xfrm>
+            <a:off x="438838" y="3374777"/>
+            <a:ext cx="10624338" cy="646331"/>
+          </a:xfrm>
+          <a:prstGeom prst="rect">
+            <a:avLst/>
+          </a:prstGeom>
+          <a:noFill/>
+        </p:spPr>
+        <p:txBody>
+          <a:bodyPr wrap="square" rtlCol="0">
+            <a:spAutoFit/>
+          </a:bodyPr>
+          <a:lstStyle/>
+          <a:p>
+            <a:pPr lvl="0">
+              <a:defRPr/>
             </a:pPr>
             <a:r>
-              <a:rPr lang="en-US" b="0" dirty="0">
-                <a:latin typeface="Calibri" pitchFamily="34" charset="0"/>
-                <a:ea typeface="Calibri" pitchFamily="34" charset="-122"/>
-                <a:cs typeface="Calibri" pitchFamily="34" charset="-120"/>
+              <a:rPr lang="en-US" sz="3600" b="1" dirty="0">
+                <a:solidFill>
+                  <a:srgbClr val="5B9BD5">
+                    <a:lumMod val="50000"/>
+                  </a:srgbClr>
+                </a:solidFill>
               </a:rPr>
-              <a:t>Power BI / native charts translating clusters into inventory action</a:t>
-            </a:r>
-            <a:endParaRPr lang="en-US" b="0" dirty="0"/>
-          </a:p>
-          <a:p>
-            <a:pPr>
-              <a:spcAft>
-                <a:spcPts val="300"/>
-              </a:spcAft>
-              <a:buSzPct val="100000"/>
-            </a:pPr>
-            <a:r>
-              <a:rPr lang="en-US" b="0" dirty="0">
-                <a:latin typeface="Calibri" pitchFamily="34" charset="0"/>
-                <a:ea typeface="Calibri" pitchFamily="34" charset="-122"/>
-                <a:cs typeface="Calibri" pitchFamily="34" charset="-120"/>
-              </a:rPr>
-              <a:t>Surface assortment and stocking recommendations per shopper signature</a:t>
-            </a:r>
-          </a:p>
-          <a:p>
-            <a:pPr>
-              <a:spcAft>
-                <a:spcPts val="300"/>
-              </a:spcAft>
-              <a:buSzPct val="100000"/>
-            </a:pPr>
-            <a:r>
-              <a:rPr lang="en-US" b="0" dirty="0">
-                <a:latin typeface="Calibri" pitchFamily="34" charset="0"/>
-                <a:ea typeface="Calibri" pitchFamily="34" charset="-122"/>
-                <a:cs typeface="Calibri" pitchFamily="34" charset="-120"/>
-              </a:rPr>
-              <a:t>Live dashboard page with filterable shopper-signature visuals</a:t>
-            </a:r>
-            <a:endParaRPr lang="en-US" b="0" dirty="0"/>
+              <a:t>Comparative Analysis</a:t>
+            </a:r>
+          </a:p>
+        </p:txBody>
+      </p:sp>
+      <p:cxnSp>
+        <p:nvCxnSpPr>
+          <p:cNvPr id="5" name="Straight Connector 4">
+            <a:extLst>
+              <a:ext uri="{FF2B5EF4-FFF2-40B4-BE49-F238E27FC236}">
+                <a16:creationId xmlns:a16="http://schemas.microsoft.com/office/drawing/2014/main" id="{4F63BA8C-24A0-8B07-E2B7-786C09F472F0}"/>
+              </a:ext>
+            </a:extLst>
+          </p:cNvPr>
+          <p:cNvCxnSpPr>
+            <a:cxnSpLocks/>
+          </p:cNvCxnSpPr>
+          <p:nvPr/>
+        </p:nvCxnSpPr>
+        <p:spPr>
+          <a:xfrm>
+            <a:off x="438838" y="4021108"/>
+            <a:ext cx="7305799" cy="0"/>
+          </a:xfrm>
+          <a:prstGeom prst="line">
+            <a:avLst/>
+          </a:prstGeom>
+          <a:ln w="28575">
+            <a:solidFill>
+              <a:schemeClr val="accent6"/>
+            </a:solidFill>
+          </a:ln>
+        </p:spPr>
+        <p:style>
+          <a:lnRef idx="1">
+            <a:schemeClr val="accent1"/>
+          </a:lnRef>
+          <a:fillRef idx="0">
+            <a:schemeClr val="accent1"/>
+          </a:fillRef>
+          <a:effectRef idx="0">
+            <a:schemeClr val="accent1"/>
+          </a:effectRef>
+          <a:fontRef idx="minor">
+            <a:schemeClr val="tx1"/>
+          </a:fontRef>
+        </p:style>
+      </p:cxnSp>
+    </p:spTree>
+    <p:extLst>
+      <p:ext uri="{BB962C8B-B14F-4D97-AF65-F5344CB8AC3E}">
+        <p14:creationId xmlns:p14="http://schemas.microsoft.com/office/powerpoint/2010/main" val="1934565814"/>
+      </p:ext>
+    </p:extLst>
+  </p:cSld>
+  <p:clrMapOvr>
+    <a:masterClrMapping/>
+  </p:clrMapOvr>
+  <mc:AlternateContent xmlns:mc="http://schemas.openxmlformats.org/markup-compatibility/2006" xmlns:p159="http://schemas.microsoft.com/office/powerpoint/2015/09/main">
+    <mc:Choice Requires="p159">
+      <p:transition xmlns:p14="http://schemas.microsoft.com/office/powerpoint/2010/main" spd="slow" p14:dur="2000">
+        <p159:morph option="byObject"/>
+      </p:transition>
+    </mc:Choice>
+    <mc:Fallback xmlns="">
+      <p:transition spd="slow">
+        <p:fade/>
+      </p:transition>
+    </mc:Fallback>
+  </mc:AlternateContent>
+  <p:timing>
+    <p:tnLst>
+      <p:par>
+        <p:cTn id="1" dur="indefinite" restart="never" nodeType="tmRoot">
+          <p:childTnLst>
+            <p:seq concurrent="1" nextAc="seek">
+              <p:cTn id="2" dur="indefinite" nodeType="mainSeq">
+                <p:childTnLst>
+                  <p:par>
+                    <p:cTn id="3" fill="hold">
+                      <p:stCondLst>
+                        <p:cond delay="indefinite"/>
+                        <p:cond evt="onBegin" delay="0">
+                          <p:tn val="2"/>
+                        </p:cond>
+                      </p:stCondLst>
+                      <p:childTnLst>
+                        <p:par>
+                          <p:cTn id="4" fill="hold">
+                            <p:stCondLst>
+                              <p:cond delay="0"/>
+                            </p:stCondLst>
+                            <p:childTnLst>
+                              <p:par>
+                                <p:cTn id="5" presetID="1" presetClass="entr" presetSubtype="0" fill="hold" nodeType="withEffect">
+                                  <p:stCondLst>
+                                    <p:cond delay="0"/>
+                                  </p:stCondLst>
+                                  <p:childTnLst>
+                                    <p:set>
+                                      <p:cBhvr>
+                                        <p:cTn id="6" dur="1" fill="hold">
+                                          <p:stCondLst>
+                                            <p:cond delay="0"/>
+                                          </p:stCondLst>
+                                        </p:cTn>
+                                        <p:tgtEl>
+                                          <p:spTgt spid="11"/>
+                                        </p:tgtEl>
+                                        <p:attrNameLst>
+                                          <p:attrName>style.visibility</p:attrName>
+                                        </p:attrNameLst>
+                                      </p:cBhvr>
+                                      <p:to>
+                                        <p:strVal val="visible"/>
+                                      </p:to>
+                                    </p:set>
+                                  </p:childTnLst>
+                                </p:cTn>
+                              </p:par>
+                            </p:childTnLst>
+                          </p:cTn>
+                        </p:par>
+                      </p:childTnLst>
+                    </p:cTn>
+                  </p:par>
+                  <p:par>
+                    <p:cTn id="7" fill="hold">
+                      <p:stCondLst>
+                        <p:cond delay="indefinite"/>
+                      </p:stCondLst>
+                      <p:childTnLst>
+                        <p:par>
+                          <p:cTn id="8" fill="hold">
+                            <p:stCondLst>
+                              <p:cond delay="0"/>
+                            </p:stCondLst>
+                            <p:childTnLst>
+                              <p:par>
+                                <p:cTn id="9" presetID="1" presetClass="entr" presetSubtype="0" fill="hold" grpId="0" nodeType="clickEffect">
+                                  <p:stCondLst>
+                                    <p:cond delay="0"/>
+                                  </p:stCondLst>
+                                  <p:childTnLst>
+                                    <p:set>
+                                      <p:cBhvr>
+                                        <p:cTn id="10" dur="1" fill="hold">
+                                          <p:stCondLst>
+                                            <p:cond delay="0"/>
+                                          </p:stCondLst>
+                                        </p:cTn>
+                                        <p:tgtEl>
+                                          <p:spTgt spid="9">
+                                            <p:txEl>
+                                              <p:pRg st="0" end="0"/>
+                                            </p:txEl>
+                                          </p:spTgt>
+                                        </p:tgtEl>
+                                        <p:attrNameLst>
+                                          <p:attrName>style.visibility</p:attrName>
+                                        </p:attrNameLst>
+                                      </p:cBhvr>
+                                      <p:to>
+                                        <p:strVal val="visible"/>
+                                      </p:to>
+                                    </p:set>
+                                  </p:childTnLst>
+                                </p:cTn>
+                              </p:par>
+                            </p:childTnLst>
+                          </p:cTn>
+                        </p:par>
+                      </p:childTnLst>
+                    </p:cTn>
+                  </p:par>
+                  <p:par>
+                    <p:cTn id="11" fill="hold">
+                      <p:stCondLst>
+                        <p:cond delay="indefinite"/>
+                      </p:stCondLst>
+                      <p:childTnLst>
+                        <p:par>
+                          <p:cTn id="12" fill="hold">
+                            <p:stCondLst>
+                              <p:cond delay="0"/>
+                            </p:stCondLst>
+                            <p:childTnLst>
+                              <p:par>
+                                <p:cTn id="13" presetID="1" presetClass="entr" presetSubtype="0" fill="hold" grpId="0" nodeType="clickEffect">
+                                  <p:stCondLst>
+                                    <p:cond delay="0"/>
+                                  </p:stCondLst>
+                                  <p:childTnLst>
+                                    <p:set>
+                                      <p:cBhvr>
+                                        <p:cTn id="14" dur="1" fill="hold">
+                                          <p:stCondLst>
+                                            <p:cond delay="0"/>
+                                          </p:stCondLst>
+                                        </p:cTn>
+                                        <p:tgtEl>
+                                          <p:spTgt spid="9">
+                                            <p:txEl>
+                                              <p:pRg st="1" end="1"/>
+                                            </p:txEl>
+                                          </p:spTgt>
+                                        </p:tgtEl>
+                                        <p:attrNameLst>
+                                          <p:attrName>style.visibility</p:attrName>
+                                        </p:attrNameLst>
+                                      </p:cBhvr>
+                                      <p:to>
+                                        <p:strVal val="visible"/>
+                                      </p:to>
+                                    </p:set>
+                                  </p:childTnLst>
+                                </p:cTn>
+                              </p:par>
+                            </p:childTnLst>
+                          </p:cTn>
+                        </p:par>
+                      </p:childTnLst>
+                    </p:cTn>
+                  </p:par>
+                  <p:par>
+                    <p:cTn id="15" fill="hold">
+                      <p:stCondLst>
+                        <p:cond delay="indefinite"/>
+                      </p:stCondLst>
+                      <p:childTnLst>
+                        <p:par>
+                          <p:cTn id="16" fill="hold">
+                            <p:stCondLst>
+                              <p:cond delay="0"/>
+                            </p:stCondLst>
+                            <p:childTnLst>
+                              <p:par>
+                                <p:cTn id="17" presetID="1" presetClass="entr" presetSubtype="0" fill="hold" grpId="0" nodeType="clickEffect">
+                                  <p:stCondLst>
+                                    <p:cond delay="0"/>
+                                  </p:stCondLst>
+                                  <p:childTnLst>
+                                    <p:set>
+                                      <p:cBhvr>
+                                        <p:cTn id="18" dur="1" fill="hold">
+                                          <p:stCondLst>
+                                            <p:cond delay="0"/>
+                                          </p:stCondLst>
+                                        </p:cTn>
+                                        <p:tgtEl>
+                                          <p:spTgt spid="9">
+                                            <p:txEl>
+                                              <p:pRg st="2" end="2"/>
+                                            </p:txEl>
+                                          </p:spTgt>
+                                        </p:tgtEl>
+                                        <p:attrNameLst>
+                                          <p:attrName>style.visibility</p:attrName>
+                                        </p:attrNameLst>
+                                      </p:cBhvr>
+                                      <p:to>
+                                        <p:strVal val="visible"/>
+                                      </p:to>
+                                    </p:set>
+                                  </p:childTnLst>
+                                </p:cTn>
+                              </p:par>
+                            </p:childTnLst>
+                          </p:cTn>
+                        </p:par>
+                      </p:childTnLst>
+                    </p:cTn>
+                  </p:par>
+                  <p:par>
+                    <p:cTn id="19" fill="hold">
+                      <p:stCondLst>
+                        <p:cond delay="indefinite"/>
+                      </p:stCondLst>
+                      <p:childTnLst>
+                        <p:par>
+                          <p:cTn id="20" fill="hold">
+                            <p:stCondLst>
+                              <p:cond delay="0"/>
+                            </p:stCondLst>
+                            <p:childTnLst>
+                              <p:par>
+                                <p:cTn id="21" presetID="1" presetClass="entr" presetSubtype="0" fill="hold" grpId="0" nodeType="clickEffect">
+                                  <p:stCondLst>
+                                    <p:cond delay="0"/>
+                                  </p:stCondLst>
+                                  <p:childTnLst>
+                                    <p:set>
+                                      <p:cBhvr>
+                                        <p:cTn id="22" dur="1" fill="hold">
+                                          <p:stCondLst>
+                                            <p:cond delay="0"/>
+                                          </p:stCondLst>
+                                        </p:cTn>
+                                        <p:tgtEl>
+                                          <p:spTgt spid="9">
+                                            <p:txEl>
+                                              <p:pRg st="3" end="3"/>
+                                            </p:txEl>
+                                          </p:spTgt>
+                                        </p:tgtEl>
+                                        <p:attrNameLst>
+                                          <p:attrName>style.visibility</p:attrName>
+                                        </p:attrNameLst>
+                                      </p:cBhvr>
+                                      <p:to>
+                                        <p:strVal val="visible"/>
+                                      </p:to>
+                                    </p:set>
+                                  </p:childTnLst>
+                                </p:cTn>
+                              </p:par>
+                              <p:par>
+                                <p:cTn id="23" presetID="1" presetClass="entr" presetSubtype="0" fill="hold" nodeType="withEffect">
+                                  <p:stCondLst>
+                                    <p:cond delay="0"/>
+                                  </p:stCondLst>
+                                  <p:childTnLst>
+                                    <p:set>
+                                      <p:cBhvr>
+                                        <p:cTn id="24" dur="1" fill="hold">
+                                          <p:stCondLst>
+                                            <p:cond delay="0"/>
+                                          </p:stCondLst>
+                                        </p:cTn>
+                                        <p:tgtEl>
+                                          <p:spTgt spid="5"/>
+                                        </p:tgtEl>
+                                        <p:attrNameLst>
+                                          <p:attrName>style.visibility</p:attrName>
+                                        </p:attrNameLst>
+                                      </p:cBhvr>
+                                      <p:to>
+                                        <p:strVal val="visible"/>
+                                      </p:to>
+                                    </p:set>
+                                  </p:childTnLst>
+                                </p:cTn>
+                              </p:par>
+                            </p:childTnLst>
+                          </p:cTn>
+                        </p:par>
+                      </p:childTnLst>
+                    </p:cTn>
+                  </p:par>
+                  <p:par>
+                    <p:cTn id="25" fill="hold">
+                      <p:stCondLst>
+                        <p:cond delay="indefinite"/>
+                      </p:stCondLst>
+                      <p:childTnLst>
+                        <p:par>
+                          <p:cTn id="26" fill="hold">
+                            <p:stCondLst>
+                              <p:cond delay="0"/>
+                            </p:stCondLst>
+                            <p:childTnLst>
+                              <p:par>
+                                <p:cTn id="27" presetID="1" presetClass="entr" presetSubtype="0" fill="hold" grpId="0" nodeType="clickEffect">
+                                  <p:stCondLst>
+                                    <p:cond delay="0"/>
+                                  </p:stCondLst>
+                                  <p:childTnLst>
+                                    <p:set>
+                                      <p:cBhvr>
+                                        <p:cTn id="28" dur="1" fill="hold">
+                                          <p:stCondLst>
+                                            <p:cond delay="0"/>
+                                          </p:stCondLst>
+                                        </p:cTn>
+                                        <p:tgtEl>
+                                          <p:spTgt spid="3">
+                                            <p:txEl>
+                                              <p:pRg st="0" end="0"/>
+                                            </p:txEl>
+                                          </p:spTgt>
+                                        </p:tgtEl>
+                                        <p:attrNameLst>
+                                          <p:attrName>style.visibility</p:attrName>
+                                        </p:attrNameLst>
+                                      </p:cBhvr>
+                                      <p:to>
+                                        <p:strVal val="visible"/>
+                                      </p:to>
+                                    </p:set>
+                                  </p:childTnLst>
+                                </p:cTn>
+                              </p:par>
+                            </p:childTnLst>
+                          </p:cTn>
+                        </p:par>
+                      </p:childTnLst>
+                    </p:cTn>
+                  </p:par>
+                  <p:par>
+                    <p:cTn id="29" fill="hold">
+                      <p:stCondLst>
+                        <p:cond delay="indefinite"/>
+                      </p:stCondLst>
+                      <p:childTnLst>
+                        <p:par>
+                          <p:cTn id="30" fill="hold">
+                            <p:stCondLst>
+                              <p:cond delay="0"/>
+                            </p:stCondLst>
+                            <p:childTnLst>
+                              <p:par>
+                                <p:cTn id="31" presetID="1" presetClass="entr" presetSubtype="0" fill="hold" grpId="0" nodeType="clickEffect">
+                                  <p:stCondLst>
+                                    <p:cond delay="0"/>
+                                  </p:stCondLst>
+                                  <p:childTnLst>
+                                    <p:set>
+                                      <p:cBhvr>
+                                        <p:cTn id="32" dur="1" fill="hold">
+                                          <p:stCondLst>
+                                            <p:cond delay="0"/>
+                                          </p:stCondLst>
+                                        </p:cTn>
+                                        <p:tgtEl>
+                                          <p:spTgt spid="3">
+                                            <p:txEl>
+                                              <p:pRg st="1" end="1"/>
+                                            </p:txEl>
+                                          </p:spTgt>
+                                        </p:tgtEl>
+                                        <p:attrNameLst>
+                                          <p:attrName>style.visibility</p:attrName>
+                                        </p:attrNameLst>
+                                      </p:cBhvr>
+                                      <p:to>
+                                        <p:strVal val="visible"/>
+                                      </p:to>
+                                    </p:set>
+                                  </p:childTnLst>
+                                </p:cTn>
+                              </p:par>
+                            </p:childTnLst>
+                          </p:cTn>
+                        </p:par>
+                      </p:childTnLst>
+                    </p:cTn>
+                  </p:par>
+                  <p:par>
+                    <p:cTn id="33" fill="hold">
+                      <p:stCondLst>
+                        <p:cond delay="indefinite"/>
+                      </p:stCondLst>
+                      <p:childTnLst>
+                        <p:par>
+                          <p:cTn id="34" fill="hold">
+                            <p:stCondLst>
+                              <p:cond delay="0"/>
+                            </p:stCondLst>
+                            <p:childTnLst>
+                              <p:par>
+                                <p:cTn id="35" presetID="1" presetClass="entr" presetSubtype="0" fill="hold" grpId="0" nodeType="clickEffect">
+                                  <p:stCondLst>
+                                    <p:cond delay="0"/>
+                                  </p:stCondLst>
+                                  <p:childTnLst>
+                                    <p:set>
+                                      <p:cBhvr>
+                                        <p:cTn id="36" dur="1" fill="hold">
+                                          <p:stCondLst>
+                                            <p:cond delay="0"/>
+                                          </p:stCondLst>
+                                        </p:cTn>
+                                        <p:tgtEl>
+                                          <p:spTgt spid="3">
+                                            <p:txEl>
+                                              <p:pRg st="2" end="2"/>
+                                            </p:txEl>
+                                          </p:spTgt>
+                                        </p:tgtEl>
+                                        <p:attrNameLst>
+                                          <p:attrName>style.visibility</p:attrName>
+                                        </p:attrNameLst>
+                                      </p:cBhvr>
+                                      <p:to>
+                                        <p:strVal val="visible"/>
+                                      </p:to>
+                                    </p:set>
+                                  </p:childTnLst>
+                                </p:cTn>
+                              </p:par>
+                            </p:childTnLst>
+                          </p:cTn>
+                        </p:par>
+                      </p:childTnLst>
+                    </p:cTn>
+                  </p:par>
+                  <p:par>
+                    <p:cTn id="37" fill="hold">
+                      <p:stCondLst>
+                        <p:cond delay="indefinite"/>
+                      </p:stCondLst>
+                      <p:childTnLst>
+                        <p:par>
+                          <p:cTn id="38" fill="hold">
+                            <p:stCondLst>
+                              <p:cond delay="0"/>
+                            </p:stCondLst>
+                            <p:childTnLst>
+                              <p:par>
+                                <p:cTn id="39" presetID="1" presetClass="entr" presetSubtype="0" fill="hold" grpId="0" nodeType="clickEffect">
+                                  <p:stCondLst>
+                                    <p:cond delay="0"/>
+                                  </p:stCondLst>
+                                  <p:childTnLst>
+                                    <p:set>
+                                      <p:cBhvr>
+                                        <p:cTn id="40" dur="1" fill="hold">
+                                          <p:stCondLst>
+                                            <p:cond delay="0"/>
+                                          </p:stCondLst>
+                                        </p:cTn>
+                                        <p:tgtEl>
+                                          <p:spTgt spid="3">
+                                            <p:txEl>
+                                              <p:pRg st="3" end="3"/>
+                                            </p:txEl>
+                                          </p:spTgt>
+                                        </p:tgtEl>
+                                        <p:attrNameLst>
+                                          <p:attrName>style.visibility</p:attrName>
+                                        </p:attrNameLst>
+                                      </p:cBhvr>
+                                      <p:to>
+                                        <p:strVal val="visible"/>
+                                      </p:to>
+                                    </p:set>
+                                  </p:childTnLst>
+                                </p:cTn>
+                              </p:par>
+                            </p:childTnLst>
+                          </p:cTn>
+                        </p:par>
+                      </p:childTnLst>
+                    </p:cTn>
+                  </p:par>
+                </p:childTnLst>
+              </p:cTn>
+              <p:prevCondLst>
+                <p:cond evt="onPrev" delay="0">
+                  <p:tgtEl>
+                    <p:sldTgt/>
+                  </p:tgtEl>
+                </p:cond>
+              </p:prevCondLst>
+              <p:nextCondLst>
+                <p:cond evt="onNext" delay="0">
+                  <p:tgtEl>
+                    <p:sldTgt/>
+                  </p:tgtEl>
+                </p:cond>
+              </p:nextCondLst>
+            </p:seq>
+          </p:childTnLst>
+        </p:cTn>
+      </p:par>
+    </p:tnLst>
+    <p:bldLst>
+      <p:bldP spid="9" grpId="0" uiExpand="1" build="p"/>
+      <p:bldP spid="3" grpId="0" uiExpand="1" build="p"/>
+    </p:bldLst>
+  </p:timing>
+</p:sld>
+</file>
+
+<file path=ppt/slides/slide12.xml><?xml version="1.0" encoding="utf-8"?>
+<p:sld xmlns:a="http://schemas.openxmlformats.org/drawingml/2006/main" xmlns:r="http://schemas.openxmlformats.org/officeDocument/2006/relationships" xmlns:p="http://schemas.openxmlformats.org/presentationml/2006/main">
+  <p:cSld>
+    <p:spTree>
+      <p:nvGrpSpPr>
+        <p:cNvPr id="1" name="">
+          <a:extLst>
+            <a:ext uri="{FF2B5EF4-FFF2-40B4-BE49-F238E27FC236}">
+              <a16:creationId xmlns:a16="http://schemas.microsoft.com/office/drawing/2014/main" id="{DC1DCFAF-7FB5-2DAD-B684-91616B7825E4}"/>
+            </a:ext>
+          </a:extLst>
+        </p:cNvPr>
+        <p:cNvGrpSpPr/>
+        <p:nvPr/>
+      </p:nvGrpSpPr>
+      <p:grpSpPr>
+        <a:xfrm>
+          <a:off x="0" y="0"/>
+          <a:ext cx="0" cy="0"/>
+          <a:chOff x="0" y="0"/>
+          <a:chExt cx="0" cy="0"/>
+        </a:xfrm>
+      </p:grpSpPr>
+      <p:sp>
+        <p:nvSpPr>
+          <p:cNvPr id="11" name="Text Placeholder 1">
+            <a:extLst>
+              <a:ext uri="{FF2B5EF4-FFF2-40B4-BE49-F238E27FC236}">
+                <a16:creationId xmlns:a16="http://schemas.microsoft.com/office/drawing/2014/main" id="{D7CD2B71-6606-8BE8-CCB3-BDC7ECBE7968}"/>
+              </a:ext>
+            </a:extLst>
+          </p:cNvPr>
+          <p:cNvSpPr txBox="1">
+            <a:spLocks/>
+          </p:cNvSpPr>
+          <p:nvPr/>
+        </p:nvSpPr>
+        <p:spPr>
+          <a:xfrm>
+            <a:off x="423672" y="1970146"/>
+            <a:ext cx="11375172" cy="2691791"/>
+          </a:xfrm>
+          <a:prstGeom prst="rect">
+            <a:avLst/>
+          </a:prstGeom>
+        </p:spPr>
+        <p:txBody>
+          <a:bodyPr vert="horz" lIns="91440" tIns="45720" rIns="91440" bIns="45720" rtlCol="0">
+            <a:noAutofit/>
+          </a:bodyPr>
+          <a:lstStyle>
+            <a:lvl1pPr marL="228600" indent="-228600" algn="l" defTabSz="914400" rtl="0" eaLnBrk="1" latinLnBrk="0" hangingPunct="1">
+              <a:lnSpc>
+                <a:spcPct val="90000"/>
+              </a:lnSpc>
+              <a:spcBef>
+                <a:spcPts val="1000"/>
+              </a:spcBef>
+              <a:buFont typeface="Arial" panose="020B0604020202020204" pitchFamily="34" charset="0"/>
+              <a:buChar char="•"/>
+              <a:defRPr lang="en-US" sz="2800" b="1" kern="1200" dirty="0">
+                <a:solidFill>
+                  <a:srgbClr val="0070C0"/>
+                </a:solidFill>
+                <a:latin typeface="Frutiger 45 bold"/>
+                <a:ea typeface="+mn-ea"/>
+                <a:cs typeface="Calibri" panose="020F0502020204030204" pitchFamily="34" charset="0"/>
+              </a:defRPr>
+            </a:lvl1pPr>
+            <a:lvl2pPr marL="685800" indent="-228600" algn="l" defTabSz="914400" rtl="0" eaLnBrk="1" latinLnBrk="0" hangingPunct="1">
+              <a:lnSpc>
+                <a:spcPct val="90000"/>
+              </a:lnSpc>
+              <a:spcBef>
+                <a:spcPts val="500"/>
+              </a:spcBef>
+              <a:buFont typeface="Arial" panose="020B0604020202020204" pitchFamily="34" charset="0"/>
+              <a:buChar char="•"/>
+              <a:defRPr sz="2400" kern="1200">
+                <a:solidFill>
+                  <a:schemeClr val="tx1"/>
+                </a:solidFill>
+                <a:latin typeface="+mn-lt"/>
+                <a:ea typeface="+mn-ea"/>
+                <a:cs typeface="+mn-cs"/>
+              </a:defRPr>
+            </a:lvl2pPr>
+            <a:lvl3pPr marL="1143000" indent="-228600" algn="l" defTabSz="914400" rtl="0" eaLnBrk="1" latinLnBrk="0" hangingPunct="1">
+              <a:lnSpc>
+                <a:spcPct val="90000"/>
+              </a:lnSpc>
+              <a:spcBef>
+                <a:spcPts val="500"/>
+              </a:spcBef>
+              <a:buFont typeface="Arial" panose="020B0604020202020204" pitchFamily="34" charset="0"/>
+              <a:buChar char="•"/>
+              <a:defRPr sz="2000" kern="1200">
+                <a:solidFill>
+                  <a:schemeClr val="tx1"/>
+                </a:solidFill>
+                <a:latin typeface="+mn-lt"/>
+                <a:ea typeface="+mn-ea"/>
+                <a:cs typeface="+mn-cs"/>
+              </a:defRPr>
+            </a:lvl3pPr>
+            <a:lvl4pPr marL="1600200" indent="-228600" algn="l" defTabSz="914400" rtl="0" eaLnBrk="1" latinLnBrk="0" hangingPunct="1">
+              <a:lnSpc>
+                <a:spcPct val="90000"/>
+              </a:lnSpc>
+              <a:spcBef>
+                <a:spcPts val="500"/>
+              </a:spcBef>
+              <a:buFont typeface="Arial" panose="020B0604020202020204" pitchFamily="34" charset="0"/>
+              <a:buChar char="•"/>
+              <a:defRPr sz="1800" kern="1200">
+                <a:solidFill>
+                  <a:schemeClr val="tx1"/>
+                </a:solidFill>
+                <a:latin typeface="+mn-lt"/>
+                <a:ea typeface="+mn-ea"/>
+                <a:cs typeface="+mn-cs"/>
+              </a:defRPr>
+            </a:lvl4pPr>
+            <a:lvl5pPr marL="2057400" indent="-228600" algn="l" defTabSz="914400" rtl="0" eaLnBrk="1" latinLnBrk="0" hangingPunct="1">
+              <a:lnSpc>
+                <a:spcPct val="90000"/>
+              </a:lnSpc>
+              <a:spcBef>
+                <a:spcPts val="500"/>
+              </a:spcBef>
+              <a:buFont typeface="Arial" panose="020B0604020202020204" pitchFamily="34" charset="0"/>
+              <a:buChar char="•"/>
+              <a:defRPr sz="1800" kern="1200">
+                <a:solidFill>
+                  <a:schemeClr val="tx1"/>
+                </a:solidFill>
+                <a:latin typeface="+mn-lt"/>
+                <a:ea typeface="+mn-ea"/>
+                <a:cs typeface="+mn-cs"/>
+              </a:defRPr>
+            </a:lvl5pPr>
+            <a:lvl6pPr marL="2514600" indent="-228600" algn="l" defTabSz="914400" rtl="0" eaLnBrk="1" latinLnBrk="0" hangingPunct="1">
+              <a:lnSpc>
+                <a:spcPct val="90000"/>
+              </a:lnSpc>
+              <a:spcBef>
+                <a:spcPts val="500"/>
+              </a:spcBef>
+              <a:buFont typeface="Arial" panose="020B0604020202020204" pitchFamily="34" charset="0"/>
+              <a:buChar char="•"/>
+              <a:defRPr sz="1800" kern="1200">
+                <a:solidFill>
+                  <a:schemeClr val="tx1"/>
+                </a:solidFill>
+                <a:latin typeface="+mn-lt"/>
+                <a:ea typeface="+mn-ea"/>
+                <a:cs typeface="+mn-cs"/>
+              </a:defRPr>
+            </a:lvl6pPr>
+            <a:lvl7pPr marL="2971800" indent="-228600" algn="l" defTabSz="914400" rtl="0" eaLnBrk="1" latinLnBrk="0" hangingPunct="1">
+              <a:lnSpc>
+                <a:spcPct val="90000"/>
+              </a:lnSpc>
+              <a:spcBef>
+                <a:spcPts val="500"/>
+              </a:spcBef>
+              <a:buFont typeface="Arial" panose="020B0604020202020204" pitchFamily="34" charset="0"/>
+              <a:buChar char="•"/>
+              <a:defRPr sz="1800" kern="1200">
+                <a:solidFill>
+                  <a:schemeClr val="tx1"/>
+                </a:solidFill>
+                <a:latin typeface="+mn-lt"/>
+                <a:ea typeface="+mn-ea"/>
+                <a:cs typeface="+mn-cs"/>
+              </a:defRPr>
+            </a:lvl7pPr>
+            <a:lvl8pPr marL="3429000" indent="-228600" algn="l" defTabSz="914400" rtl="0" eaLnBrk="1" latinLnBrk="0" hangingPunct="1">
+              <a:lnSpc>
+                <a:spcPct val="90000"/>
+              </a:lnSpc>
+              <a:spcBef>
+                <a:spcPts val="500"/>
+              </a:spcBef>
+              <a:buFont typeface="Arial" panose="020B0604020202020204" pitchFamily="34" charset="0"/>
+              <a:buChar char="•"/>
+              <a:defRPr sz="1800" kern="1200">
+                <a:solidFill>
+                  <a:schemeClr val="tx1"/>
+                </a:solidFill>
+                <a:latin typeface="+mn-lt"/>
+                <a:ea typeface="+mn-ea"/>
+                <a:cs typeface="+mn-cs"/>
+              </a:defRPr>
+            </a:lvl8pPr>
+            <a:lvl9pPr marL="3886200" indent="-228600" algn="l" defTabSz="914400" rtl="0" eaLnBrk="1" latinLnBrk="0" hangingPunct="1">
+              <a:lnSpc>
+                <a:spcPct val="90000"/>
+              </a:lnSpc>
+              <a:spcBef>
+                <a:spcPts val="500"/>
+              </a:spcBef>
+              <a:buFont typeface="Arial" panose="020B0604020202020204" pitchFamily="34" charset="0"/>
+              <a:buChar char="•"/>
+              <a:defRPr sz="1800" kern="1200">
+                <a:solidFill>
+                  <a:schemeClr val="tx1"/>
+                </a:solidFill>
+                <a:latin typeface="+mn-lt"/>
+                <a:ea typeface="+mn-ea"/>
+                <a:cs typeface="+mn-cs"/>
+              </a:defRPr>
+            </a:lvl9pPr>
+          </a:lstStyle>
+          <a:p>
+            <a:pPr lvl="0"/>
+            <a:r>
+              <a:rPr lang="en-IN" dirty="0"/>
+              <a:t>Interactive Filters:</a:t>
+            </a:r>
+            <a:r>
+              <a:rPr lang="en-IN" b="0" dirty="0"/>
+              <a:t> Filter by household, mission, convenience, and </a:t>
+            </a:r>
+            <a:r>
+              <a:rPr lang="en-IN" b="0" dirty="0" err="1"/>
+              <a:t>behavior</a:t>
+            </a:r>
+            <a:r>
+              <a:rPr lang="en-IN" b="0" dirty="0"/>
+              <a:t>. </a:t>
+            </a:r>
+          </a:p>
+          <a:p>
+            <a:pPr lvl="0"/>
+            <a:r>
+              <a:rPr lang="en-IN" dirty="0"/>
+              <a:t>Live Insights: </a:t>
+            </a:r>
+            <a:r>
+              <a:rPr lang="en-IN" b="0" dirty="0"/>
+              <a:t>View basket size, reorder rate, and category mix by signature. </a:t>
+            </a:r>
+          </a:p>
+          <a:p>
+            <a:pPr lvl="0"/>
+            <a:r>
+              <a:rPr lang="en-IN" dirty="0"/>
+              <a:t>Visualization: </a:t>
+            </a:r>
+            <a:r>
+              <a:rPr lang="en-IN" b="0" dirty="0"/>
+              <a:t>Native </a:t>
+            </a:r>
+            <a:r>
+              <a:rPr lang="en-IN" b="0" dirty="0" err="1"/>
+              <a:t>Plotly</a:t>
+            </a:r>
+            <a:r>
+              <a:rPr lang="en-IN" b="0" dirty="0"/>
+              <a:t>/Recharts charts driven by clustering output. </a:t>
+            </a:r>
+          </a:p>
+          <a:p>
+            <a:pPr lvl="0"/>
+            <a:r>
+              <a:rPr lang="en-IN" dirty="0"/>
+              <a:t>Power BI &amp; Design: </a:t>
+            </a:r>
+            <a:r>
+              <a:rPr lang="en-IN" b="0" dirty="0"/>
+              <a:t>Separate Power BI dashboard with consistent black-and-red theme.</a:t>
+            </a:r>
           </a:p>
         </p:txBody>
       </p:sp>
@@ -4675,7 +6497,7 @@
         </p:nvSpPr>
         <p:spPr>
           <a:xfrm>
-            <a:off x="388950" y="2983215"/>
+            <a:off x="388950" y="704713"/>
             <a:ext cx="10624338" cy="646331"/>
           </a:xfrm>
           <a:prstGeom prst="rect">
@@ -4738,7 +6560,7 @@
         </p:nvCxnSpPr>
         <p:spPr>
           <a:xfrm>
-            <a:off x="388950" y="3629546"/>
+            <a:off x="388950" y="1351044"/>
             <a:ext cx="7305799" cy="0"/>
           </a:xfrm>
           <a:prstGeom prst="line">
@@ -4840,13 +6662,13 @@
   <p:clrMapOvr>
     <a:masterClrMapping/>
   </p:clrMapOvr>
-  <mc:AlternateContent xmlns:mc="http://schemas.openxmlformats.org/markup-compatibility/2006">
-    <mc:Choice xmlns:p159="http://schemas.microsoft.com/office/powerpoint/2015/09/main" Requires="p159">
+  <mc:AlternateContent xmlns:mc="http://schemas.openxmlformats.org/markup-compatibility/2006" xmlns:p159="http://schemas.microsoft.com/office/powerpoint/2015/09/main">
+    <mc:Choice Requires="p159">
       <p:transition xmlns:p14="http://schemas.microsoft.com/office/powerpoint/2010/main" spd="slow" p14:dur="2000">
         <p159:morph option="byObject"/>
       </p:transition>
     </mc:Choice>
-    <mc:Fallback>
+    <mc:Fallback xmlns="">
       <p:transition spd="slow">
         <p:fade/>
       </p:transition>
@@ -4889,7 +6711,7 @@
                                           </p:stCondLst>
                                         </p:cTn>
                                         <p:tgtEl>
-                                          <p:spTgt spid="8"/>
+                                          <p:spTgt spid="13"/>
                                         </p:tgtEl>
                                         <p:attrNameLst>
                                           <p:attrName>style.visibility</p:attrName>
@@ -4934,7 +6756,7 @@
                                           </p:stCondLst>
                                         </p:cTn>
                                         <p:tgtEl>
-                                          <p:spTgt spid="5">
+                                          <p:spTgt spid="11">
                                             <p:txEl>
                                               <p:pRg st="0" end="0"/>
                                             </p:txEl>
@@ -4983,131 +6805,6 @@
                                           </p:stCondLst>
                                         </p:cTn>
                                         <p:tgtEl>
-                                          <p:spTgt spid="5">
-                                            <p:txEl>
-                                              <p:pRg st="1" end="1"/>
-                                            </p:txEl>
-                                          </p:spTgt>
-                                        </p:tgtEl>
-                                        <p:attrNameLst>
-                                          <p:attrName>style.visibility</p:attrName>
-                                        </p:attrNameLst>
-                                      </p:cBhvr>
-                                      <p:to>
-                                        <p:strVal val="visible"/>
-                                      </p:to>
-                                    </p:set>
-                                  </p:childTnLst>
-                                </p:cTn>
-                              </p:par>
-                              <p:par>
-                                <p:cTn id="15" presetID="1" presetClass="entr" presetSubtype="0" fill="hold" nodeType="withEffect">
-                                  <p:stCondLst>
-                                    <p:cond delay="0"/>
-                                  </p:stCondLst>
-                                  <p:childTnLst>
-                                    <p:set>
-                                      <p:cBhvr>
-                                        <p:cTn id="16" dur="1" fill="hold">
-                                          <p:stCondLst>
-                                            <p:cond delay="0"/>
-                                          </p:stCondLst>
-                                        </p:cTn>
-                                        <p:tgtEl>
-                                          <p:spTgt spid="13"/>
-                                        </p:tgtEl>
-                                        <p:attrNameLst>
-                                          <p:attrName>style.visibility</p:attrName>
-                                        </p:attrNameLst>
-                                      </p:cBhvr>
-                                      <p:to>
-                                        <p:strVal val="visible"/>
-                                      </p:to>
-                                    </p:set>
-                                  </p:childTnLst>
-                                </p:cTn>
-                              </p:par>
-                            </p:childTnLst>
-                          </p:cTn>
-                        </p:par>
-                      </p:childTnLst>
-                    </p:cTn>
-                  </p:par>
-                  <p:par>
-                    <p:cTn id="17" fill="hold">
-                      <p:stCondLst>
-                        <p:cond delay="indefinite"/>
-                      </p:stCondLst>
-                      <p:childTnLst>
-                        <p:par>
-                          <p:cTn id="18" fill="hold">
-                            <p:stCondLst>
-                              <p:cond delay="0"/>
-                            </p:stCondLst>
-                            <p:childTnLst>
-                              <p:par>
-                                <p:cTn id="19" presetID="1" presetClass="entr" presetSubtype="0" fill="hold" grpId="0" nodeType="clickEffect">
-                                  <p:stCondLst>
-                                    <p:cond delay="0"/>
-                                  </p:stCondLst>
-                                  <p:childTnLst>
-                                    <p:set>
-                                      <p:cBhvr>
-                                        <p:cTn id="20" dur="1" fill="hold">
-                                          <p:stCondLst>
-                                            <p:cond delay="0"/>
-                                          </p:stCondLst>
-                                        </p:cTn>
-                                        <p:tgtEl>
-                                          <p:spTgt spid="11">
-                                            <p:txEl>
-                                              <p:pRg st="0" end="0"/>
-                                            </p:txEl>
-                                          </p:spTgt>
-                                        </p:tgtEl>
-                                        <p:attrNameLst>
-                                          <p:attrName>style.visibility</p:attrName>
-                                        </p:attrNameLst>
-                                      </p:cBhvr>
-                                      <p:to>
-                                        <p:strVal val="visible"/>
-                                      </p:to>
-                                    </p:set>
-                                  </p:childTnLst>
-                                </p:cTn>
-                              </p:par>
-                            </p:childTnLst>
-                          </p:cTn>
-                        </p:par>
-                      </p:childTnLst>
-                    </p:cTn>
-                  </p:par>
-                  <p:par>
-                    <p:cTn id="21" fill="hold">
-                      <p:stCondLst>
-                        <p:cond delay="indefinite"/>
-                      </p:stCondLst>
-                      <p:childTnLst>
-                        <p:par>
-                          <p:cTn id="22" fill="hold">
-                            <p:stCondLst>
-                              <p:cond delay="0"/>
-                            </p:stCondLst>
-                            <p:childTnLst>
-                              <p:par>
-                                <p:cTn id="23" presetID="1" presetClass="entr" presetSubtype="0" fill="hold" grpId="0" nodeType="clickEffect">
-                                  <p:stCondLst>
-                                    <p:cond delay="0"/>
-                                  </p:stCondLst>
-                                  <p:childTnLst>
-                                    <p:set>
-                                      <p:cBhvr>
-                                        <p:cTn id="24" dur="1" fill="hold">
-                                          <p:stCondLst>
-                                            <p:cond delay="0"/>
-                                          </p:stCondLst>
-                                        </p:cTn>
-                                        <p:tgtEl>
                                           <p:spTgt spid="11">
                                             <p:txEl>
                                               <p:pRg st="1" end="1"/>
@@ -5132,26 +6829,26 @@
                     </p:cTn>
                   </p:par>
                   <p:par>
-                    <p:cTn id="25" fill="hold">
+                    <p:cTn id="15" fill="hold">
                       <p:stCondLst>
                         <p:cond delay="indefinite"/>
                       </p:stCondLst>
                       <p:childTnLst>
                         <p:par>
-                          <p:cTn id="26" fill="hold">
+                          <p:cTn id="16" fill="hold">
                             <p:stCondLst>
                               <p:cond delay="0"/>
                             </p:stCondLst>
                             <p:childTnLst>
                               <p:par>
-                                <p:cTn id="27" presetID="1" presetClass="entr" presetSubtype="0" fill="hold" grpId="0" nodeType="clickEffect">
+                                <p:cTn id="17" presetID="1" presetClass="entr" presetSubtype="0" fill="hold" grpId="0" nodeType="clickEffect">
                                   <p:stCondLst>
                                     <p:cond delay="0"/>
                                   </p:stCondLst>
                                   <p:childTnLst>
                                     <p:set>
                                       <p:cBhvr>
-                                        <p:cTn id="28" dur="1" fill="hold">
+                                        <p:cTn id="18" dur="1" fill="hold">
                                           <p:stCondLst>
                                             <p:cond delay="0"/>
                                           </p:stCondLst>
@@ -5160,6 +6857,55 @@
                                           <p:spTgt spid="11">
                                             <p:txEl>
                                               <p:pRg st="2" end="2"/>
+                                            </p:txEl>
+                                          </p:spTgt>
+                                        </p:tgtEl>
+                                        <p:attrNameLst>
+                                          <p:attrName>style.visibility</p:attrName>
+                                        </p:attrNameLst>
+                                      </p:cBhvr>
+                                      <p:to>
+                                        <p:strVal val="visible"/>
+                                      </p:to>
+                                    </p:set>
+                                  </p:childTnLst>
+                                </p:cTn>
+                              </p:par>
+                            </p:childTnLst>
+                          </p:cTn>
+                        </p:par>
+                      </p:childTnLst>
+                    </p:cTn>
+                  </p:par>
+                  <p:par>
+                    <p:cTn id="19" fill="hold">
+                      <p:stCondLst>
+                        <p:cond delay="indefinite"/>
+                      </p:stCondLst>
+                      <p:childTnLst>
+                        <p:par>
+                          <p:cTn id="20" fill="hold">
+                            <p:stCondLst>
+                              <p:cond delay="0"/>
+                            </p:stCondLst>
+                            <p:childTnLst>
+                              <p:par>
+                                <p:cTn id="21" presetID="1" presetClass="entr" presetSubtype="0" fill="hold" grpId="0" nodeType="clickEffect">
+                                  <p:stCondLst>
+                                    <p:cond delay="0"/>
+                                  </p:stCondLst>
+                                  <p:childTnLst>
+                                    <p:set>
+                                      <p:cBhvr>
+                                        <p:cTn id="22" dur="1" fill="hold">
+                                          <p:stCondLst>
+                                            <p:cond delay="0"/>
+                                          </p:stCondLst>
+                                        </p:cTn>
+                                        <p:tgtEl>
+                                          <p:spTgt spid="11">
+                                            <p:txEl>
+                                              <p:pRg st="3" end="3"/>
                                             </p:txEl>
                                           </p:spTgt>
                                         </p:tgtEl>
@@ -5202,7 +6948,6 @@
       </p:par>
     </p:tnLst>
     <p:bldLst>
-      <p:bldP spid="5" grpId="0" uiExpand="1" build="p"/>
       <p:bldP spid="11" grpId="0" uiExpand="1" build="p"/>
     </p:bldLst>
   </p:timing>
@@ -6616,59 +8361,55 @@
         </p:nvSpPr>
         <p:spPr>
           <a:xfrm>
-            <a:off x="1416719" y="2304492"/>
-            <a:ext cx="9354348" cy="2386380"/>
+            <a:off x="534649" y="1823050"/>
+            <a:ext cx="11122702" cy="3706559"/>
           </a:xfrm>
         </p:spPr>
         <p:txBody>
           <a:bodyPr/>
           <a:lstStyle/>
           <a:p>
-            <a:pPr lvl="0"/>
-            <a:r>
-              <a:rPr lang="en-IN" b="0" dirty="0">
-                <a:latin typeface="+mn-lt"/>
-              </a:rPr>
-              <a:t>Live data ingestion simulation and </a:t>
-            </a:r>
-            <a:r>
-              <a:rPr lang="en-IN" b="0" dirty="0" err="1">
-                <a:latin typeface="+mn-lt"/>
-              </a:rPr>
-              <a:t>FastAPI</a:t>
-            </a:r>
-            <a:r>
-              <a:rPr lang="en-IN" b="0" dirty="0">
-                <a:latin typeface="+mn-lt"/>
-              </a:rPr>
-              <a:t> web dashboard</a:t>
-            </a:r>
-          </a:p>
-          <a:p>
-            <a:pPr lvl="0"/>
-            <a:r>
-              <a:rPr lang="en-IN" b="0" dirty="0">
-                <a:latin typeface="+mn-lt"/>
-              </a:rPr>
-              <a:t>Real-time production deployment at retailer scale</a:t>
-            </a:r>
-          </a:p>
-          <a:p>
-            <a:pPr lvl="0"/>
-            <a:r>
-              <a:rPr lang="en-IN" b="0" dirty="0">
-                <a:latin typeface="+mn-lt"/>
-              </a:rPr>
-              <a:t>Personally identifiable customer data (dataset is anonymized)</a:t>
-            </a:r>
-          </a:p>
-          <a:p>
-            <a:pPr lvl="0"/>
-            <a:r>
-              <a:rPr lang="en-IN" b="0" dirty="0">
-                <a:latin typeface="+mn-lt"/>
-              </a:rPr>
-              <a:t>Price or promotion optimization (inventory insight only)</a:t>
+            <a:pPr lvl="0" algn="just"/>
+            <a:r>
+              <a:rPr lang="en-IN" dirty="0"/>
+              <a:t>Inventory &amp; Assortment:</a:t>
+            </a:r>
+            <a:r>
+              <a:rPr lang="en-IN" b="0" dirty="0"/>
+              <a:t> Optimize pack sizes and product mix by store/region using shopper segments.</a:t>
+            </a:r>
+          </a:p>
+          <a:p>
+            <a:pPr lvl="0" algn="just"/>
+            <a:r>
+              <a:rPr lang="en-IN" dirty="0"/>
+              <a:t>Targeted Marketing: </a:t>
+            </a:r>
+            <a:r>
+              <a:rPr lang="en-IN" b="0" dirty="0"/>
+              <a:t>Personalize promotions, recommendations, and bundles by shopper signature.</a:t>
+            </a:r>
+          </a:p>
+          <a:p>
+            <a:pPr lvl="0" algn="just"/>
+            <a:r>
+              <a:rPr lang="en-IN" dirty="0"/>
+              <a:t>Demand Forecasting:</a:t>
+            </a:r>
+            <a:r>
+              <a:rPr lang="en-IN" b="0" dirty="0"/>
+              <a:t> Use cluster-level basket patterns to reduce overstock and stockouts.</a:t>
+            </a:r>
+          </a:p>
+          <a:p>
+            <a:pPr lvl="0" algn="just"/>
+            <a:r>
+              <a:rPr lang="en-IN" dirty="0"/>
+              <a:t>Scalable: </a:t>
+            </a:r>
+            <a:r>
+              <a:rPr lang="en-IN" b="0" dirty="0"/>
+              <a:t>Extend the pipeline to pharmacy, convenience, and e-commerce retail.</a:t>
             </a:r>
           </a:p>
         </p:txBody>
@@ -7139,7 +8880,7 @@
         </p:nvSpPr>
         <p:spPr>
           <a:xfrm>
-            <a:off x="255996" y="502545"/>
+            <a:off x="255996" y="352645"/>
             <a:ext cx="10624338" cy="646331"/>
           </a:xfrm>
           <a:prstGeom prst="rect">
@@ -7208,7 +8949,7 @@
         </p:nvCxnSpPr>
         <p:spPr>
           <a:xfrm>
-            <a:off x="221274" y="1191756"/>
+            <a:off x="221274" y="981896"/>
             <a:ext cx="7305799" cy="0"/>
           </a:xfrm>
           <a:prstGeom prst="line">
@@ -7250,14 +8991,14 @@
           <p:nvPr>
             <p:extLst>
               <p:ext uri="{D42A27DB-BD31-4B8C-83A1-F6EECF244321}">
-                <p14:modId xmlns:p14="http://schemas.microsoft.com/office/powerpoint/2010/main" val="4280382296"/>
+                <p14:modId xmlns:p14="http://schemas.microsoft.com/office/powerpoint/2010/main" val="3082582252"/>
               </p:ext>
             </p:extLst>
           </p:nvPr>
         </p:nvGraphicFramePr>
         <p:xfrm>
-          <a:off x="146304" y="1253604"/>
-          <a:ext cx="11859770" cy="5351247"/>
+          <a:off x="146304" y="1088718"/>
+          <a:ext cx="11859770" cy="5108069"/>
         </p:xfrm>
         <a:graphic>
           <a:graphicData uri="http://schemas.openxmlformats.org/drawingml/2006/table">
@@ -7273,21 +9014,21 @@
                     </a:ext>
                   </a:extLst>
                 </a:gridCol>
-                <a:gridCol w="5051992">
+                <a:gridCol w="4756108">
                   <a:extLst>
                     <a:ext uri="{9D8B030D-6E8A-4147-A177-3AD203B41FA5}">
                       <a16:colId xmlns:a16="http://schemas.microsoft.com/office/drawing/2014/main" val="471237689"/>
                     </a:ext>
                   </a:extLst>
                 </a:gridCol>
-                <a:gridCol w="2751449">
+                <a:gridCol w="1798819">
                   <a:extLst>
                     <a:ext uri="{9D8B030D-6E8A-4147-A177-3AD203B41FA5}">
                       <a16:colId xmlns:a16="http://schemas.microsoft.com/office/drawing/2014/main" val="96784165"/>
                     </a:ext>
                   </a:extLst>
                 </a:gridCol>
-                <a:gridCol w="3607252">
+                <a:gridCol w="4855766">
                   <a:extLst>
                     <a:ext uri="{9D8B030D-6E8A-4147-A177-3AD203B41FA5}">
                       <a16:colId xmlns:a16="http://schemas.microsoft.com/office/drawing/2014/main" val="3479704243"/>
@@ -7295,7 +9036,7 @@
                   </a:extLst>
                 </a:gridCol>
               </a:tblGrid>
-              <a:tr h="505895">
+              <a:tr h="333641">
                 <a:tc>
                   <a:txBody>
                     <a:bodyPr/>
@@ -7304,10 +9045,10 @@
                       <a:pPr algn="ctr">
                         <a:buNone/>
                       </a:pPr>
-                      <a:endParaRPr lang="en-IN" sz="2800" dirty="0"/>
+                      <a:endParaRPr lang="en-IN" sz="2000" dirty="0"/>
                     </a:p>
                   </a:txBody>
-                  <a:tcPr marT="0" marB="0" anchor="ctr"/>
+                  <a:tcPr marT="0" marB="0" anchor="ctr" anchorCtr="1"/>
                 </a:tc>
                 <a:tc>
                   <a:txBody>
@@ -7318,12 +9059,12 @@
                         <a:buNone/>
                       </a:pPr>
                       <a:r>
-                        <a:rPr lang="en-IN" sz="2800" dirty="0"/>
+                        <a:rPr lang="en-IN" sz="2000" dirty="0"/>
                         <a:t>Paper Title </a:t>
                       </a:r>
                     </a:p>
                   </a:txBody>
-                  <a:tcPr marT="0" marB="0" anchor="ctr"/>
+                  <a:tcPr marT="0" marB="0" anchor="ctr" anchorCtr="1"/>
                 </a:tc>
                 <a:tc>
                   <a:txBody>
@@ -7334,12 +9075,12 @@
                         <a:buNone/>
                       </a:pPr>
                       <a:r>
-                        <a:rPr lang="en-IN" sz="2800"/>
-                        <a:t>Algorithms / Models Used</a:t>
+                        <a:rPr lang="en-IN" sz="2000" dirty="0"/>
+                        <a:t>Models Used</a:t>
                       </a:r>
                     </a:p>
                   </a:txBody>
-                  <a:tcPr marT="0" marB="0" anchor="ctr"/>
+                  <a:tcPr marT="0" marB="0" anchor="ctr" anchorCtr="1"/>
                 </a:tc>
                 <a:tc>
                   <a:txBody>
@@ -7350,12 +9091,12 @@
                         <a:buNone/>
                       </a:pPr>
                       <a:r>
-                        <a:rPr lang="en-IN" sz="2800" dirty="0"/>
+                        <a:rPr lang="en-IN" sz="2000" dirty="0"/>
                         <a:t>Research Gaps</a:t>
                       </a:r>
                     </a:p>
                   </a:txBody>
-                  <a:tcPr marT="0" marB="0" anchor="ctr"/>
+                  <a:tcPr marT="0" marB="0" anchor="ctr" anchorCtr="1"/>
                 </a:tc>
                 <a:extLst>
                   <a:ext uri="{0D108BD9-81ED-4DB2-BD59-A6C34878D82A}">
@@ -7363,7 +9104,7 @@
                   </a:ext>
                 </a:extLst>
               </a:tr>
-              <a:tr h="2324985">
+              <a:tr h="1053707">
                 <a:tc>
                   <a:txBody>
                     <a:bodyPr/>
@@ -7373,12 +9114,16 @@
                         <a:buNone/>
                       </a:pPr>
                       <a:r>
-                        <a:rPr lang="en-IN" sz="2800"/>
+                        <a:rPr lang="en-IN" sz="1800">
+                          <a:solidFill>
+                            <a:srgbClr val="0070C0"/>
+                          </a:solidFill>
+                        </a:rPr>
                         <a:t>1</a:t>
                       </a:r>
                     </a:p>
                   </a:txBody>
-                  <a:tcPr marT="0" marB="0" anchor="ctr"/>
+                  <a:tcPr marL="54000" marR="54000" marT="0" marB="0"/>
                 </a:tc>
                 <a:tc>
                   <a:txBody>
@@ -7389,17 +9134,16 @@
                         <a:buNone/>
                       </a:pPr>
                       <a:r>
-                        <a:rPr lang="en-IN" sz="2800" b="0" dirty="0"/>
-                        <a:t>An Exploration of Clustering Algorithms for Customer Segmentation in the UK Retail Market </a:t>
+                        <a:rPr lang="en-IN" sz="1800" dirty="0">
+                          <a:solidFill>
+                            <a:srgbClr val="0070C0"/>
+                          </a:solidFill>
+                        </a:rPr>
+                        <a:t>Investigating Customer Segmentation Dynamics via Market Basket Analysis: An Extensive Exploration of Market Insights (ResearchGate, 2025)</a:t>
                       </a:r>
-                      <a:r>
-                        <a:rPr lang="en-IN" sz="2800" i="1" dirty="0"/>
-                        <a:t>(MDPI, 2023) </a:t>
-                      </a:r>
-                      <a:endParaRPr lang="en-IN" sz="2800" dirty="0"/>
                     </a:p>
                   </a:txBody>
-                  <a:tcPr marT="0" marB="0" anchor="ctr"/>
+                  <a:tcPr marL="54000" marR="54000" marT="0" marB="0"/>
                 </a:tc>
                 <a:tc>
                   <a:txBody>
@@ -7410,12 +9154,16 @@
                         <a:buNone/>
                       </a:pPr>
                       <a:r>
-                        <a:rPr lang="en-IN" sz="2800" b="0" dirty="0"/>
-                        <a:t>RFM features + K-Means, GMM, DBSCAN, Agglomerative, BIRCH</a:t>
+                        <a:rPr lang="en-IN" sz="1800">
+                          <a:solidFill>
+                            <a:srgbClr val="0070C0"/>
+                          </a:solidFill>
+                        </a:rPr>
+                        <a:t>K-Means clustering on market basket transaction data</a:t>
                       </a:r>
                     </a:p>
                   </a:txBody>
-                  <a:tcPr marT="0" marB="0" anchor="ctr"/>
+                  <a:tcPr marL="54000" marR="54000" marT="0" marB="0"/>
                 </a:tc>
                 <a:tc>
                   <a:txBody>
@@ -7426,19 +9174,31 @@
                         <a:buNone/>
                       </a:pPr>
                       <a:r>
-                        <a:rPr lang="en-IN" sz="2800" b="0" dirty="0"/>
-                        <a:t>– RFM-only features; ignores basket composition</a:t>
+                        <a:rPr lang="en-IN" sz="1800" dirty="0">
+                          <a:solidFill>
+                            <a:srgbClr val="0070C0"/>
+                          </a:solidFill>
+                        </a:rPr>
+                        <a:t>• Descriptive clustering only, no inventory action</a:t>
                       </a:r>
                       <a:br>
-                        <a:rPr lang="en-IN" sz="2800" b="0" dirty="0"/>
+                        <a:rPr lang="en-IN" sz="1800" dirty="0">
+                          <a:solidFill>
+                            <a:srgbClr val="0070C0"/>
+                          </a:solidFill>
+                        </a:rPr>
                       </a:br>
                       <a:r>
-                        <a:rPr lang="en-IN" sz="2800" b="0" dirty="0"/>
-                        <a:t>– Single non-grocery dataset; limited generalizability</a:t>
+                        <a:rPr lang="en-IN" sz="1800" dirty="0">
+                          <a:solidFill>
+                            <a:srgbClr val="0070C0"/>
+                          </a:solidFill>
+                        </a:rPr>
+                        <a:t>• Limited comparison across clustering algorithms</a:t>
                       </a:r>
                     </a:p>
                   </a:txBody>
-                  <a:tcPr marT="0" marB="0" anchor="ctr"/>
+                  <a:tcPr marL="54000" marR="54000" marT="0" marB="0"/>
                 </a:tc>
                 <a:extLst>
                   <a:ext uri="{0D108BD9-81ED-4DB2-BD59-A6C34878D82A}">
@@ -7446,82 +9206,462 @@
                   </a:ext>
                 </a:extLst>
               </a:tr>
-              <a:tr h="1937487">
+              <a:tr h="829476">
                 <a:tc>
                   <a:txBody>
                     <a:bodyPr/>
                     <a:lstStyle/>
                     <a:p>
-                      <a:pPr>
+                      <a:pPr algn="just">
                         <a:buNone/>
                       </a:pPr>
                       <a:r>
-                        <a:rPr lang="en-US" sz="2800" b="0" dirty="0"/>
+                        <a:rPr lang="en-GB" sz="1800" dirty="0">
+                          <a:solidFill>
+                            <a:srgbClr val="0070C0"/>
+                          </a:solidFill>
+                        </a:rPr>
                         <a:t>2</a:t>
                       </a:r>
-                      <a:endParaRPr lang="en-IN" sz="2800" b="0" dirty="0"/>
+                      <a:endParaRPr lang="en-IN" sz="1800" dirty="0">
+                        <a:solidFill>
+                          <a:srgbClr val="0070C0"/>
+                        </a:solidFill>
+                      </a:endParaRPr>
                     </a:p>
                   </a:txBody>
-                  <a:tcPr anchor="ctr"/>
+                  <a:tcPr marL="54000" marR="54000" marT="0" marB="0"/>
                 </a:tc>
                 <a:tc>
                   <a:txBody>
                     <a:bodyPr/>
                     <a:lstStyle/>
                     <a:p>
-                      <a:pPr>
+                      <a:pPr algn="just">
                         <a:buNone/>
                       </a:pPr>
                       <a:r>
-                        <a:rPr lang="en-IN" sz="2800" b="0" dirty="0"/>
-                        <a:t>K-Means Clustering-Based Market Basket Analysis: U.K. Online E-Commerce Retailer</a:t>
+                        <a:rPr lang="en-IN" sz="1800" dirty="0">
+                          <a:solidFill>
+                            <a:srgbClr val="0070C0"/>
+                          </a:solidFill>
+                        </a:rPr>
+                        <a:t>Customer-Based Market Segmentation Using Clustering in Data Mining (IEEE, 2025)</a:t>
                       </a:r>
                     </a:p>
                   </a:txBody>
-                  <a:tcPr anchor="ctr"/>
+                  <a:tcPr marL="54000" marR="54000" marT="0" marB="0"/>
                 </a:tc>
                 <a:tc>
                   <a:txBody>
                     <a:bodyPr/>
                     <a:lstStyle/>
                     <a:p>
-                      <a:pPr>
+                      <a:pPr algn="just">
                         <a:buNone/>
                       </a:pPr>
                       <a:r>
-                        <a:rPr lang="en-IN" sz="2800" b="0"/>
-                        <a:t>K-Means + Association Rule Mining</a:t>
+                        <a:rPr lang="en-IN" sz="1800" dirty="0">
+                          <a:solidFill>
+                            <a:srgbClr val="0070C0"/>
+                          </a:solidFill>
+                        </a:rPr>
+                        <a:t>RFM approach + clustering</a:t>
                       </a:r>
                     </a:p>
                   </a:txBody>
-                  <a:tcPr anchor="ctr"/>
+                  <a:tcPr marL="54000" marR="54000" marT="0" marB="0"/>
                 </a:tc>
                 <a:tc>
                   <a:txBody>
                     <a:bodyPr/>
                     <a:lstStyle/>
                     <a:p>
-                      <a:pPr>
+                      <a:pPr algn="just">
                         <a:buNone/>
                       </a:pPr>
                       <a:r>
-                        <a:rPr lang="en-IN" sz="2800" b="0" dirty="0"/>
-                        <a:t>– Single algorithm; no benchmark comparison</a:t>
+                        <a:rPr lang="en-IN" sz="1800" dirty="0">
+                          <a:solidFill>
+                            <a:srgbClr val="0070C0"/>
+                          </a:solidFill>
+                        </a:rPr>
+                        <a:t>• RFM-only features, ignores basket composition</a:t>
                       </a:r>
                       <a:br>
-                        <a:rPr lang="en-IN" sz="2800" b="0" dirty="0"/>
+                        <a:rPr lang="en-IN" sz="1800" dirty="0">
+                          <a:solidFill>
+                            <a:srgbClr val="0070C0"/>
+                          </a:solidFill>
+                        </a:rPr>
                       </a:br>
                       <a:r>
-                        <a:rPr lang="en-IN" sz="2800" b="0" dirty="0"/>
-                        <a:t>– Bundling-focused, not shopper profiling</a:t>
+                        <a:rPr lang="en-IN" sz="1800" dirty="0">
+                          <a:solidFill>
+                            <a:srgbClr val="0070C0"/>
+                          </a:solidFill>
+                        </a:rPr>
+                        <a:t>• No inventory/assortment output layer</a:t>
                       </a:r>
                     </a:p>
                   </a:txBody>
-                  <a:tcPr anchor="ctr"/>
+                  <a:tcPr marL="54000" marR="54000" marT="0" marB="0"/>
                 </a:tc>
                 <a:extLst>
                   <a:ext uri="{0D108BD9-81ED-4DB2-BD59-A6C34878D82A}">
                     <a16:rowId xmlns:a16="http://schemas.microsoft.com/office/drawing/2014/main" val="3111679754"/>
+                  </a:ext>
+                </a:extLst>
+              </a:tr>
+              <a:tr h="1141515">
+                <a:tc>
+                  <a:txBody>
+                    <a:bodyPr/>
+                    <a:lstStyle/>
+                    <a:p>
+                      <a:pPr algn="just">
+                        <a:buNone/>
+                      </a:pPr>
+                      <a:r>
+                        <a:rPr lang="en-GB" sz="1800" dirty="0">
+                          <a:solidFill>
+                            <a:srgbClr val="0070C0"/>
+                          </a:solidFill>
+                        </a:rPr>
+                        <a:t>3</a:t>
+                      </a:r>
+                      <a:endParaRPr lang="en-IN" sz="1800" dirty="0">
+                        <a:solidFill>
+                          <a:srgbClr val="0070C0"/>
+                        </a:solidFill>
+                      </a:endParaRPr>
+                    </a:p>
+                  </a:txBody>
+                  <a:tcPr/>
+                </a:tc>
+                <a:tc>
+                  <a:txBody>
+                    <a:bodyPr/>
+                    <a:lstStyle/>
+                    <a:p>
+                      <a:pPr algn="just">
+                        <a:buNone/>
+                      </a:pPr>
+                      <a:r>
+                        <a:rPr lang="en-IN" sz="1800" dirty="0">
+                          <a:solidFill>
+                            <a:srgbClr val="0070C0"/>
+                          </a:solidFill>
+                        </a:rPr>
+                        <a:t>Enhancing Customer Segmentation: RFM Analysis and K-Means Clustering Implementation (Taylor &amp; Francis, 2025)</a:t>
+                      </a:r>
+                    </a:p>
+                  </a:txBody>
+                  <a:tcPr/>
+                </a:tc>
+                <a:tc>
+                  <a:txBody>
+                    <a:bodyPr/>
+                    <a:lstStyle/>
+                    <a:p>
+                      <a:pPr algn="just">
+                        <a:buNone/>
+                      </a:pPr>
+                      <a:r>
+                        <a:rPr lang="en-IN" sz="1800" dirty="0">
+                          <a:solidFill>
+                            <a:srgbClr val="0070C0"/>
+                          </a:solidFill>
+                        </a:rPr>
+                        <a:t>RFM + K-Means clustering</a:t>
+                      </a:r>
+                    </a:p>
+                  </a:txBody>
+                  <a:tcPr/>
+                </a:tc>
+                <a:tc>
+                  <a:txBody>
+                    <a:bodyPr/>
+                    <a:lstStyle/>
+                    <a:p>
+                      <a:pPr algn="just">
+                        <a:buNone/>
+                      </a:pPr>
+                      <a:r>
+                        <a:rPr lang="en-IN" sz="1800" dirty="0">
+                          <a:solidFill>
+                            <a:srgbClr val="0070C0"/>
+                          </a:solidFill>
+                        </a:rPr>
+                        <a:t>• Transaction-value features only, no basket content</a:t>
+                      </a:r>
+                      <a:br>
+                        <a:rPr lang="en-IN" sz="1800" dirty="0">
+                          <a:solidFill>
+                            <a:srgbClr val="0070C0"/>
+                          </a:solidFill>
+                        </a:rPr>
+                      </a:br>
+                      <a:r>
+                        <a:rPr lang="en-IN" sz="1800" dirty="0">
+                          <a:solidFill>
+                            <a:srgbClr val="0070C0"/>
+                          </a:solidFill>
+                        </a:rPr>
+                        <a:t>• UK online-commerce dataset, not grocery-specific</a:t>
+                      </a:r>
+                    </a:p>
+                  </a:txBody>
+                  <a:tcPr/>
+                </a:tc>
+                <a:extLst>
+                  <a:ext uri="{0D108BD9-81ED-4DB2-BD59-A6C34878D82A}">
+                    <a16:rowId xmlns:a16="http://schemas.microsoft.com/office/drawing/2014/main" val="79496174"/>
+                  </a:ext>
+                </a:extLst>
+              </a:tr>
+              <a:tr h="829476">
+                <a:tc>
+                  <a:txBody>
+                    <a:bodyPr/>
+                    <a:lstStyle/>
+                    <a:p>
+                      <a:pPr algn="just">
+                        <a:buNone/>
+                      </a:pPr>
+                      <a:r>
+                        <a:rPr lang="en-GB" sz="1800" dirty="0">
+                          <a:solidFill>
+                            <a:srgbClr val="0070C0"/>
+                          </a:solidFill>
+                        </a:rPr>
+                        <a:t>4</a:t>
+                      </a:r>
+                      <a:endParaRPr lang="en-IN" sz="1800" dirty="0">
+                        <a:solidFill>
+                          <a:srgbClr val="0070C0"/>
+                        </a:solidFill>
+                      </a:endParaRPr>
+                    </a:p>
+                  </a:txBody>
+                  <a:tcPr/>
+                </a:tc>
+                <a:tc>
+                  <a:txBody>
+                    <a:bodyPr/>
+                    <a:lstStyle/>
+                    <a:p>
+                      <a:pPr algn="just">
+                        <a:buNone/>
+                      </a:pPr>
+                      <a:r>
+                        <a:rPr lang="en-IN" sz="1800" dirty="0">
+                          <a:solidFill>
+                            <a:srgbClr val="0070C0"/>
+                          </a:solidFill>
+                        </a:rPr>
+                        <a:t>Customer Segmentation Using Clustering Analysis (IEEE, 2025)</a:t>
+                      </a:r>
+                    </a:p>
+                  </a:txBody>
+                  <a:tcPr/>
+                </a:tc>
+                <a:tc>
+                  <a:txBody>
+                    <a:bodyPr/>
+                    <a:lstStyle/>
+                    <a:p>
+                      <a:pPr algn="just">
+                        <a:buNone/>
+                      </a:pPr>
+                      <a:r>
+                        <a:rPr lang="en-IN" sz="1800" dirty="0">
+                          <a:solidFill>
+                            <a:srgbClr val="0070C0"/>
+                          </a:solidFill>
+                        </a:rPr>
+                        <a:t>K-Means clustering</a:t>
+                      </a:r>
+                    </a:p>
+                  </a:txBody>
+                  <a:tcPr/>
+                </a:tc>
+                <a:tc>
+                  <a:txBody>
+                    <a:bodyPr/>
+                    <a:lstStyle/>
+                    <a:p>
+                      <a:pPr algn="just">
+                        <a:buNone/>
+                      </a:pPr>
+                      <a:r>
+                        <a:rPr lang="en-IN" sz="1800" dirty="0">
+                          <a:solidFill>
+                            <a:srgbClr val="0070C0"/>
+                          </a:solidFill>
+                        </a:rPr>
+                        <a:t>• Small benchmark dataset (n=200), limited scale</a:t>
+                      </a:r>
+                      <a:br>
+                        <a:rPr lang="en-IN" sz="1800" dirty="0">
+                          <a:solidFill>
+                            <a:srgbClr val="0070C0"/>
+                          </a:solidFill>
+                        </a:rPr>
+                      </a:br>
+                      <a:r>
+                        <a:rPr lang="en-IN" sz="1800" dirty="0">
+                          <a:solidFill>
+                            <a:srgbClr val="0070C0"/>
+                          </a:solidFill>
+                        </a:rPr>
+                        <a:t>• Sales-forecasting focus, not shopper profiling</a:t>
+                      </a:r>
+                    </a:p>
+                  </a:txBody>
+                  <a:tcPr/>
+                </a:tc>
+                <a:extLst>
+                  <a:ext uri="{0D108BD9-81ED-4DB2-BD59-A6C34878D82A}">
+                    <a16:rowId xmlns:a16="http://schemas.microsoft.com/office/drawing/2014/main" val="3670996867"/>
+                  </a:ext>
+                </a:extLst>
+              </a:tr>
+              <a:tr h="829476">
+                <a:tc>
+                  <a:txBody>
+                    <a:bodyPr/>
+                    <a:lstStyle/>
+                    <a:p>
+                      <a:pPr algn="just">
+                        <a:buNone/>
+                      </a:pPr>
+                      <a:r>
+                        <a:rPr lang="en-GB" sz="1600" dirty="0">
+                          <a:solidFill>
+                            <a:srgbClr val="0070C0"/>
+                          </a:solidFill>
+                        </a:rPr>
+                        <a:t>5</a:t>
+                      </a:r>
+                      <a:endParaRPr lang="en-IN" sz="1600" dirty="0">
+                        <a:solidFill>
+                          <a:srgbClr val="0070C0"/>
+                        </a:solidFill>
+                      </a:endParaRPr>
+                    </a:p>
+                  </a:txBody>
+                  <a:tcPr/>
+                </a:tc>
+                <a:tc>
+                  <a:txBody>
+                    <a:bodyPr/>
+                    <a:lstStyle/>
+                    <a:p>
+                      <a:pPr algn="just">
+                        <a:buNone/>
+                      </a:pPr>
+                      <a:r>
+                        <a:rPr lang="en-IN" sz="1600">
+                          <a:solidFill>
+                            <a:srgbClr val="0070C0"/>
+                          </a:solidFill>
+                        </a:rPr>
+                        <a:t>Data-Driven Strategic Customer Segmentation Considering Cart Abandonment Behavior: Insights from E-Grocery Delivery Platforms (ScienceDirect, 2025)</a:t>
+                      </a:r>
+                    </a:p>
+                  </a:txBody>
+                  <a:tcPr/>
+                </a:tc>
+                <a:tc>
+                  <a:txBody>
+                    <a:bodyPr/>
+                    <a:lstStyle/>
+                    <a:p>
+                      <a:pPr algn="just">
+                        <a:buNone/>
+                      </a:pPr>
+                      <a:r>
+                        <a:rPr lang="en-IN" sz="1600" dirty="0">
+                          <a:solidFill>
+                            <a:srgbClr val="0070C0"/>
+                          </a:solidFill>
+                        </a:rPr>
+                        <a:t>Extended </a:t>
+                      </a:r>
+                      <a:r>
+                        <a:rPr lang="en-IN" sz="1600" dirty="0" err="1">
+                          <a:solidFill>
+                            <a:srgbClr val="0070C0"/>
+                          </a:solidFill>
+                        </a:rPr>
+                        <a:t>RFM+delivery</a:t>
+                      </a:r>
+                      <a:r>
+                        <a:rPr lang="en-IN" sz="1600" dirty="0">
+                          <a:solidFill>
+                            <a:srgbClr val="0070C0"/>
+                          </a:solidFill>
+                        </a:rPr>
+                        <a:t> ratio+ clustering</a:t>
+                      </a:r>
+                    </a:p>
+                  </a:txBody>
+                  <a:tcPr/>
+                </a:tc>
+                <a:tc>
+                  <a:txBody>
+                    <a:bodyPr/>
+                    <a:lstStyle/>
+                    <a:p>
+                      <a:pPr algn="just">
+                        <a:buNone/>
+                      </a:pPr>
+                      <a:r>
+                        <a:rPr lang="en-IN" sz="1600" dirty="0">
+                          <a:solidFill>
+                            <a:srgbClr val="0070C0"/>
+                          </a:solidFill>
+                        </a:rPr>
+                        <a:t>• Focuses on cart abandonment</a:t>
+                      </a:r>
+                      <a:br>
+                        <a:rPr lang="en-IN" sz="1600" dirty="0">
+                          <a:solidFill>
+                            <a:srgbClr val="0070C0"/>
+                          </a:solidFill>
+                        </a:rPr>
+                      </a:br>
+                      <a:r>
+                        <a:rPr lang="en-IN" sz="1600" dirty="0">
+                          <a:solidFill>
+                            <a:srgbClr val="0070C0"/>
+                          </a:solidFill>
+                        </a:rPr>
+                        <a:t>• No product-category or pack-size level features</a:t>
+                      </a:r>
+                      <a:br>
+                        <a:rPr lang="en-IN" sz="1600" dirty="0">
+                          <a:solidFill>
+                            <a:srgbClr val="0070C0"/>
+                          </a:solidFill>
+                        </a:rPr>
+                      </a:br>
+                      <a:r>
+                        <a:rPr lang="en-IN" sz="1600" dirty="0">
+                          <a:solidFill>
+                            <a:srgbClr val="0070C0"/>
+                          </a:solidFill>
+                        </a:rPr>
+                        <a:t>• No semantic product tagging</a:t>
+                      </a:r>
+                    </a:p>
+                  </a:txBody>
+                  <a:tcPr/>
+                </a:tc>
+                <a:extLst>
+                  <a:ext uri="{0D108BD9-81ED-4DB2-BD59-A6C34878D82A}">
+                    <a16:rowId xmlns:a16="http://schemas.microsoft.com/office/drawing/2014/main" val="261897388"/>
                   </a:ext>
                 </a:extLst>
               </a:tr>
@@ -7620,6 +9760,896 @@
 </file>
 
 <file path=ppt/slides/slide6.xml><?xml version="1.0" encoding="utf-8"?>
+<p:sld xmlns:a="http://schemas.openxmlformats.org/drawingml/2006/main" xmlns:r="http://schemas.openxmlformats.org/officeDocument/2006/relationships" xmlns:p="http://schemas.openxmlformats.org/presentationml/2006/main">
+  <p:cSld>
+    <p:spTree>
+      <p:nvGrpSpPr>
+        <p:cNvPr id="1" name="">
+          <a:extLst>
+            <a:ext uri="{FF2B5EF4-FFF2-40B4-BE49-F238E27FC236}">
+              <a16:creationId xmlns:a16="http://schemas.microsoft.com/office/drawing/2014/main" id="{3CABF642-81A8-A3C0-20D8-C8EEB317AFCF}"/>
+            </a:ext>
+          </a:extLst>
+        </p:cNvPr>
+        <p:cNvGrpSpPr/>
+        <p:nvPr/>
+      </p:nvGrpSpPr>
+      <p:grpSpPr>
+        <a:xfrm>
+          <a:off x="0" y="0"/>
+          <a:ext cx="0" cy="0"/>
+          <a:chOff x="0" y="0"/>
+          <a:chExt cx="0" cy="0"/>
+        </a:xfrm>
+      </p:grpSpPr>
+      <p:sp>
+        <p:nvSpPr>
+          <p:cNvPr id="3" name="TextBox 2">
+            <a:extLst>
+              <a:ext uri="{FF2B5EF4-FFF2-40B4-BE49-F238E27FC236}">
+                <a16:creationId xmlns:a16="http://schemas.microsoft.com/office/drawing/2014/main" id="{B232485C-490F-07FD-7668-F0A01DBDF018}"/>
+              </a:ext>
+            </a:extLst>
+          </p:cNvPr>
+          <p:cNvSpPr txBox="1"/>
+          <p:nvPr/>
+        </p:nvSpPr>
+        <p:spPr>
+          <a:xfrm>
+            <a:off x="255996" y="352645"/>
+            <a:ext cx="10624338" cy="646331"/>
+          </a:xfrm>
+          <a:prstGeom prst="rect">
+            <a:avLst/>
+          </a:prstGeom>
+          <a:noFill/>
+        </p:spPr>
+        <p:txBody>
+          <a:bodyPr wrap="square" rtlCol="0">
+            <a:spAutoFit/>
+          </a:bodyPr>
+          <a:lstStyle/>
+          <a:p>
+            <a:pPr marL="0" marR="0" lvl="0" indent="0" algn="l" defTabSz="914400" rtl="0" eaLnBrk="1" fontAlgn="auto" latinLnBrk="0" hangingPunct="1">
+              <a:lnSpc>
+                <a:spcPct val="100000"/>
+              </a:lnSpc>
+              <a:spcBef>
+                <a:spcPts val="0"/>
+              </a:spcBef>
+              <a:spcAft>
+                <a:spcPts val="0"/>
+              </a:spcAft>
+              <a:buClrTx/>
+              <a:buSzTx/>
+              <a:buFontTx/>
+              <a:buNone/>
+              <a:tabLst/>
+              <a:defRPr/>
+            </a:pPr>
+            <a:r>
+              <a:rPr kumimoji="0" lang="en-US" sz="3600" b="1" i="0" u="none" strike="noStrike" kern="1200" cap="none" spc="0" normalizeH="0" baseline="0" noProof="0" dirty="0">
+                <a:ln>
+                  <a:noFill/>
+                </a:ln>
+                <a:solidFill>
+                  <a:srgbClr val="5B9BD5">
+                    <a:lumMod val="50000"/>
+                  </a:srgbClr>
+                </a:solidFill>
+                <a:effectLst/>
+                <a:uLnTx/>
+                <a:uFillTx/>
+                <a:latin typeface="Calibri" panose="020F0502020204030204"/>
+                <a:ea typeface="+mn-ea"/>
+                <a:cs typeface="+mn-cs"/>
+              </a:rPr>
+              <a:t>Literature Review</a:t>
+            </a:r>
+          </a:p>
+        </p:txBody>
+      </p:sp>
+      <p:cxnSp>
+        <p:nvCxnSpPr>
+          <p:cNvPr id="5" name="Straight Connector 4">
+            <a:extLst>
+              <a:ext uri="{FF2B5EF4-FFF2-40B4-BE49-F238E27FC236}">
+                <a16:creationId xmlns:a16="http://schemas.microsoft.com/office/drawing/2014/main" id="{FA1DB909-2241-15A6-2DF7-8239FEBB12E5}"/>
+              </a:ext>
+            </a:extLst>
+          </p:cNvPr>
+          <p:cNvCxnSpPr>
+            <a:cxnSpLocks/>
+          </p:cNvCxnSpPr>
+          <p:nvPr/>
+        </p:nvCxnSpPr>
+        <p:spPr>
+          <a:xfrm>
+            <a:off x="221274" y="981896"/>
+            <a:ext cx="7305799" cy="0"/>
+          </a:xfrm>
+          <a:prstGeom prst="line">
+            <a:avLst/>
+          </a:prstGeom>
+          <a:ln w="28575">
+            <a:solidFill>
+              <a:schemeClr val="accent6"/>
+            </a:solidFill>
+          </a:ln>
+        </p:spPr>
+        <p:style>
+          <a:lnRef idx="1">
+            <a:schemeClr val="accent1"/>
+          </a:lnRef>
+          <a:fillRef idx="0">
+            <a:schemeClr val="accent1"/>
+          </a:fillRef>
+          <a:effectRef idx="0">
+            <a:schemeClr val="accent1"/>
+          </a:effectRef>
+          <a:fontRef idx="minor">
+            <a:schemeClr val="tx1"/>
+          </a:fontRef>
+        </p:style>
+      </p:cxnSp>
+      <p:graphicFrame>
+        <p:nvGraphicFramePr>
+          <p:cNvPr id="7" name="Table 6">
+            <a:extLst>
+              <a:ext uri="{FF2B5EF4-FFF2-40B4-BE49-F238E27FC236}">
+                <a16:creationId xmlns:a16="http://schemas.microsoft.com/office/drawing/2014/main" id="{D1F2FEC3-E421-C9CB-ADBE-E04A5DA85E4D}"/>
+              </a:ext>
+            </a:extLst>
+          </p:cNvPr>
+          <p:cNvGraphicFramePr>
+            <a:graphicFrameLocks noGrp="1"/>
+          </p:cNvGraphicFramePr>
+          <p:nvPr>
+            <p:extLst>
+              <p:ext uri="{D42A27DB-BD31-4B8C-83A1-F6EECF244321}">
+                <p14:modId xmlns:p14="http://schemas.microsoft.com/office/powerpoint/2010/main" val="730961082"/>
+              </p:ext>
+            </p:extLst>
+          </p:nvPr>
+        </p:nvGraphicFramePr>
+        <p:xfrm>
+          <a:off x="146304" y="1493448"/>
+          <a:ext cx="11859770" cy="4328160"/>
+        </p:xfrm>
+        <a:graphic>
+          <a:graphicData uri="http://schemas.openxmlformats.org/drawingml/2006/table">
+            <a:tbl>
+              <a:tblPr firstRow="1" bandRow="1">
+                <a:tableStyleId>{5C22544A-7EE6-4342-B048-85BDC9FD1C3A}</a:tableStyleId>
+              </a:tblPr>
+              <a:tblGrid>
+                <a:gridCol w="449077">
+                  <a:extLst>
+                    <a:ext uri="{9D8B030D-6E8A-4147-A177-3AD203B41FA5}">
+                      <a16:colId xmlns:a16="http://schemas.microsoft.com/office/drawing/2014/main" val="2728507133"/>
+                    </a:ext>
+                  </a:extLst>
+                </a:gridCol>
+                <a:gridCol w="4756108">
+                  <a:extLst>
+                    <a:ext uri="{9D8B030D-6E8A-4147-A177-3AD203B41FA5}">
+                      <a16:colId xmlns:a16="http://schemas.microsoft.com/office/drawing/2014/main" val="471237689"/>
+                    </a:ext>
+                  </a:extLst>
+                </a:gridCol>
+                <a:gridCol w="1798819">
+                  <a:extLst>
+                    <a:ext uri="{9D8B030D-6E8A-4147-A177-3AD203B41FA5}">
+                      <a16:colId xmlns:a16="http://schemas.microsoft.com/office/drawing/2014/main" val="96784165"/>
+                    </a:ext>
+                  </a:extLst>
+                </a:gridCol>
+                <a:gridCol w="4855766">
+                  <a:extLst>
+                    <a:ext uri="{9D8B030D-6E8A-4147-A177-3AD203B41FA5}">
+                      <a16:colId xmlns:a16="http://schemas.microsoft.com/office/drawing/2014/main" val="3479704243"/>
+                    </a:ext>
+                  </a:extLst>
+                </a:gridCol>
+              </a:tblGrid>
+              <a:tr h="262192">
+                <a:tc>
+                  <a:txBody>
+                    <a:bodyPr/>
+                    <a:lstStyle/>
+                    <a:p>
+                      <a:pPr algn="ctr">
+                        <a:buNone/>
+                      </a:pPr>
+                      <a:endParaRPr lang="en-IN" sz="2000" dirty="0"/>
+                    </a:p>
+                  </a:txBody>
+                  <a:tcPr marT="0" marB="0" anchor="ctr" anchorCtr="1"/>
+                </a:tc>
+                <a:tc>
+                  <a:txBody>
+                    <a:bodyPr/>
+                    <a:lstStyle/>
+                    <a:p>
+                      <a:pPr algn="ctr">
+                        <a:buNone/>
+                      </a:pPr>
+                      <a:r>
+                        <a:rPr lang="en-IN" sz="2000" dirty="0"/>
+                        <a:t>Paper Title </a:t>
+                      </a:r>
+                    </a:p>
+                  </a:txBody>
+                  <a:tcPr marT="0" marB="0" anchor="ctr" anchorCtr="1"/>
+                </a:tc>
+                <a:tc>
+                  <a:txBody>
+                    <a:bodyPr/>
+                    <a:lstStyle/>
+                    <a:p>
+                      <a:pPr algn="ctr">
+                        <a:buNone/>
+                      </a:pPr>
+                      <a:r>
+                        <a:rPr lang="en-IN" sz="2000" dirty="0"/>
+                        <a:t>Models Used</a:t>
+                      </a:r>
+                    </a:p>
+                  </a:txBody>
+                  <a:tcPr marT="0" marB="0" anchor="ctr" anchorCtr="1"/>
+                </a:tc>
+                <a:tc>
+                  <a:txBody>
+                    <a:bodyPr/>
+                    <a:lstStyle/>
+                    <a:p>
+                      <a:pPr algn="ctr">
+                        <a:buNone/>
+                      </a:pPr>
+                      <a:r>
+                        <a:rPr lang="en-IN" sz="2000" dirty="0"/>
+                        <a:t>Research Gaps</a:t>
+                      </a:r>
+                    </a:p>
+                  </a:txBody>
+                  <a:tcPr marT="0" marB="0" anchor="ctr" anchorCtr="1"/>
+                </a:tc>
+                <a:extLst>
+                  <a:ext uri="{0D108BD9-81ED-4DB2-BD59-A6C34878D82A}">
+                    <a16:rowId xmlns:a16="http://schemas.microsoft.com/office/drawing/2014/main" val="2198453493"/>
+                  </a:ext>
+                </a:extLst>
+              </a:tr>
+              <a:tr h="707919">
+                <a:tc>
+                  <a:txBody>
+                    <a:bodyPr/>
+                    <a:lstStyle/>
+                    <a:p>
+                      <a:pPr marL="0" algn="just" rtl="0" eaLnBrk="1" fontAlgn="ctr" latinLnBrk="0" hangingPunct="1">
+                        <a:buNone/>
+                      </a:pPr>
+                      <a:r>
+                        <a:rPr lang="en-GB" sz="1600" b="0" i="0" u="none" strike="noStrike" kern="1200">
+                          <a:solidFill>
+                            <a:srgbClr val="0070C0"/>
+                          </a:solidFill>
+                          <a:effectLst/>
+                          <a:latin typeface="Calibri" panose="020F0502020204030204" pitchFamily="34" charset="0"/>
+                        </a:rPr>
+                        <a:t>6</a:t>
+                      </a:r>
+                      <a:endParaRPr lang="en-IN" sz="1600" b="0" i="0" u="none" strike="noStrike">
+                        <a:effectLst/>
+                        <a:latin typeface="Arial" panose="020B0604020202020204" pitchFamily="34" charset="0"/>
+                      </a:endParaRPr>
+                    </a:p>
+                  </a:txBody>
+                  <a:tcPr anchor="ctr"/>
+                </a:tc>
+                <a:tc>
+                  <a:txBody>
+                    <a:bodyPr/>
+                    <a:lstStyle/>
+                    <a:p>
+                      <a:pPr marL="0" algn="just" rtl="0" eaLnBrk="1" fontAlgn="ctr" latinLnBrk="0" hangingPunct="1">
+                        <a:buNone/>
+                      </a:pPr>
+                      <a:r>
+                        <a:rPr lang="en-IN" sz="1600" b="0" i="0" u="none" strike="noStrike" kern="1200">
+                          <a:solidFill>
+                            <a:srgbClr val="0070C0"/>
+                          </a:solidFill>
+                          <a:effectLst/>
+                          <a:latin typeface="Calibri" panose="020F0502020204030204" pitchFamily="34" charset="0"/>
+                        </a:rPr>
+                        <a:t>A Machine Learning Approach to Consumer Behavior in Supermarket Analytics (ScienceDirect, 2025)</a:t>
+                      </a:r>
+                      <a:endParaRPr lang="en-IN" sz="1600" b="0" i="0" u="none" strike="noStrike">
+                        <a:effectLst/>
+                        <a:latin typeface="Arial" panose="020B0604020202020204" pitchFamily="34" charset="0"/>
+                      </a:endParaRPr>
+                    </a:p>
+                  </a:txBody>
+                  <a:tcPr anchor="ctr"/>
+                </a:tc>
+                <a:tc>
+                  <a:txBody>
+                    <a:bodyPr/>
+                    <a:lstStyle/>
+                    <a:p>
+                      <a:pPr marL="0" algn="just" rtl="0" eaLnBrk="1" fontAlgn="ctr" latinLnBrk="0" hangingPunct="1">
+                        <a:buNone/>
+                      </a:pPr>
+                      <a:r>
+                        <a:rPr lang="en-IN" sz="1600" b="0" i="0" u="none" strike="noStrike" kern="1200">
+                          <a:solidFill>
+                            <a:srgbClr val="0070C0"/>
+                          </a:solidFill>
+                          <a:effectLst/>
+                          <a:latin typeface="Calibri" panose="020F0502020204030204" pitchFamily="34" charset="0"/>
+                        </a:rPr>
+                        <a:t>K-Means clustering, Elbow Method</a:t>
+                      </a:r>
+                      <a:endParaRPr lang="en-IN" sz="1600" b="0" i="0" u="none" strike="noStrike">
+                        <a:effectLst/>
+                        <a:latin typeface="Arial" panose="020B0604020202020204" pitchFamily="34" charset="0"/>
+                      </a:endParaRPr>
+                    </a:p>
+                  </a:txBody>
+                  <a:tcPr anchor="ctr"/>
+                </a:tc>
+                <a:tc>
+                  <a:txBody>
+                    <a:bodyPr/>
+                    <a:lstStyle/>
+                    <a:p>
+                      <a:pPr marL="0" algn="just" rtl="0" eaLnBrk="1" fontAlgn="ctr" latinLnBrk="0" hangingPunct="1">
+                        <a:buNone/>
+                      </a:pPr>
+                      <a:r>
+                        <a:rPr lang="en-IN" sz="1600" b="0" i="0" u="none" strike="noStrike" kern="1200" dirty="0">
+                          <a:solidFill>
+                            <a:srgbClr val="0070C0"/>
+                          </a:solidFill>
+                          <a:effectLst/>
+                          <a:latin typeface="Calibri" panose="020F0502020204030204" pitchFamily="34" charset="0"/>
+                        </a:rPr>
+                        <a:t>• Purchase-frequency features</a:t>
+                      </a:r>
+                      <a:br>
+                        <a:rPr lang="en-IN" sz="1600" b="0" i="0" u="none" strike="noStrike" kern="1200" dirty="0">
+                          <a:solidFill>
+                            <a:srgbClr val="0070C0"/>
+                          </a:solidFill>
+                          <a:effectLst/>
+                          <a:latin typeface="Calibri" panose="020F0502020204030204" pitchFamily="34" charset="0"/>
+                        </a:rPr>
+                      </a:br>
+                      <a:r>
+                        <a:rPr lang="en-IN" sz="1600" b="0" i="0" u="none" strike="noStrike" kern="1200" dirty="0">
+                          <a:solidFill>
+                            <a:srgbClr val="0070C0"/>
+                          </a:solidFill>
+                          <a:effectLst/>
+                          <a:latin typeface="Calibri" panose="020F0502020204030204" pitchFamily="34" charset="0"/>
+                        </a:rPr>
+                        <a:t>• No shopping-mission or convenience labelling</a:t>
+                      </a:r>
+                      <a:br>
+                        <a:rPr lang="en-IN" sz="1600" b="0" i="0" u="none" strike="noStrike" kern="1200" dirty="0">
+                          <a:solidFill>
+                            <a:srgbClr val="0070C0"/>
+                          </a:solidFill>
+                          <a:effectLst/>
+                          <a:latin typeface="Calibri" panose="020F0502020204030204" pitchFamily="34" charset="0"/>
+                        </a:rPr>
+                      </a:br>
+                      <a:r>
+                        <a:rPr lang="en-IN" sz="1600" b="0" i="0" u="none" strike="noStrike" kern="1200" dirty="0">
+                          <a:solidFill>
+                            <a:srgbClr val="0070C0"/>
+                          </a:solidFill>
+                          <a:effectLst/>
+                          <a:latin typeface="Calibri" panose="020F0502020204030204" pitchFamily="34" charset="0"/>
+                        </a:rPr>
+                        <a:t>• Static clustering</a:t>
+                      </a:r>
+                      <a:endParaRPr lang="en-IN" sz="1600" b="0" i="0" u="none" strike="noStrike" dirty="0">
+                        <a:effectLst/>
+                        <a:latin typeface="Arial" panose="020B0604020202020204" pitchFamily="34" charset="0"/>
+                      </a:endParaRPr>
+                    </a:p>
+                  </a:txBody>
+                  <a:tcPr anchor="ctr"/>
+                </a:tc>
+                <a:extLst>
+                  <a:ext uri="{0D108BD9-81ED-4DB2-BD59-A6C34878D82A}">
+                    <a16:rowId xmlns:a16="http://schemas.microsoft.com/office/drawing/2014/main" val="3820599226"/>
+                  </a:ext>
+                </a:extLst>
+              </a:tr>
+              <a:tr h="707919">
+                <a:tc>
+                  <a:txBody>
+                    <a:bodyPr/>
+                    <a:lstStyle/>
+                    <a:p>
+                      <a:pPr marL="0" algn="just" rtl="0" eaLnBrk="1" fontAlgn="ctr" latinLnBrk="0" hangingPunct="1">
+                        <a:buNone/>
+                      </a:pPr>
+                      <a:r>
+                        <a:rPr lang="en-IN" sz="1600" b="0" i="0" u="none" strike="noStrike" kern="1200">
+                          <a:solidFill>
+                            <a:srgbClr val="0070C0"/>
+                          </a:solidFill>
+                          <a:effectLst/>
+                          <a:latin typeface="Calibri" panose="020F0502020204030204" pitchFamily="34" charset="0"/>
+                        </a:rPr>
+                        <a:t>7</a:t>
+                      </a:r>
+                      <a:endParaRPr lang="en-IN" sz="1600" b="0" i="0" u="none" strike="noStrike">
+                        <a:effectLst/>
+                        <a:latin typeface="Arial" panose="020B0604020202020204" pitchFamily="34" charset="0"/>
+                      </a:endParaRPr>
+                    </a:p>
+                  </a:txBody>
+                  <a:tcPr anchor="ctr"/>
+                </a:tc>
+                <a:tc>
+                  <a:txBody>
+                    <a:bodyPr/>
+                    <a:lstStyle/>
+                    <a:p>
+                      <a:pPr marL="0" algn="just" rtl="0" eaLnBrk="1" fontAlgn="ctr" latinLnBrk="0" hangingPunct="1">
+                        <a:buNone/>
+                      </a:pPr>
+                      <a:r>
+                        <a:rPr lang="en-IN" sz="1600" b="0" i="0" u="none" strike="noStrike" kern="1200">
+                          <a:solidFill>
+                            <a:srgbClr val="0070C0"/>
+                          </a:solidFill>
+                          <a:effectLst/>
+                          <a:latin typeface="Calibri" panose="020F0502020204030204" pitchFamily="34" charset="0"/>
+                        </a:rPr>
+                        <a:t>Customer Segmentation Using Clustering Techniques: Data-Driven Approach to Enhance Marketing Strategy (IEEE, 2025)</a:t>
+                      </a:r>
+                      <a:endParaRPr lang="en-IN" sz="1600" b="0" i="0" u="none" strike="noStrike">
+                        <a:effectLst/>
+                        <a:latin typeface="Arial" panose="020B0604020202020204" pitchFamily="34" charset="0"/>
+                      </a:endParaRPr>
+                    </a:p>
+                  </a:txBody>
+                  <a:tcPr anchor="ctr"/>
+                </a:tc>
+                <a:tc>
+                  <a:txBody>
+                    <a:bodyPr/>
+                    <a:lstStyle/>
+                    <a:p>
+                      <a:pPr marL="0" algn="just" rtl="0" eaLnBrk="1" fontAlgn="ctr" latinLnBrk="0" hangingPunct="1">
+                        <a:buNone/>
+                      </a:pPr>
+                      <a:r>
+                        <a:rPr lang="en-IN" sz="1600" b="0" i="0" u="none" strike="noStrike" kern="1200">
+                          <a:solidFill>
+                            <a:srgbClr val="0070C0"/>
+                          </a:solidFill>
+                          <a:effectLst/>
+                          <a:latin typeface="Calibri" panose="020F0502020204030204" pitchFamily="34" charset="0"/>
+                        </a:rPr>
+                        <a:t>K-Means, Hierarchical Clustering, DBSCAN</a:t>
+                      </a:r>
+                      <a:endParaRPr lang="en-IN" sz="1600" b="0" i="0" u="none" strike="noStrike">
+                        <a:effectLst/>
+                        <a:latin typeface="Arial" panose="020B0604020202020204" pitchFamily="34" charset="0"/>
+                      </a:endParaRPr>
+                    </a:p>
+                  </a:txBody>
+                  <a:tcPr anchor="ctr"/>
+                </a:tc>
+                <a:tc>
+                  <a:txBody>
+                    <a:bodyPr/>
+                    <a:lstStyle/>
+                    <a:p>
+                      <a:pPr marL="0" algn="just" rtl="0" eaLnBrk="1" fontAlgn="ctr" latinLnBrk="0" hangingPunct="1">
+                        <a:buNone/>
+                      </a:pPr>
+                      <a:r>
+                        <a:rPr lang="en-IN" sz="1600" b="0" i="0" u="none" strike="noStrike" kern="1200" dirty="0">
+                          <a:solidFill>
+                            <a:srgbClr val="0070C0"/>
+                          </a:solidFill>
+                          <a:effectLst/>
+                          <a:latin typeface="Calibri" panose="020F0502020204030204" pitchFamily="34" charset="0"/>
+                        </a:rPr>
+                        <a:t>• Demographic/</a:t>
+                      </a:r>
+                      <a:r>
+                        <a:rPr lang="en-IN" sz="1600" b="0" i="0" u="none" strike="noStrike" kern="1200" dirty="0" err="1">
+                          <a:solidFill>
+                            <a:srgbClr val="0070C0"/>
+                          </a:solidFill>
+                          <a:effectLst/>
+                          <a:latin typeface="Calibri" panose="020F0502020204030204" pitchFamily="34" charset="0"/>
+                        </a:rPr>
+                        <a:t>behavioral</a:t>
+                      </a:r>
+                      <a:r>
+                        <a:rPr lang="en-IN" sz="1600" b="0" i="0" u="none" strike="noStrike" kern="1200" dirty="0">
+                          <a:solidFill>
+                            <a:srgbClr val="0070C0"/>
+                          </a:solidFill>
+                          <a:effectLst/>
+                          <a:latin typeface="Calibri" panose="020F0502020204030204" pitchFamily="34" charset="0"/>
+                        </a:rPr>
+                        <a:t> mall dataset</a:t>
+                      </a:r>
+                      <a:br>
+                        <a:rPr lang="en-IN" sz="1600" b="0" i="0" u="none" strike="noStrike" kern="1200" dirty="0">
+                          <a:solidFill>
+                            <a:srgbClr val="0070C0"/>
+                          </a:solidFill>
+                          <a:effectLst/>
+                          <a:latin typeface="Calibri" panose="020F0502020204030204" pitchFamily="34" charset="0"/>
+                        </a:rPr>
+                      </a:br>
+                      <a:r>
+                        <a:rPr lang="en-IN" sz="1600" b="0" i="0" u="none" strike="noStrike" kern="1200" dirty="0">
+                          <a:solidFill>
+                            <a:srgbClr val="0070C0"/>
+                          </a:solidFill>
+                          <a:effectLst/>
+                          <a:latin typeface="Calibri" panose="020F0502020204030204" pitchFamily="34" charset="0"/>
+                        </a:rPr>
+                        <a:t>• No product-category</a:t>
+                      </a:r>
+                      <a:br>
+                        <a:rPr lang="en-IN" sz="1600" b="0" i="0" u="none" strike="noStrike" kern="1200" dirty="0">
+                          <a:solidFill>
+                            <a:srgbClr val="0070C0"/>
+                          </a:solidFill>
+                          <a:effectLst/>
+                          <a:latin typeface="Calibri" panose="020F0502020204030204" pitchFamily="34" charset="0"/>
+                        </a:rPr>
+                      </a:br>
+                      <a:r>
+                        <a:rPr lang="en-IN" sz="1600" b="0" i="0" u="none" strike="noStrike" kern="1200" dirty="0">
+                          <a:solidFill>
+                            <a:srgbClr val="0070C0"/>
+                          </a:solidFill>
+                          <a:effectLst/>
+                          <a:latin typeface="Calibri" panose="020F0502020204030204" pitchFamily="34" charset="0"/>
+                        </a:rPr>
+                        <a:t>• Marketing-focused, not inventory-focused</a:t>
+                      </a:r>
+                      <a:endParaRPr lang="en-IN" sz="1600" b="0" i="0" u="none" strike="noStrike" dirty="0">
+                        <a:effectLst/>
+                        <a:latin typeface="Arial" panose="020B0604020202020204" pitchFamily="34" charset="0"/>
+                      </a:endParaRPr>
+                    </a:p>
+                  </a:txBody>
+                  <a:tcPr anchor="ctr"/>
+                </a:tc>
+                <a:extLst>
+                  <a:ext uri="{0D108BD9-81ED-4DB2-BD59-A6C34878D82A}">
+                    <a16:rowId xmlns:a16="http://schemas.microsoft.com/office/drawing/2014/main" val="3111679754"/>
+                  </a:ext>
+                </a:extLst>
+              </a:tr>
+              <a:tr h="1127426">
+                <a:tc>
+                  <a:txBody>
+                    <a:bodyPr/>
+                    <a:lstStyle/>
+                    <a:p>
+                      <a:pPr algn="just">
+                        <a:buNone/>
+                      </a:pPr>
+                      <a:r>
+                        <a:rPr lang="en-IN" sz="1600" dirty="0">
+                          <a:solidFill>
+                            <a:srgbClr val="0070C0"/>
+                          </a:solidFill>
+                        </a:rPr>
+                        <a:t>8</a:t>
+                      </a:r>
+                    </a:p>
+                  </a:txBody>
+                  <a:tcPr anchor="ctr"/>
+                </a:tc>
+                <a:tc>
+                  <a:txBody>
+                    <a:bodyPr/>
+                    <a:lstStyle/>
+                    <a:p>
+                      <a:pPr algn="just">
+                        <a:buNone/>
+                      </a:pPr>
+                      <a:r>
+                        <a:rPr lang="en-IN" sz="1600">
+                          <a:solidFill>
+                            <a:srgbClr val="0070C0"/>
+                          </a:solidFill>
+                        </a:rPr>
+                        <a:t>LLMs for Product Classification in E-Commerce: A Zero-Shot Comparative Study of GPT and Claude Models (ScienceDirect, 2025)</a:t>
+                      </a:r>
+                    </a:p>
+                  </a:txBody>
+                  <a:tcPr anchor="ctr"/>
+                </a:tc>
+                <a:tc>
+                  <a:txBody>
+                    <a:bodyPr/>
+                    <a:lstStyle/>
+                    <a:p>
+                      <a:pPr algn="just">
+                        <a:buNone/>
+                      </a:pPr>
+                      <a:r>
+                        <a:rPr lang="en-IN" sz="1600">
+                          <a:solidFill>
+                            <a:srgbClr val="0070C0"/>
+                          </a:solidFill>
+                        </a:rPr>
+                        <a:t>Zero-shot LLM classification (GPT-4o, GPT-4o mini, Claude 3.5 Sonnet/Haiku)</a:t>
+                      </a:r>
+                    </a:p>
+                  </a:txBody>
+                  <a:tcPr anchor="ctr"/>
+                </a:tc>
+                <a:tc>
+                  <a:txBody>
+                    <a:bodyPr/>
+                    <a:lstStyle/>
+                    <a:p>
+                      <a:pPr algn="just">
+                        <a:buNone/>
+                      </a:pPr>
+                      <a:r>
+                        <a:rPr lang="en-IN" sz="1600" dirty="0">
+                          <a:solidFill>
+                            <a:srgbClr val="0070C0"/>
+                          </a:solidFill>
+                        </a:rPr>
+                        <a:t>• No downstream basket- or shopper-level application</a:t>
+                      </a:r>
+                      <a:br>
+                        <a:rPr lang="en-IN" sz="1600" dirty="0">
+                          <a:solidFill>
+                            <a:srgbClr val="0070C0"/>
+                          </a:solidFill>
+                        </a:rPr>
+                      </a:br>
+                      <a:r>
+                        <a:rPr lang="en-IN" sz="1600" dirty="0">
+                          <a:solidFill>
+                            <a:srgbClr val="0070C0"/>
+                          </a:solidFill>
+                        </a:rPr>
+                        <a:t>• Evaluated on general </a:t>
+                      </a:r>
+                      <a:r>
+                        <a:rPr lang="en-IN" sz="1600" dirty="0" err="1">
+                          <a:solidFill>
+                            <a:srgbClr val="0070C0"/>
+                          </a:solidFill>
+                        </a:rPr>
+                        <a:t>catalog</a:t>
+                      </a:r>
+                      <a:endParaRPr lang="en-IN" sz="1600" dirty="0">
+                        <a:solidFill>
+                          <a:srgbClr val="0070C0"/>
+                        </a:solidFill>
+                      </a:endParaRPr>
+                    </a:p>
+                  </a:txBody>
+                  <a:tcPr anchor="ctr"/>
+                </a:tc>
+                <a:extLst>
+                  <a:ext uri="{0D108BD9-81ED-4DB2-BD59-A6C34878D82A}">
+                    <a16:rowId xmlns:a16="http://schemas.microsoft.com/office/drawing/2014/main" val="79496174"/>
+                  </a:ext>
+                </a:extLst>
+              </a:tr>
+              <a:tr h="917672">
+                <a:tc>
+                  <a:txBody>
+                    <a:bodyPr/>
+                    <a:lstStyle/>
+                    <a:p>
+                      <a:pPr algn="just">
+                        <a:buNone/>
+                      </a:pPr>
+                      <a:r>
+                        <a:rPr lang="en-IN" sz="1600">
+                          <a:solidFill>
+                            <a:srgbClr val="0070C0"/>
+                          </a:solidFill>
+                        </a:rPr>
+                        <a:t>9</a:t>
+                      </a:r>
+                    </a:p>
+                  </a:txBody>
+                  <a:tcPr anchor="ctr"/>
+                </a:tc>
+                <a:tc>
+                  <a:txBody>
+                    <a:bodyPr/>
+                    <a:lstStyle/>
+                    <a:p>
+                      <a:pPr algn="just">
+                        <a:buNone/>
+                      </a:pPr>
+                      <a:r>
+                        <a:rPr lang="en-IN" sz="1600" dirty="0">
+                          <a:solidFill>
+                            <a:srgbClr val="0070C0"/>
+                          </a:solidFill>
+                        </a:rPr>
+                        <a:t>A New Large Language Model for Attribute Extraction in E-Commerce Product Categorization (ResearchGate, 2025)</a:t>
+                      </a:r>
+                    </a:p>
+                  </a:txBody>
+                  <a:tcPr anchor="ctr"/>
+                </a:tc>
+                <a:tc>
+                  <a:txBody>
+                    <a:bodyPr/>
+                    <a:lstStyle/>
+                    <a:p>
+                      <a:pPr algn="just">
+                        <a:buNone/>
+                      </a:pPr>
+                      <a:r>
+                        <a:rPr lang="en-IN" sz="1600" dirty="0">
+                          <a:solidFill>
+                            <a:srgbClr val="0070C0"/>
+                          </a:solidFill>
+                        </a:rPr>
+                        <a:t>LLM-based attribute/NER extraction vs. DL baseline</a:t>
+                      </a:r>
+                    </a:p>
+                  </a:txBody>
+                  <a:tcPr anchor="ctr"/>
+                </a:tc>
+                <a:tc>
+                  <a:txBody>
+                    <a:bodyPr/>
+                    <a:lstStyle/>
+                    <a:p>
+                      <a:pPr algn="just">
+                        <a:buNone/>
+                      </a:pPr>
+                      <a:r>
+                        <a:rPr lang="en-IN" sz="1600" dirty="0">
+                          <a:solidFill>
+                            <a:srgbClr val="0070C0"/>
+                          </a:solidFill>
+                        </a:rPr>
+                        <a:t>• Generalizability untested</a:t>
+                      </a:r>
+                      <a:br>
+                        <a:rPr lang="en-IN" sz="1600" dirty="0">
+                          <a:solidFill>
+                            <a:srgbClr val="0070C0"/>
+                          </a:solidFill>
+                        </a:rPr>
+                      </a:br>
+                      <a:r>
+                        <a:rPr lang="en-IN" sz="1600" dirty="0">
+                          <a:solidFill>
+                            <a:srgbClr val="0070C0"/>
+                          </a:solidFill>
+                        </a:rPr>
+                        <a:t>• No integration with clustering/segmentation pipeline</a:t>
+                      </a:r>
+                    </a:p>
+                  </a:txBody>
+                  <a:tcPr anchor="ctr"/>
+                </a:tc>
+                <a:extLst>
+                  <a:ext uri="{0D108BD9-81ED-4DB2-BD59-A6C34878D82A}">
+                    <a16:rowId xmlns:a16="http://schemas.microsoft.com/office/drawing/2014/main" val="3670996867"/>
+                  </a:ext>
+                </a:extLst>
+              </a:tr>
+            </a:tbl>
+          </a:graphicData>
+        </a:graphic>
+      </p:graphicFrame>
+      <p:sp>
+        <p:nvSpPr>
+          <p:cNvPr id="9" name="TextBox 8">
+            <a:extLst>
+              <a:ext uri="{FF2B5EF4-FFF2-40B4-BE49-F238E27FC236}">
+                <a16:creationId xmlns:a16="http://schemas.microsoft.com/office/drawing/2014/main" id="{6F7E8605-D455-3BB2-34B2-517A0C55E7D6}"/>
+              </a:ext>
+            </a:extLst>
+          </p:cNvPr>
+          <p:cNvSpPr txBox="1"/>
+          <p:nvPr/>
+        </p:nvSpPr>
+        <p:spPr>
+          <a:xfrm>
+            <a:off x="3182111" y="57036"/>
+            <a:ext cx="9009889" cy="369332"/>
+          </a:xfrm>
+          <a:prstGeom prst="rect">
+            <a:avLst/>
+          </a:prstGeom>
+          <a:noFill/>
+        </p:spPr>
+        <p:txBody>
+          <a:bodyPr wrap="square" rtlCol="0">
+            <a:spAutoFit/>
+          </a:bodyPr>
+          <a:lstStyle/>
+          <a:p>
+            <a:pPr lvl="0" algn="r">
+              <a:defRPr/>
+            </a:pPr>
+            <a:r>
+              <a:rPr lang="en-IN" b="1" dirty="0">
+                <a:solidFill>
+                  <a:schemeClr val="bg1"/>
+                </a:solidFill>
+              </a:rPr>
+              <a:t>Signature-Driven Inventory: Profiling Shopper </a:t>
+            </a:r>
+            <a:r>
+              <a:rPr lang="en-IN" b="1" dirty="0" err="1">
+                <a:solidFill>
+                  <a:schemeClr val="bg1"/>
+                </a:solidFill>
+              </a:rPr>
+              <a:t>Behavior</a:t>
+            </a:r>
+            <a:r>
+              <a:rPr lang="en-IN" b="1" dirty="0">
+                <a:solidFill>
+                  <a:schemeClr val="bg1"/>
+                </a:solidFill>
+              </a:rPr>
+              <a:t> From Basket Data</a:t>
+            </a:r>
+            <a:endParaRPr lang="en-US" sz="3200" b="1" dirty="0">
+              <a:solidFill>
+                <a:schemeClr val="bg1"/>
+              </a:solidFill>
+              <a:latin typeface="Frutiger 45 bold"/>
+              <a:cs typeface="Calibri" panose="020F0502020204030204" pitchFamily="34" charset="0"/>
+            </a:endParaRPr>
+          </a:p>
+        </p:txBody>
+      </p:sp>
+    </p:spTree>
+    <p:extLst>
+      <p:ext uri="{BB962C8B-B14F-4D97-AF65-F5344CB8AC3E}">
+        <p14:creationId xmlns:p14="http://schemas.microsoft.com/office/powerpoint/2010/main" val="4226521539"/>
+      </p:ext>
+    </p:extLst>
+  </p:cSld>
+  <p:clrMapOvr>
+    <a:masterClrMapping/>
+  </p:clrMapOvr>
+  <mc:AlternateContent xmlns:mc="http://schemas.openxmlformats.org/markup-compatibility/2006" xmlns:p14="http://schemas.microsoft.com/office/powerpoint/2010/main">
+    <mc:Choice Requires="p14">
+      <p:transition spd="med" p14:dur="700">
+        <p:fade/>
+      </p:transition>
+    </mc:Choice>
+    <mc:Fallback xmlns="">
+      <p:transition spd="med">
+        <p:fade/>
+      </p:transition>
+    </mc:Fallback>
+  </mc:AlternateContent>
+</p:sld>
+</file>
+
+<file path=ppt/slides/slide7.xml><?xml version="1.0" encoding="utf-8"?>
 <p:sld xmlns:a="http://schemas.openxmlformats.org/drawingml/2006/main" xmlns:r="http://schemas.openxmlformats.org/officeDocument/2006/relationships" xmlns:p="http://schemas.openxmlformats.org/presentationml/2006/main">
   <p:cSld>
     <p:spTree>
@@ -7670,133 +10700,70 @@
           <a:p>
             <a:pPr lvl="0"/>
             <a:r>
-              <a:rPr lang="en-IN" b="0" dirty="0">
-                <a:latin typeface="+mn-lt"/>
-              </a:rPr>
-              <a:t>Most studies rely on </a:t>
-            </a:r>
-            <a:r>
-              <a:rPr lang="en-IN" dirty="0">
-                <a:latin typeface="+mn-lt"/>
-              </a:rPr>
-              <a:t>RFM/transaction-value features</a:t>
-            </a:r>
-            <a:r>
-              <a:rPr lang="en-IN" b="0" dirty="0">
-                <a:latin typeface="+mn-lt"/>
-              </a:rPr>
-              <a:t>, ignoring </a:t>
-            </a:r>
-            <a:r>
-              <a:rPr lang="en-IN" dirty="0">
-                <a:latin typeface="+mn-lt"/>
-              </a:rPr>
-              <a:t>basket content</a:t>
-            </a:r>
+              <a:rPr lang="en-IN" dirty="0"/>
+              <a:t>Limited Basket-Level Insights: </a:t>
+            </a:r>
+            <a:r>
+              <a:rPr lang="en-IN" b="0" dirty="0"/>
+              <a:t>Most studies rely on RFM/transaction metrics.</a:t>
+            </a:r>
+            <a:endParaRPr lang="en-IN" dirty="0"/>
           </a:p>
           <a:p>
             <a:pPr lvl="0"/>
             <a:r>
-              <a:rPr lang="en-IN" dirty="0">
-                <a:latin typeface="+mn-lt"/>
-              </a:rPr>
-              <a:t>Clustering algorithms </a:t>
-            </a:r>
-            <a:r>
-              <a:rPr lang="en-IN" b="0" dirty="0">
-                <a:latin typeface="+mn-lt"/>
-              </a:rPr>
-              <a:t>are rarely </a:t>
-            </a:r>
-            <a:r>
-              <a:rPr lang="en-IN" dirty="0">
-                <a:latin typeface="+mn-lt"/>
-              </a:rPr>
-              <a:t>benchmarked against each other</a:t>
-            </a:r>
-            <a:r>
-              <a:rPr lang="en-IN" b="0" dirty="0">
-                <a:latin typeface="+mn-lt"/>
-              </a:rPr>
-              <a:t> in one study</a:t>
+              <a:rPr lang="en-IN" dirty="0"/>
+              <a:t>Lack of Semantic Features: Shopping mission, household orientation, and convenience </a:t>
+            </a:r>
+            <a:r>
+              <a:rPr lang="en-IN" b="0" dirty="0"/>
+              <a:t>are rarely captured through LLM-based product understanding.</a:t>
+            </a:r>
+            <a:r>
+              <a:rPr lang="en-IN" dirty="0"/>
+              <a:t> </a:t>
             </a:r>
           </a:p>
           <a:p>
             <a:pPr lvl="0"/>
             <a:r>
-              <a:rPr lang="en-IN" dirty="0">
-                <a:latin typeface="+mn-lt"/>
-              </a:rPr>
-              <a:t>LLM-based tagging </a:t>
-            </a:r>
-            <a:r>
-              <a:rPr lang="en-IN" b="0" dirty="0">
-                <a:latin typeface="+mn-lt"/>
-              </a:rPr>
-              <a:t>and </a:t>
-            </a:r>
-            <a:r>
-              <a:rPr lang="en-IN" dirty="0">
-                <a:latin typeface="+mn-lt"/>
-              </a:rPr>
-              <a:t>clustering</a:t>
-            </a:r>
-            <a:r>
-              <a:rPr lang="en-IN" b="0" dirty="0">
-                <a:latin typeface="+mn-lt"/>
-              </a:rPr>
-              <a:t> are treated as separate research strands</a:t>
+              <a:rPr lang="en-IN" dirty="0"/>
+              <a:t>Limited Clustering Evaluation: </a:t>
+            </a:r>
+            <a:r>
+              <a:rPr lang="en-IN" b="0" dirty="0"/>
+              <a:t>Few studies </a:t>
+            </a:r>
+            <a:r>
+              <a:rPr lang="en-IN" dirty="0"/>
+              <a:t>benchmark multiple clustering algorithms </a:t>
+            </a:r>
+            <a:r>
+              <a:rPr lang="en-IN" b="0" dirty="0"/>
+              <a:t>to identify the most effective segmentation. </a:t>
             </a:r>
           </a:p>
           <a:p>
             <a:pPr lvl="0"/>
             <a:r>
-              <a:rPr lang="en-IN" b="0" dirty="0">
-                <a:latin typeface="+mn-lt"/>
-              </a:rPr>
-              <a:t>Segmentation is largely </a:t>
-            </a:r>
-            <a:r>
-              <a:rPr lang="en-IN" dirty="0">
-                <a:latin typeface="+mn-lt"/>
-              </a:rPr>
-              <a:t>static and one-time</a:t>
-            </a:r>
-            <a:r>
-              <a:rPr lang="en-IN" b="0" dirty="0">
-                <a:latin typeface="+mn-lt"/>
-              </a:rPr>
-              <a:t>, not continuously updating</a:t>
-            </a:r>
-          </a:p>
-          <a:p>
-            <a:pPr lvl="0"/>
-            <a:r>
-              <a:rPr lang="en-IN" b="0" dirty="0">
-                <a:latin typeface="+mn-lt"/>
-              </a:rPr>
-              <a:t>Few studies connect segments to concrete </a:t>
-            </a:r>
-            <a:r>
-              <a:rPr lang="en-IN" dirty="0">
-                <a:latin typeface="+mn-lt"/>
-              </a:rPr>
-              <a:t>inventory or assortment actions</a:t>
-            </a:r>
-          </a:p>
-          <a:p>
-            <a:pPr lvl="0"/>
-            <a:r>
-              <a:rPr lang="en-IN" dirty="0">
-                <a:latin typeface="+mn-lt"/>
-              </a:rPr>
-              <a:t>Grocery-scale, basket-level datasets </a:t>
-            </a:r>
-            <a:r>
-              <a:rPr lang="en-IN" b="0" dirty="0">
-                <a:latin typeface="+mn-lt"/>
-              </a:rPr>
-              <a:t>(like Instacart) remain underused</a:t>
+              <a:rPr lang="en-IN" dirty="0"/>
+              <a:t>Static &amp; Non-Actionable Segmentation: </a:t>
+            </a:r>
+            <a:r>
+              <a:rPr lang="en-IN" b="0" dirty="0"/>
+              <a:t>Segments are often static and rarely linked to </a:t>
+            </a:r>
+            <a:r>
+              <a:rPr lang="en-IN" dirty="0"/>
+              <a:t>inventory, assortment, </a:t>
+            </a:r>
+            <a:r>
+              <a:rPr lang="en-IN" b="0" dirty="0"/>
+              <a:t>or</a:t>
+            </a:r>
+            <a:r>
+              <a:rPr lang="en-IN" dirty="0"/>
+              <a:t> pack-size decisions. </a:t>
             </a:r>
           </a:p>
         </p:txBody>
@@ -8202,104 +11169,6 @@
                       </p:childTnLst>
                     </p:cTn>
                   </p:par>
-                  <p:par>
-                    <p:cTn id="19" fill="hold">
-                      <p:stCondLst>
-                        <p:cond delay="indefinite"/>
-                      </p:stCondLst>
-                      <p:childTnLst>
-                        <p:par>
-                          <p:cTn id="20" fill="hold">
-                            <p:stCondLst>
-                              <p:cond delay="0"/>
-                            </p:stCondLst>
-                            <p:childTnLst>
-                              <p:par>
-                                <p:cTn id="21" presetID="1" presetClass="entr" presetSubtype="0" fill="hold" grpId="0" nodeType="clickEffect">
-                                  <p:stCondLst>
-                                    <p:cond delay="0"/>
-                                  </p:stCondLst>
-                                  <p:childTnLst>
-                                    <p:set>
-                                      <p:cBhvr>
-                                        <p:cTn id="22" dur="1" fill="hold">
-                                          <p:stCondLst>
-                                            <p:cond delay="0"/>
-                                          </p:stCondLst>
-                                        </p:cTn>
-                                        <p:tgtEl>
-                                          <p:spTgt spid="2">
-                                            <p:txEl>
-                                              <p:pRg st="4" end="4"/>
-                                            </p:txEl>
-                                          </p:spTgt>
-                                        </p:tgtEl>
-                                        <p:attrNameLst>
-                                          <p:attrName>style.visibility</p:attrName>
-                                        </p:attrNameLst>
-                                      </p:cBhvr>
-                                      <p:to>
-                                        <p:strVal val="visible"/>
-                                      </p:to>
-                                    </p:set>
-                                  </p:childTnLst>
-                                </p:cTn>
-                              </p:par>
-                            </p:childTnLst>
-                          </p:cTn>
-                        </p:par>
-                      </p:childTnLst>
-                    </p:cTn>
-                  </p:par>
-                  <p:par>
-                    <p:cTn id="23" fill="hold">
-                      <p:stCondLst>
-                        <p:cond delay="indefinite"/>
-                      </p:stCondLst>
-                      <p:childTnLst>
-                        <p:par>
-                          <p:cTn id="24" fill="hold">
-                            <p:stCondLst>
-                              <p:cond delay="0"/>
-                            </p:stCondLst>
-                            <p:childTnLst>
-                              <p:par>
-                                <p:cTn id="25" presetID="1" presetClass="entr" presetSubtype="0" fill="hold" grpId="0" nodeType="clickEffect">
-                                  <p:stCondLst>
-                                    <p:cond delay="0"/>
-                                  </p:stCondLst>
-                                  <p:childTnLst>
-                                    <p:set>
-                                      <p:cBhvr>
-                                        <p:cTn id="26" dur="1" fill="hold">
-                                          <p:stCondLst>
-                                            <p:cond delay="0"/>
-                                          </p:stCondLst>
-                                        </p:cTn>
-                                        <p:tgtEl>
-                                          <p:spTgt spid="2">
-                                            <p:txEl>
-                                              <p:pRg st="5" end="5"/>
-                                            </p:txEl>
-                                          </p:spTgt>
-                                        </p:tgtEl>
-                                        <p:attrNameLst>
-                                          <p:attrName>style.visibility</p:attrName>
-                                        </p:attrNameLst>
-                                      </p:cBhvr>
-                                      <p:to>
-                                        <p:strVal val="visible"/>
-                                      </p:to>
-                                    </p:set>
-                                  </p:childTnLst>
-                                </p:cTn>
-                              </p:par>
-                            </p:childTnLst>
-                          </p:cTn>
-                        </p:par>
-                      </p:childTnLst>
-                    </p:cTn>
-                  </p:par>
                 </p:childTnLst>
               </p:cTn>
               <p:prevCondLst>
@@ -8328,7 +11197,7 @@
 </p:sld>
 </file>
 
-<file path=ppt/slides/slide7.xml><?xml version="1.0" encoding="utf-8"?>
+<file path=ppt/slides/slide8.xml><?xml version="1.0" encoding="utf-8"?>
 <p:sld xmlns:a="http://schemas.openxmlformats.org/drawingml/2006/main" xmlns:r="http://schemas.openxmlformats.org/officeDocument/2006/relationships" xmlns:p="http://schemas.openxmlformats.org/presentationml/2006/main">
   <p:cSld>
     <p:spTree>
@@ -8369,123 +11238,64 @@
         </p:nvSpPr>
         <p:spPr>
           <a:xfrm>
-            <a:off x="781724" y="1594385"/>
-            <a:ext cx="10624338" cy="4272199"/>
+            <a:off x="783831" y="1963718"/>
+            <a:ext cx="10624338" cy="3427320"/>
           </a:xfrm>
         </p:spPr>
         <p:txBody>
           <a:bodyPr/>
           <a:lstStyle/>
           <a:p>
-            <a:pPr marL="342900" lvl="0" indent="-342900"/>
-            <a:r>
-              <a:rPr lang="en-IN" dirty="0">
-                <a:latin typeface="+mn-lt"/>
-              </a:rPr>
+            <a:r>
+              <a:rPr lang="en-IN" dirty="0"/>
               <a:t>Dataset: </a:t>
             </a:r>
             <a:r>
-              <a:rPr lang="en-IN" b="0" dirty="0">
-                <a:latin typeface="+mn-lt"/>
-              </a:rPr>
-              <a:t>Instacart Market Basket Analysis — 3M+ orders, 200K+ users (Kaggle)</a:t>
-            </a:r>
-          </a:p>
-          <a:p>
-            <a:pPr marL="342900" lvl="0" indent="-342900"/>
-            <a:r>
-              <a:rPr lang="en-IN" dirty="0">
-                <a:latin typeface="+mn-lt"/>
-              </a:rPr>
-              <a:t>Live pipeline: </a:t>
-            </a:r>
-            <a:r>
-              <a:rPr lang="en-IN" b="0" dirty="0">
-                <a:latin typeface="+mn-lt"/>
-              </a:rPr>
-              <a:t>SQLite-based ingestion simulation with resumable cursor</a:t>
-            </a:r>
-          </a:p>
-          <a:p>
-            <a:pPr marL="342900" lvl="0" indent="-342900"/>
-            <a:r>
-              <a:rPr lang="en-IN" dirty="0">
-                <a:latin typeface="+mn-lt"/>
-              </a:rPr>
-              <a:t>Tech stack: </a:t>
-            </a:r>
-            <a:r>
-              <a:rPr lang="en-IN" b="0" dirty="0">
-                <a:latin typeface="+mn-lt"/>
-              </a:rPr>
-              <a:t>Python, Pandas, Scikit-learn, UMAP, </a:t>
-            </a:r>
-            <a:r>
-              <a:rPr lang="en-IN" b="0" dirty="0" err="1">
-                <a:latin typeface="+mn-lt"/>
-              </a:rPr>
+              <a:rPr lang="en-IN" b="0" dirty="0"/>
+              <a:t>NPCI remitter-bank monthly UPI transaction data</a:t>
+            </a:r>
+          </a:p>
+          <a:p>
+            <a:r>
+              <a:rPr lang="en-IN" dirty="0"/>
+              <a:t>Data Characteristics: </a:t>
+            </a:r>
+            <a:r>
+              <a:rPr lang="en-IN" b="0" dirty="0"/>
+              <a:t>Customer-facing reliability metrics with month mismatches and duplicate records automatically handled</a:t>
+            </a:r>
+          </a:p>
+          <a:p>
+            <a:r>
+              <a:rPr lang="en-IN" dirty="0"/>
+              <a:t>Tech Stack: </a:t>
+            </a:r>
+            <a:r>
+              <a:rPr lang="en-IN" b="0" dirty="0"/>
+              <a:t>Python, Pandas, Prophet, SARIMA, Ruptures, Sentence-Transformers, </a:t>
+            </a:r>
+            <a:r>
+              <a:rPr lang="en-IN" b="0" dirty="0" err="1"/>
               <a:t>MLflow</a:t>
             </a:r>
             <a:r>
-              <a:rPr lang="en-IN" b="0" dirty="0">
-                <a:latin typeface="+mn-lt"/>
-              </a:rPr>
-              <a:t>, Power BI</a:t>
-            </a:r>
-          </a:p>
-          <a:p>
-            <a:pPr marL="342900" lvl="0" indent="-342900"/>
-            <a:r>
-              <a:rPr lang="en-IN" dirty="0">
-                <a:latin typeface="+mn-lt"/>
-              </a:rPr>
-              <a:t>Web application: </a:t>
-            </a:r>
-            <a:r>
-              <a:rPr lang="en-IN" b="0" dirty="0" err="1">
-                <a:latin typeface="+mn-lt"/>
-              </a:rPr>
+              <a:rPr lang="en-IN" b="0" dirty="0"/>
+              <a:t>, SQLite, Power BI</a:t>
+            </a:r>
+          </a:p>
+          <a:p>
+            <a:r>
+              <a:rPr lang="en-IN" dirty="0"/>
+              <a:t>Web Application: </a:t>
+            </a:r>
+            <a:r>
+              <a:rPr lang="en-IN" b="0" dirty="0" err="1"/>
               <a:t>FastAPI</a:t>
             </a:r>
             <a:r>
-              <a:rPr lang="en-IN" b="0" dirty="0">
-                <a:latin typeface="+mn-lt"/>
-              </a:rPr>
-              <a:t> backend with secure login, signup, OTP verification</a:t>
-            </a:r>
-          </a:p>
-          <a:p>
-            <a:pPr marL="342900" lvl="0" indent="-342900"/>
-            <a:r>
-              <a:rPr lang="en-IN" dirty="0">
-                <a:latin typeface="+mn-lt"/>
-              </a:rPr>
-              <a:t>Assumption: </a:t>
-            </a:r>
-            <a:r>
-              <a:rPr lang="en-IN" b="0" dirty="0">
-                <a:latin typeface="+mn-lt"/>
-              </a:rPr>
-              <a:t>Dataset </a:t>
-            </a:r>
-            <a:r>
-              <a:rPr lang="en-IN" b="0" dirty="0" err="1">
-                <a:latin typeface="+mn-lt"/>
-              </a:rPr>
-              <a:t>behavior</a:t>
-            </a:r>
-            <a:r>
-              <a:rPr lang="en-IN" b="0" dirty="0">
-                <a:latin typeface="+mn-lt"/>
-              </a:rPr>
-              <a:t> generalizes to real grocery shopping patterns</a:t>
-            </a:r>
-            <a:endParaRPr lang="en-US" b="0" dirty="0">
-              <a:solidFill>
-                <a:srgbClr val="5583D1"/>
-              </a:solidFill>
-              <a:latin typeface="+mn-lt"/>
-            </a:endParaRPr>
+              <a:rPr lang="en-IN" b="0" dirty="0"/>
+              <a:t>-based monitoring dashboard with RAG-powered explanations using RBI circulars, notices, and news</a:t>
+            </a:r>
           </a:p>
         </p:txBody>
       </p:sp>
@@ -8890,55 +11700,6 @@
                       </p:childTnLst>
                     </p:cTn>
                   </p:par>
-                  <p:par>
-                    <p:cTn id="19" fill="hold">
-                      <p:stCondLst>
-                        <p:cond delay="indefinite"/>
-                      </p:stCondLst>
-                      <p:childTnLst>
-                        <p:par>
-                          <p:cTn id="20" fill="hold">
-                            <p:stCondLst>
-                              <p:cond delay="0"/>
-                            </p:stCondLst>
-                            <p:childTnLst>
-                              <p:par>
-                                <p:cTn id="21" presetID="1" presetClass="entr" presetSubtype="0" fill="hold" grpId="0" nodeType="clickEffect">
-                                  <p:stCondLst>
-                                    <p:cond delay="0"/>
-                                  </p:stCondLst>
-                                  <p:childTnLst>
-                                    <p:set>
-                                      <p:cBhvr>
-                                        <p:cTn id="22" dur="1" fill="hold">
-                                          <p:stCondLst>
-                                            <p:cond delay="0"/>
-                                          </p:stCondLst>
-                                        </p:cTn>
-                                        <p:tgtEl>
-                                          <p:spTgt spid="2">
-                                            <p:txEl>
-                                              <p:pRg st="4" end="4"/>
-                                            </p:txEl>
-                                          </p:spTgt>
-                                        </p:tgtEl>
-                                        <p:attrNameLst>
-                                          <p:attrName>style.visibility</p:attrName>
-                                        </p:attrNameLst>
-                                      </p:cBhvr>
-                                      <p:to>
-                                        <p:strVal val="visible"/>
-                                      </p:to>
-                                    </p:set>
-                                  </p:childTnLst>
-                                </p:cTn>
-                              </p:par>
-                            </p:childTnLst>
-                          </p:cTn>
-                        </p:par>
-                      </p:childTnLst>
-                    </p:cTn>
-                  </p:par>
                 </p:childTnLst>
               </p:cTn>
               <p:prevCondLst>
@@ -8967,7 +11728,7 @@
 </p:sld>
 </file>
 
-<file path=ppt/slides/slide8.xml><?xml version="1.0" encoding="utf-8"?>
+<file path=ppt/slides/slide9.xml><?xml version="1.0" encoding="utf-8"?>
 <p:sld xmlns:a="http://schemas.openxmlformats.org/drawingml/2006/main" xmlns:r="http://schemas.openxmlformats.org/officeDocument/2006/relationships" xmlns:p="http://schemas.openxmlformats.org/presentationml/2006/main">
   <p:cSld>
     <p:spTree>
@@ -9002,47 +11763,49 @@
         </p:nvSpPr>
         <p:spPr>
           <a:xfrm>
-            <a:off x="179814" y="1545534"/>
-            <a:ext cx="11832372" cy="4312734"/>
+            <a:off x="884348" y="1725414"/>
+            <a:ext cx="10298311" cy="3536131"/>
           </a:xfrm>
         </p:spPr>
         <p:txBody>
           <a:bodyPr/>
           <a:lstStyle/>
           <a:p>
-            <a:pPr lvl="0">
-              <a:lnSpc>
-                <a:spcPct val="100000"/>
-              </a:lnSpc>
-              <a:spcBef>
-                <a:spcPts val="500"/>
-              </a:spcBef>
-            </a:pPr>
+            <a:pPr lvl="0"/>
             <a:r>
               <a:rPr lang="en-IN" dirty="0"/>
               <a:t>Data Engineering - </a:t>
             </a:r>
             <a:r>
               <a:rPr lang="en-IN" b="0" dirty="0"/>
-              <a:t>Clean, join, and transform 6 raw CSVs into a basket-level dataset, and build a live SQLite ingestion pipeline</a:t>
-            </a:r>
-          </a:p>
-          <a:p>
-            <a:pPr lvl="0">
-              <a:lnSpc>
-                <a:spcPct val="100000"/>
-              </a:lnSpc>
-              <a:spcBef>
-                <a:spcPts val="500"/>
-              </a:spcBef>
-            </a:pPr>
+              <a:t>Ingestion, cleaning, basket-level transformation</a:t>
+            </a:r>
+          </a:p>
+          <a:p>
+            <a:pPr lvl="0"/>
             <a:r>
               <a:rPr lang="en-IN" dirty="0"/>
               <a:t>LLM Feature Engineering - </a:t>
             </a:r>
             <a:r>
               <a:rPr lang="en-IN" b="0" dirty="0"/>
-              <a:t>Tag products on orientation, mission, and convenience; aggregate into </a:t>
+              <a:t>Product tagging via GPT/Gemini API/</a:t>
+            </a:r>
+            <a:r>
+              <a:rPr lang="en-IN" b="0" dirty="0" err="1"/>
+              <a:t>Ollama</a:t>
+            </a:r>
+            <a:endParaRPr lang="en-IN" b="0" dirty="0"/>
+          </a:p>
+          <a:p>
+            <a:pPr lvl="0"/>
+            <a:r>
+              <a:rPr lang="en-IN" dirty="0"/>
+              <a:t>Pattern Discovery - </a:t>
+            </a:r>
+            <a:r>
+              <a:rPr lang="en-IN" b="0" dirty="0"/>
+              <a:t>Clustering shoppers into </a:t>
             </a:r>
             <a:r>
               <a:rPr lang="en-IN" b="0" dirty="0" err="1"/>
@@ -9050,71 +11813,29 @@
             </a:r>
             <a:r>
               <a:rPr lang="en-IN" b="0" dirty="0"/>
-              <a:t> features</a:t>
-            </a:r>
-          </a:p>
-          <a:p>
-            <a:pPr lvl="0">
-              <a:lnSpc>
-                <a:spcPct val="100000"/>
-              </a:lnSpc>
-              <a:spcBef>
-                <a:spcPts val="500"/>
-              </a:spcBef>
-            </a:pPr>
-            <a:r>
-              <a:rPr lang="en-IN" dirty="0"/>
-              <a:t>Pattern Discovery - </a:t>
-            </a:r>
-            <a:r>
-              <a:rPr lang="en-IN" b="0" dirty="0"/>
-              <a:t>Apply a clustering algorithm and track via </a:t>
-            </a:r>
-            <a:r>
-              <a:rPr lang="en-IN" b="0" dirty="0" err="1"/>
-              <a:t>MLflow</a:t>
-            </a:r>
-            <a:endParaRPr lang="en-IN" b="0" dirty="0"/>
-          </a:p>
-          <a:p>
-            <a:pPr lvl="0">
-              <a:lnSpc>
-                <a:spcPct val="100000"/>
-              </a:lnSpc>
-              <a:spcBef>
-                <a:spcPts val="500"/>
-              </a:spcBef>
-            </a:pPr>
+              <a:t> signatures</a:t>
+            </a:r>
+          </a:p>
+          <a:p>
+            <a:pPr lvl="0"/>
             <a:r>
               <a:rPr lang="en-IN" dirty="0"/>
               <a:t>Comparative Analysis - </a:t>
             </a:r>
             <a:r>
               <a:rPr lang="en-IN" b="0" dirty="0"/>
-              <a:t>Profile clusters by category, brand, pack-size, and compare basket size and reorder </a:t>
-            </a:r>
-            <a:r>
-              <a:rPr lang="en-IN" b="0" dirty="0" err="1"/>
-              <a:t>behavior</a:t>
-            </a:r>
-            <a:endParaRPr lang="en-IN" b="0" dirty="0"/>
-          </a:p>
-          <a:p>
-            <a:pPr lvl="0">
-              <a:lnSpc>
-                <a:spcPct val="100000"/>
-              </a:lnSpc>
-              <a:spcBef>
-                <a:spcPts val="500"/>
-              </a:spcBef>
-            </a:pPr>
+              <a:t>Category, brand, and pack-size profiling per cluster</a:t>
+            </a:r>
+          </a:p>
+          <a:p>
+            <a:pPr lvl="0"/>
             <a:r>
               <a:rPr lang="en-IN" dirty="0"/>
-              <a:t>Dashboard &amp; Insights - </a:t>
+              <a:t>Dashboard - </a:t>
             </a:r>
             <a:r>
               <a:rPr lang="en-IN" b="0" dirty="0"/>
-              <a:t>Power BI/native charts translating clusters into inventory action</a:t>
+              <a:t>Live filterable shopper-signature visualization layer</a:t>
             </a:r>
           </a:p>
         </p:txBody>
@@ -9597,1376 +12318,6 @@
 </p:sld>
 </file>
 
-<file path=ppt/slides/slide9.xml><?xml version="1.0" encoding="utf-8"?>
-<p:sld xmlns:a="http://schemas.openxmlformats.org/drawingml/2006/main" xmlns:r="http://schemas.openxmlformats.org/officeDocument/2006/relationships" xmlns:p="http://schemas.openxmlformats.org/presentationml/2006/main">
-  <p:cSld>
-    <p:spTree>
-      <p:nvGrpSpPr>
-        <p:cNvPr id="1" name=""/>
-        <p:cNvGrpSpPr/>
-        <p:nvPr/>
-      </p:nvGrpSpPr>
-      <p:grpSpPr>
-        <a:xfrm>
-          <a:off x="0" y="0"/>
-          <a:ext cx="0" cy="0"/>
-          <a:chOff x="0" y="0"/>
-          <a:chExt cx="0" cy="0"/>
-        </a:xfrm>
-      </p:grpSpPr>
-      <p:sp>
-        <p:nvSpPr>
-          <p:cNvPr id="2" name="Text Placeholder 1">
-            <a:extLst>
-              <a:ext uri="{FF2B5EF4-FFF2-40B4-BE49-F238E27FC236}">
-                <a16:creationId xmlns:a16="http://schemas.microsoft.com/office/drawing/2014/main" id="{FF24291B-7EDA-4E3D-40F5-03FDC22C3364}"/>
-              </a:ext>
-            </a:extLst>
-          </p:cNvPr>
-          <p:cNvSpPr>
-            <a:spLocks noGrp="1"/>
-          </p:cNvSpPr>
-          <p:nvPr>
-            <p:ph type="body" sz="quarter" idx="13"/>
-          </p:nvPr>
-        </p:nvSpPr>
-        <p:spPr>
-          <a:xfrm>
-            <a:off x="255996" y="1097483"/>
-            <a:ext cx="10624338" cy="1243382"/>
-          </a:xfrm>
-        </p:spPr>
-        <p:txBody>
-          <a:bodyPr/>
-          <a:lstStyle/>
-          <a:p>
-            <a:pPr>
-              <a:spcAft>
-                <a:spcPts val="300"/>
-              </a:spcAft>
-              <a:buSzPct val="100000"/>
-            </a:pPr>
-            <a:r>
-              <a:rPr lang="en-US" b="0" dirty="0">
-                <a:latin typeface="+mn-lt"/>
-                <a:ea typeface="Calibri" pitchFamily="34" charset="-122"/>
-                <a:cs typeface="Calibri" pitchFamily="34" charset="-120"/>
-              </a:rPr>
-              <a:t>Clean, join, and transform the 6 raw CSVs into a basket-level dataset</a:t>
-            </a:r>
-            <a:endParaRPr lang="en-US" b="0" dirty="0">
-              <a:latin typeface="+mn-lt"/>
-            </a:endParaRPr>
-          </a:p>
-          <a:p>
-            <a:pPr>
-              <a:spcAft>
-                <a:spcPts val="300"/>
-              </a:spcAft>
-              <a:buSzPct val="100000"/>
-            </a:pPr>
-            <a:r>
-              <a:rPr lang="en-US" b="0" dirty="0">
-                <a:latin typeface="+mn-lt"/>
-                <a:ea typeface="Calibri" pitchFamily="34" charset="-122"/>
-                <a:cs typeface="Calibri" pitchFamily="34" charset="-120"/>
-              </a:rPr>
-              <a:t>Build a live SQLite ingestion pipeline simulating continuous order flow</a:t>
-            </a:r>
-            <a:endParaRPr lang="en-US" b="0" dirty="0">
-              <a:latin typeface="+mn-lt"/>
-            </a:endParaRPr>
-          </a:p>
-        </p:txBody>
-      </p:sp>
-      <p:sp>
-        <p:nvSpPr>
-          <p:cNvPr id="3" name="TextBox 2">
-            <a:extLst>
-              <a:ext uri="{FF2B5EF4-FFF2-40B4-BE49-F238E27FC236}">
-                <a16:creationId xmlns:a16="http://schemas.microsoft.com/office/drawing/2014/main" id="{25EA9B7F-B60D-6297-DC95-0FDA7E6D7C7C}"/>
-              </a:ext>
-            </a:extLst>
-          </p:cNvPr>
-          <p:cNvSpPr txBox="1"/>
-          <p:nvPr/>
-        </p:nvSpPr>
-        <p:spPr>
-          <a:xfrm>
-            <a:off x="221274" y="371689"/>
-            <a:ext cx="10624338" cy="646331"/>
-          </a:xfrm>
-          <a:prstGeom prst="rect">
-            <a:avLst/>
-          </a:prstGeom>
-          <a:noFill/>
-        </p:spPr>
-        <p:txBody>
-          <a:bodyPr wrap="square" rtlCol="0">
-            <a:spAutoFit/>
-          </a:bodyPr>
-          <a:lstStyle/>
-          <a:p>
-            <a:pPr lvl="0">
-              <a:defRPr/>
-            </a:pPr>
-            <a:r>
-              <a:rPr lang="en-US" sz="3600" b="1" dirty="0">
-                <a:solidFill>
-                  <a:srgbClr val="5B9BD5">
-                    <a:lumMod val="50000"/>
-                  </a:srgbClr>
-                </a:solidFill>
-                <a:latin typeface="Calibri" panose="020F0502020204030204"/>
-              </a:rPr>
-              <a:t>Data Engineering</a:t>
-            </a:r>
-            <a:endParaRPr kumimoji="0" lang="en-US" sz="3600" b="1" i="0" u="none" strike="noStrike" kern="1200" cap="none" spc="0" normalizeH="0" baseline="0" noProof="0" dirty="0">
-              <a:ln>
-                <a:noFill/>
-              </a:ln>
-              <a:solidFill>
-                <a:srgbClr val="5B9BD5">
-                  <a:lumMod val="50000"/>
-                </a:srgbClr>
-              </a:solidFill>
-              <a:effectLst/>
-              <a:uLnTx/>
-              <a:uFillTx/>
-              <a:latin typeface="Calibri" panose="020F0502020204030204"/>
-              <a:ea typeface="+mn-ea"/>
-              <a:cs typeface="+mn-cs"/>
-            </a:endParaRPr>
-          </a:p>
-        </p:txBody>
-      </p:sp>
-      <p:cxnSp>
-        <p:nvCxnSpPr>
-          <p:cNvPr id="4" name="Straight Connector 3">
-            <a:extLst>
-              <a:ext uri="{FF2B5EF4-FFF2-40B4-BE49-F238E27FC236}">
-                <a16:creationId xmlns:a16="http://schemas.microsoft.com/office/drawing/2014/main" id="{06F77F89-4F98-73F2-FD5A-5DD416A6F12F}"/>
-              </a:ext>
-            </a:extLst>
-          </p:cNvPr>
-          <p:cNvCxnSpPr>
-            <a:cxnSpLocks/>
-          </p:cNvCxnSpPr>
-          <p:nvPr/>
-        </p:nvCxnSpPr>
-        <p:spPr>
-          <a:xfrm>
-            <a:off x="221274" y="1018020"/>
-            <a:ext cx="7305799" cy="0"/>
-          </a:xfrm>
-          <a:prstGeom prst="line">
-            <a:avLst/>
-          </a:prstGeom>
-          <a:ln w="28575">
-            <a:solidFill>
-              <a:schemeClr val="accent6"/>
-            </a:solidFill>
-          </a:ln>
-        </p:spPr>
-        <p:style>
-          <a:lnRef idx="1">
-            <a:schemeClr val="accent1"/>
-          </a:lnRef>
-          <a:fillRef idx="0">
-            <a:schemeClr val="accent1"/>
-          </a:fillRef>
-          <a:effectRef idx="0">
-            <a:schemeClr val="accent1"/>
-          </a:effectRef>
-          <a:fontRef idx="minor">
-            <a:schemeClr val="tx1"/>
-          </a:fontRef>
-        </p:style>
-      </p:cxnSp>
-      <p:sp>
-        <p:nvSpPr>
-          <p:cNvPr id="5" name="Text Placeholder 1">
-            <a:extLst>
-              <a:ext uri="{FF2B5EF4-FFF2-40B4-BE49-F238E27FC236}">
-                <a16:creationId xmlns:a16="http://schemas.microsoft.com/office/drawing/2014/main" id="{3D79D7F2-2DB7-CE3F-F551-C12AF98C3FD6}"/>
-              </a:ext>
-            </a:extLst>
-          </p:cNvPr>
-          <p:cNvSpPr txBox="1">
-            <a:spLocks/>
-          </p:cNvSpPr>
-          <p:nvPr/>
-        </p:nvSpPr>
-        <p:spPr>
-          <a:xfrm>
-            <a:off x="255996" y="2792339"/>
-            <a:ext cx="11375172" cy="1243382"/>
-          </a:xfrm>
-          <a:prstGeom prst="rect">
-            <a:avLst/>
-          </a:prstGeom>
-        </p:spPr>
-        <p:txBody>
-          <a:bodyPr vert="horz" lIns="91440" tIns="45720" rIns="91440" bIns="45720" rtlCol="0">
-            <a:noAutofit/>
-          </a:bodyPr>
-          <a:lstStyle>
-            <a:lvl1pPr marL="228600" indent="-228600" algn="l" defTabSz="914400" rtl="0" eaLnBrk="1" latinLnBrk="0" hangingPunct="1">
-              <a:lnSpc>
-                <a:spcPct val="90000"/>
-              </a:lnSpc>
-              <a:spcBef>
-                <a:spcPts val="1000"/>
-              </a:spcBef>
-              <a:buFont typeface="Arial" panose="020B0604020202020204" pitchFamily="34" charset="0"/>
-              <a:buChar char="•"/>
-              <a:defRPr lang="en-US" sz="2800" b="1" kern="1200" dirty="0">
-                <a:solidFill>
-                  <a:srgbClr val="0070C0"/>
-                </a:solidFill>
-                <a:latin typeface="Frutiger 45 bold"/>
-                <a:ea typeface="+mn-ea"/>
-                <a:cs typeface="Calibri" panose="020F0502020204030204" pitchFamily="34" charset="0"/>
-              </a:defRPr>
-            </a:lvl1pPr>
-            <a:lvl2pPr marL="685800" indent="-228600" algn="l" defTabSz="914400" rtl="0" eaLnBrk="1" latinLnBrk="0" hangingPunct="1">
-              <a:lnSpc>
-                <a:spcPct val="90000"/>
-              </a:lnSpc>
-              <a:spcBef>
-                <a:spcPts val="500"/>
-              </a:spcBef>
-              <a:buFont typeface="Arial" panose="020B0604020202020204" pitchFamily="34" charset="0"/>
-              <a:buChar char="•"/>
-              <a:defRPr sz="2400" kern="1200">
-                <a:solidFill>
-                  <a:schemeClr val="tx1"/>
-                </a:solidFill>
-                <a:latin typeface="+mn-lt"/>
-                <a:ea typeface="+mn-ea"/>
-                <a:cs typeface="+mn-cs"/>
-              </a:defRPr>
-            </a:lvl2pPr>
-            <a:lvl3pPr marL="1143000" indent="-228600" algn="l" defTabSz="914400" rtl="0" eaLnBrk="1" latinLnBrk="0" hangingPunct="1">
-              <a:lnSpc>
-                <a:spcPct val="90000"/>
-              </a:lnSpc>
-              <a:spcBef>
-                <a:spcPts val="500"/>
-              </a:spcBef>
-              <a:buFont typeface="Arial" panose="020B0604020202020204" pitchFamily="34" charset="0"/>
-              <a:buChar char="•"/>
-              <a:defRPr sz="2000" kern="1200">
-                <a:solidFill>
-                  <a:schemeClr val="tx1"/>
-                </a:solidFill>
-                <a:latin typeface="+mn-lt"/>
-                <a:ea typeface="+mn-ea"/>
-                <a:cs typeface="+mn-cs"/>
-              </a:defRPr>
-            </a:lvl3pPr>
-            <a:lvl4pPr marL="1600200" indent="-228600" algn="l" defTabSz="914400" rtl="0" eaLnBrk="1" latinLnBrk="0" hangingPunct="1">
-              <a:lnSpc>
-                <a:spcPct val="90000"/>
-              </a:lnSpc>
-              <a:spcBef>
-                <a:spcPts val="500"/>
-              </a:spcBef>
-              <a:buFont typeface="Arial" panose="020B0604020202020204" pitchFamily="34" charset="0"/>
-              <a:buChar char="•"/>
-              <a:defRPr sz="1800" kern="1200">
-                <a:solidFill>
-                  <a:schemeClr val="tx1"/>
-                </a:solidFill>
-                <a:latin typeface="+mn-lt"/>
-                <a:ea typeface="+mn-ea"/>
-                <a:cs typeface="+mn-cs"/>
-              </a:defRPr>
-            </a:lvl4pPr>
-            <a:lvl5pPr marL="2057400" indent="-228600" algn="l" defTabSz="914400" rtl="0" eaLnBrk="1" latinLnBrk="0" hangingPunct="1">
-              <a:lnSpc>
-                <a:spcPct val="90000"/>
-              </a:lnSpc>
-              <a:spcBef>
-                <a:spcPts val="500"/>
-              </a:spcBef>
-              <a:buFont typeface="Arial" panose="020B0604020202020204" pitchFamily="34" charset="0"/>
-              <a:buChar char="•"/>
-              <a:defRPr sz="1800" kern="1200">
-                <a:solidFill>
-                  <a:schemeClr val="tx1"/>
-                </a:solidFill>
-                <a:latin typeface="+mn-lt"/>
-                <a:ea typeface="+mn-ea"/>
-                <a:cs typeface="+mn-cs"/>
-              </a:defRPr>
-            </a:lvl5pPr>
-            <a:lvl6pPr marL="2514600" indent="-228600" algn="l" defTabSz="914400" rtl="0" eaLnBrk="1" latinLnBrk="0" hangingPunct="1">
-              <a:lnSpc>
-                <a:spcPct val="90000"/>
-              </a:lnSpc>
-              <a:spcBef>
-                <a:spcPts val="500"/>
-              </a:spcBef>
-              <a:buFont typeface="Arial" panose="020B0604020202020204" pitchFamily="34" charset="0"/>
-              <a:buChar char="•"/>
-              <a:defRPr sz="1800" kern="1200">
-                <a:solidFill>
-                  <a:schemeClr val="tx1"/>
-                </a:solidFill>
-                <a:latin typeface="+mn-lt"/>
-                <a:ea typeface="+mn-ea"/>
-                <a:cs typeface="+mn-cs"/>
-              </a:defRPr>
-            </a:lvl6pPr>
-            <a:lvl7pPr marL="2971800" indent="-228600" algn="l" defTabSz="914400" rtl="0" eaLnBrk="1" latinLnBrk="0" hangingPunct="1">
-              <a:lnSpc>
-                <a:spcPct val="90000"/>
-              </a:lnSpc>
-              <a:spcBef>
-                <a:spcPts val="500"/>
-              </a:spcBef>
-              <a:buFont typeface="Arial" panose="020B0604020202020204" pitchFamily="34" charset="0"/>
-              <a:buChar char="•"/>
-              <a:defRPr sz="1800" kern="1200">
-                <a:solidFill>
-                  <a:schemeClr val="tx1"/>
-                </a:solidFill>
-                <a:latin typeface="+mn-lt"/>
-                <a:ea typeface="+mn-ea"/>
-                <a:cs typeface="+mn-cs"/>
-              </a:defRPr>
-            </a:lvl7pPr>
-            <a:lvl8pPr marL="3429000" indent="-228600" algn="l" defTabSz="914400" rtl="0" eaLnBrk="1" latinLnBrk="0" hangingPunct="1">
-              <a:lnSpc>
-                <a:spcPct val="90000"/>
-              </a:lnSpc>
-              <a:spcBef>
-                <a:spcPts val="500"/>
-              </a:spcBef>
-              <a:buFont typeface="Arial" panose="020B0604020202020204" pitchFamily="34" charset="0"/>
-              <a:buChar char="•"/>
-              <a:defRPr sz="1800" kern="1200">
-                <a:solidFill>
-                  <a:schemeClr val="tx1"/>
-                </a:solidFill>
-                <a:latin typeface="+mn-lt"/>
-                <a:ea typeface="+mn-ea"/>
-                <a:cs typeface="+mn-cs"/>
-              </a:defRPr>
-            </a:lvl8pPr>
-            <a:lvl9pPr marL="3886200" indent="-228600" algn="l" defTabSz="914400" rtl="0" eaLnBrk="1" latinLnBrk="0" hangingPunct="1">
-              <a:lnSpc>
-                <a:spcPct val="90000"/>
-              </a:lnSpc>
-              <a:spcBef>
-                <a:spcPts val="500"/>
-              </a:spcBef>
-              <a:buFont typeface="Arial" panose="020B0604020202020204" pitchFamily="34" charset="0"/>
-              <a:buChar char="•"/>
-              <a:defRPr sz="1800" kern="1200">
-                <a:solidFill>
-                  <a:schemeClr val="tx1"/>
-                </a:solidFill>
-                <a:latin typeface="+mn-lt"/>
-                <a:ea typeface="+mn-ea"/>
-                <a:cs typeface="+mn-cs"/>
-              </a:defRPr>
-            </a:lvl9pPr>
-          </a:lstStyle>
-          <a:p>
-            <a:r>
-              <a:rPr lang="en-US" b="0" dirty="0">
-                <a:latin typeface="+mn-lt"/>
-              </a:rPr>
-              <a:t>Tag products on household orientation, shopping mission, and convenience</a:t>
-            </a:r>
-            <a:endParaRPr lang="en-IN" b="0" dirty="0">
-              <a:latin typeface="+mn-lt"/>
-            </a:endParaRPr>
-          </a:p>
-          <a:p>
-            <a:r>
-              <a:rPr lang="en-US" b="0" dirty="0">
-                <a:latin typeface="+mn-lt"/>
-              </a:rPr>
-              <a:t>Aggregate tags into basket-level and user-level behavioral features</a:t>
-            </a:r>
-            <a:endParaRPr lang="en-IN" b="0" dirty="0">
-              <a:effectLst/>
-              <a:latin typeface="+mn-lt"/>
-            </a:endParaRPr>
-          </a:p>
-        </p:txBody>
-      </p:sp>
-      <p:sp>
-        <p:nvSpPr>
-          <p:cNvPr id="7" name="TextBox 6">
-            <a:extLst>
-              <a:ext uri="{FF2B5EF4-FFF2-40B4-BE49-F238E27FC236}">
-                <a16:creationId xmlns:a16="http://schemas.microsoft.com/office/drawing/2014/main" id="{D896F218-2C3B-1CD2-8830-66BB3E10FDEF}"/>
-              </a:ext>
-            </a:extLst>
-          </p:cNvPr>
-          <p:cNvSpPr txBox="1"/>
-          <p:nvPr/>
-        </p:nvSpPr>
-        <p:spPr>
-          <a:xfrm>
-            <a:off x="221274" y="2066545"/>
-            <a:ext cx="10624338" cy="646331"/>
-          </a:xfrm>
-          <a:prstGeom prst="rect">
-            <a:avLst/>
-          </a:prstGeom>
-          <a:noFill/>
-        </p:spPr>
-        <p:txBody>
-          <a:bodyPr wrap="square" rtlCol="0">
-            <a:spAutoFit/>
-          </a:bodyPr>
-          <a:lstStyle/>
-          <a:p>
-            <a:pPr lvl="0">
-              <a:defRPr/>
-            </a:pPr>
-            <a:r>
-              <a:rPr lang="en-US" sz="3600" b="1" dirty="0">
-                <a:solidFill>
-                  <a:srgbClr val="5B9BD5">
-                    <a:lumMod val="50000"/>
-                  </a:srgbClr>
-                </a:solidFill>
-                <a:latin typeface="Calibri" panose="020F0502020204030204"/>
-              </a:rPr>
-              <a:t>LLM Feature Engineering</a:t>
-            </a:r>
-            <a:endParaRPr kumimoji="0" lang="en-US" sz="3600" b="1" i="0" u="none" strike="noStrike" kern="1200" cap="none" spc="0" normalizeH="0" baseline="0" noProof="0" dirty="0">
-              <a:ln>
-                <a:noFill/>
-              </a:ln>
-              <a:solidFill>
-                <a:srgbClr val="5B9BD5">
-                  <a:lumMod val="50000"/>
-                </a:srgbClr>
-              </a:solidFill>
-              <a:effectLst/>
-              <a:uLnTx/>
-              <a:uFillTx/>
-              <a:latin typeface="Calibri" panose="020F0502020204030204"/>
-              <a:ea typeface="+mn-ea"/>
-              <a:cs typeface="+mn-cs"/>
-            </a:endParaRPr>
-          </a:p>
-        </p:txBody>
-      </p:sp>
-      <p:cxnSp>
-        <p:nvCxnSpPr>
-          <p:cNvPr id="8" name="Straight Connector 7">
-            <a:extLst>
-              <a:ext uri="{FF2B5EF4-FFF2-40B4-BE49-F238E27FC236}">
-                <a16:creationId xmlns:a16="http://schemas.microsoft.com/office/drawing/2014/main" id="{0314CB8D-F0E9-180F-2F06-8C155447FE2F}"/>
-              </a:ext>
-            </a:extLst>
-          </p:cNvPr>
-          <p:cNvCxnSpPr>
-            <a:cxnSpLocks/>
-          </p:cNvCxnSpPr>
-          <p:nvPr/>
-        </p:nvCxnSpPr>
-        <p:spPr>
-          <a:xfrm>
-            <a:off x="221274" y="2712876"/>
-            <a:ext cx="7305799" cy="0"/>
-          </a:xfrm>
-          <a:prstGeom prst="line">
-            <a:avLst/>
-          </a:prstGeom>
-          <a:ln w="28575">
-            <a:solidFill>
-              <a:schemeClr val="accent6"/>
-            </a:solidFill>
-          </a:ln>
-        </p:spPr>
-        <p:style>
-          <a:lnRef idx="1">
-            <a:schemeClr val="accent1"/>
-          </a:lnRef>
-          <a:fillRef idx="0">
-            <a:schemeClr val="accent1"/>
-          </a:fillRef>
-          <a:effectRef idx="0">
-            <a:schemeClr val="accent1"/>
-          </a:effectRef>
-          <a:fontRef idx="minor">
-            <a:schemeClr val="tx1"/>
-          </a:fontRef>
-        </p:style>
-      </p:cxnSp>
-      <p:sp>
-        <p:nvSpPr>
-          <p:cNvPr id="9" name="Text Placeholder 1">
-            <a:extLst>
-              <a:ext uri="{FF2B5EF4-FFF2-40B4-BE49-F238E27FC236}">
-                <a16:creationId xmlns:a16="http://schemas.microsoft.com/office/drawing/2014/main" id="{0E041066-3914-6823-5180-98089105EAF7}"/>
-              </a:ext>
-            </a:extLst>
-          </p:cNvPr>
-          <p:cNvSpPr txBox="1">
-            <a:spLocks/>
-          </p:cNvSpPr>
-          <p:nvPr/>
-        </p:nvSpPr>
-        <p:spPr>
-          <a:xfrm>
-            <a:off x="248706" y="4471618"/>
-            <a:ext cx="10624338" cy="1243382"/>
-          </a:xfrm>
-          <a:prstGeom prst="rect">
-            <a:avLst/>
-          </a:prstGeom>
-        </p:spPr>
-        <p:txBody>
-          <a:bodyPr vert="horz" lIns="91440" tIns="45720" rIns="91440" bIns="45720" rtlCol="0">
-            <a:noAutofit/>
-          </a:bodyPr>
-          <a:lstStyle>
-            <a:lvl1pPr marL="228600" indent="-228600" algn="l" defTabSz="914400" rtl="0" eaLnBrk="1" latinLnBrk="0" hangingPunct="1">
-              <a:lnSpc>
-                <a:spcPct val="90000"/>
-              </a:lnSpc>
-              <a:spcBef>
-                <a:spcPts val="1000"/>
-              </a:spcBef>
-              <a:buFont typeface="Arial" panose="020B0604020202020204" pitchFamily="34" charset="0"/>
-              <a:buChar char="•"/>
-              <a:defRPr lang="en-US" sz="2800" b="1" kern="1200" dirty="0">
-                <a:solidFill>
-                  <a:srgbClr val="0070C0"/>
-                </a:solidFill>
-                <a:latin typeface="Frutiger 45 bold"/>
-                <a:ea typeface="+mn-ea"/>
-                <a:cs typeface="Calibri" panose="020F0502020204030204" pitchFamily="34" charset="0"/>
-              </a:defRPr>
-            </a:lvl1pPr>
-            <a:lvl2pPr marL="685800" indent="-228600" algn="l" defTabSz="914400" rtl="0" eaLnBrk="1" latinLnBrk="0" hangingPunct="1">
-              <a:lnSpc>
-                <a:spcPct val="90000"/>
-              </a:lnSpc>
-              <a:spcBef>
-                <a:spcPts val="500"/>
-              </a:spcBef>
-              <a:buFont typeface="Arial" panose="020B0604020202020204" pitchFamily="34" charset="0"/>
-              <a:buChar char="•"/>
-              <a:defRPr sz="2400" kern="1200">
-                <a:solidFill>
-                  <a:schemeClr val="tx1"/>
-                </a:solidFill>
-                <a:latin typeface="+mn-lt"/>
-                <a:ea typeface="+mn-ea"/>
-                <a:cs typeface="+mn-cs"/>
-              </a:defRPr>
-            </a:lvl2pPr>
-            <a:lvl3pPr marL="1143000" indent="-228600" algn="l" defTabSz="914400" rtl="0" eaLnBrk="1" latinLnBrk="0" hangingPunct="1">
-              <a:lnSpc>
-                <a:spcPct val="90000"/>
-              </a:lnSpc>
-              <a:spcBef>
-                <a:spcPts val="500"/>
-              </a:spcBef>
-              <a:buFont typeface="Arial" panose="020B0604020202020204" pitchFamily="34" charset="0"/>
-              <a:buChar char="•"/>
-              <a:defRPr sz="2000" kern="1200">
-                <a:solidFill>
-                  <a:schemeClr val="tx1"/>
-                </a:solidFill>
-                <a:latin typeface="+mn-lt"/>
-                <a:ea typeface="+mn-ea"/>
-                <a:cs typeface="+mn-cs"/>
-              </a:defRPr>
-            </a:lvl3pPr>
-            <a:lvl4pPr marL="1600200" indent="-228600" algn="l" defTabSz="914400" rtl="0" eaLnBrk="1" latinLnBrk="0" hangingPunct="1">
-              <a:lnSpc>
-                <a:spcPct val="90000"/>
-              </a:lnSpc>
-              <a:spcBef>
-                <a:spcPts val="500"/>
-              </a:spcBef>
-              <a:buFont typeface="Arial" panose="020B0604020202020204" pitchFamily="34" charset="0"/>
-              <a:buChar char="•"/>
-              <a:defRPr sz="1800" kern="1200">
-                <a:solidFill>
-                  <a:schemeClr val="tx1"/>
-                </a:solidFill>
-                <a:latin typeface="+mn-lt"/>
-                <a:ea typeface="+mn-ea"/>
-                <a:cs typeface="+mn-cs"/>
-              </a:defRPr>
-            </a:lvl4pPr>
-            <a:lvl5pPr marL="2057400" indent="-228600" algn="l" defTabSz="914400" rtl="0" eaLnBrk="1" latinLnBrk="0" hangingPunct="1">
-              <a:lnSpc>
-                <a:spcPct val="90000"/>
-              </a:lnSpc>
-              <a:spcBef>
-                <a:spcPts val="500"/>
-              </a:spcBef>
-              <a:buFont typeface="Arial" panose="020B0604020202020204" pitchFamily="34" charset="0"/>
-              <a:buChar char="•"/>
-              <a:defRPr sz="1800" kern="1200">
-                <a:solidFill>
-                  <a:schemeClr val="tx1"/>
-                </a:solidFill>
-                <a:latin typeface="+mn-lt"/>
-                <a:ea typeface="+mn-ea"/>
-                <a:cs typeface="+mn-cs"/>
-              </a:defRPr>
-            </a:lvl5pPr>
-            <a:lvl6pPr marL="2514600" indent="-228600" algn="l" defTabSz="914400" rtl="0" eaLnBrk="1" latinLnBrk="0" hangingPunct="1">
-              <a:lnSpc>
-                <a:spcPct val="90000"/>
-              </a:lnSpc>
-              <a:spcBef>
-                <a:spcPts val="500"/>
-              </a:spcBef>
-              <a:buFont typeface="Arial" panose="020B0604020202020204" pitchFamily="34" charset="0"/>
-              <a:buChar char="•"/>
-              <a:defRPr sz="1800" kern="1200">
-                <a:solidFill>
-                  <a:schemeClr val="tx1"/>
-                </a:solidFill>
-                <a:latin typeface="+mn-lt"/>
-                <a:ea typeface="+mn-ea"/>
-                <a:cs typeface="+mn-cs"/>
-              </a:defRPr>
-            </a:lvl6pPr>
-            <a:lvl7pPr marL="2971800" indent="-228600" algn="l" defTabSz="914400" rtl="0" eaLnBrk="1" latinLnBrk="0" hangingPunct="1">
-              <a:lnSpc>
-                <a:spcPct val="90000"/>
-              </a:lnSpc>
-              <a:spcBef>
-                <a:spcPts val="500"/>
-              </a:spcBef>
-              <a:buFont typeface="Arial" panose="020B0604020202020204" pitchFamily="34" charset="0"/>
-              <a:buChar char="•"/>
-              <a:defRPr sz="1800" kern="1200">
-                <a:solidFill>
-                  <a:schemeClr val="tx1"/>
-                </a:solidFill>
-                <a:latin typeface="+mn-lt"/>
-                <a:ea typeface="+mn-ea"/>
-                <a:cs typeface="+mn-cs"/>
-              </a:defRPr>
-            </a:lvl7pPr>
-            <a:lvl8pPr marL="3429000" indent="-228600" algn="l" defTabSz="914400" rtl="0" eaLnBrk="1" latinLnBrk="0" hangingPunct="1">
-              <a:lnSpc>
-                <a:spcPct val="90000"/>
-              </a:lnSpc>
-              <a:spcBef>
-                <a:spcPts val="500"/>
-              </a:spcBef>
-              <a:buFont typeface="Arial" panose="020B0604020202020204" pitchFamily="34" charset="0"/>
-              <a:buChar char="•"/>
-              <a:defRPr sz="1800" kern="1200">
-                <a:solidFill>
-                  <a:schemeClr val="tx1"/>
-                </a:solidFill>
-                <a:latin typeface="+mn-lt"/>
-                <a:ea typeface="+mn-ea"/>
-                <a:cs typeface="+mn-cs"/>
-              </a:defRPr>
-            </a:lvl8pPr>
-            <a:lvl9pPr marL="3886200" indent="-228600" algn="l" defTabSz="914400" rtl="0" eaLnBrk="1" latinLnBrk="0" hangingPunct="1">
-              <a:lnSpc>
-                <a:spcPct val="90000"/>
-              </a:lnSpc>
-              <a:spcBef>
-                <a:spcPts val="500"/>
-              </a:spcBef>
-              <a:buFont typeface="Arial" panose="020B0604020202020204" pitchFamily="34" charset="0"/>
-              <a:buChar char="•"/>
-              <a:defRPr sz="1800" kern="1200">
-                <a:solidFill>
-                  <a:schemeClr val="tx1"/>
-                </a:solidFill>
-                <a:latin typeface="+mn-lt"/>
-                <a:ea typeface="+mn-ea"/>
-                <a:cs typeface="+mn-cs"/>
-              </a:defRPr>
-            </a:lvl9pPr>
-          </a:lstStyle>
-          <a:p>
-            <a:pPr>
-              <a:spcAft>
-                <a:spcPts val="300"/>
-              </a:spcAft>
-              <a:buSzPct val="100000"/>
-            </a:pPr>
-            <a:r>
-              <a:rPr lang="en-IN" b="0" dirty="0">
-                <a:latin typeface="+mn-lt"/>
-                <a:ea typeface="Calibri" pitchFamily="34" charset="-122"/>
-                <a:cs typeface="Calibri" pitchFamily="34" charset="-120"/>
-              </a:rPr>
-              <a:t>Apply clustering algorithm-  K-Means, GMM, Hierarchical, and DBSCAN with UMAP reduction</a:t>
-            </a:r>
-            <a:endParaRPr lang="en-IN" b="0" dirty="0">
-              <a:latin typeface="+mn-lt"/>
-            </a:endParaRPr>
-          </a:p>
-          <a:p>
-            <a:pPr>
-              <a:spcAft>
-                <a:spcPts val="300"/>
-              </a:spcAft>
-              <a:buSzPct val="100000"/>
-            </a:pPr>
-            <a:r>
-              <a:rPr lang="en-IN" b="0" dirty="0">
-                <a:latin typeface="+mn-lt"/>
-                <a:ea typeface="Calibri" pitchFamily="34" charset="-122"/>
-                <a:cs typeface="Calibri" pitchFamily="34" charset="-120"/>
-              </a:rPr>
-              <a:t>Track experiments and metrics in </a:t>
-            </a:r>
-            <a:r>
-              <a:rPr lang="en-IN" b="0" dirty="0" err="1">
-                <a:latin typeface="+mn-lt"/>
-                <a:ea typeface="Calibri" pitchFamily="34" charset="-122"/>
-                <a:cs typeface="Calibri" pitchFamily="34" charset="-120"/>
-              </a:rPr>
-              <a:t>MLflow</a:t>
-            </a:r>
-            <a:endParaRPr lang="en-IN" b="0" dirty="0">
-              <a:latin typeface="+mn-lt"/>
-            </a:endParaRPr>
-          </a:p>
-        </p:txBody>
-      </p:sp>
-      <p:sp>
-        <p:nvSpPr>
-          <p:cNvPr id="10" name="TextBox 9">
-            <a:extLst>
-              <a:ext uri="{FF2B5EF4-FFF2-40B4-BE49-F238E27FC236}">
-                <a16:creationId xmlns:a16="http://schemas.microsoft.com/office/drawing/2014/main" id="{FE2FF0F1-08C0-CFDF-55AA-B317B9FDDE9B}"/>
-              </a:ext>
-            </a:extLst>
-          </p:cNvPr>
-          <p:cNvSpPr txBox="1"/>
-          <p:nvPr/>
-        </p:nvSpPr>
-        <p:spPr>
-          <a:xfrm>
-            <a:off x="213984" y="3745824"/>
-            <a:ext cx="10624338" cy="646331"/>
-          </a:xfrm>
-          <a:prstGeom prst="rect">
-            <a:avLst/>
-          </a:prstGeom>
-          <a:noFill/>
-        </p:spPr>
-        <p:txBody>
-          <a:bodyPr wrap="square" rtlCol="0">
-            <a:spAutoFit/>
-          </a:bodyPr>
-          <a:lstStyle/>
-          <a:p>
-            <a:pPr lvl="0">
-              <a:defRPr/>
-            </a:pPr>
-            <a:r>
-              <a:rPr lang="en-US" sz="3600" b="1" dirty="0">
-                <a:solidFill>
-                  <a:srgbClr val="5B9BD5">
-                    <a:lumMod val="50000"/>
-                  </a:srgbClr>
-                </a:solidFill>
-                <a:latin typeface="Calibri" panose="020F0502020204030204"/>
-              </a:rPr>
-              <a:t>Pattern Discovery</a:t>
-            </a:r>
-            <a:endParaRPr kumimoji="0" lang="en-US" sz="3600" b="1" i="0" u="none" strike="noStrike" kern="1200" cap="none" spc="0" normalizeH="0" baseline="0" noProof="0" dirty="0">
-              <a:ln>
-                <a:noFill/>
-              </a:ln>
-              <a:solidFill>
-                <a:srgbClr val="5B9BD5">
-                  <a:lumMod val="50000"/>
-                </a:srgbClr>
-              </a:solidFill>
-              <a:effectLst/>
-              <a:uLnTx/>
-              <a:uFillTx/>
-              <a:latin typeface="Calibri" panose="020F0502020204030204"/>
-              <a:ea typeface="+mn-ea"/>
-              <a:cs typeface="+mn-cs"/>
-            </a:endParaRPr>
-          </a:p>
-        </p:txBody>
-      </p:sp>
-      <p:cxnSp>
-        <p:nvCxnSpPr>
-          <p:cNvPr id="11" name="Straight Connector 10">
-            <a:extLst>
-              <a:ext uri="{FF2B5EF4-FFF2-40B4-BE49-F238E27FC236}">
-                <a16:creationId xmlns:a16="http://schemas.microsoft.com/office/drawing/2014/main" id="{B0656C72-1EC3-AA1D-CF36-95ABE59F21C8}"/>
-              </a:ext>
-            </a:extLst>
-          </p:cNvPr>
-          <p:cNvCxnSpPr>
-            <a:cxnSpLocks/>
-          </p:cNvCxnSpPr>
-          <p:nvPr/>
-        </p:nvCxnSpPr>
-        <p:spPr>
-          <a:xfrm>
-            <a:off x="213984" y="4392155"/>
-            <a:ext cx="7305799" cy="0"/>
-          </a:xfrm>
-          <a:prstGeom prst="line">
-            <a:avLst/>
-          </a:prstGeom>
-          <a:ln w="28575">
-            <a:solidFill>
-              <a:schemeClr val="accent6"/>
-            </a:solidFill>
-          </a:ln>
-        </p:spPr>
-        <p:style>
-          <a:lnRef idx="1">
-            <a:schemeClr val="accent1"/>
-          </a:lnRef>
-          <a:fillRef idx="0">
-            <a:schemeClr val="accent1"/>
-          </a:fillRef>
-          <a:effectRef idx="0">
-            <a:schemeClr val="accent1"/>
-          </a:effectRef>
-          <a:fontRef idx="minor">
-            <a:schemeClr val="tx1"/>
-          </a:fontRef>
-        </p:style>
-      </p:cxnSp>
-      <p:sp>
-        <p:nvSpPr>
-          <p:cNvPr id="13" name="TextBox 12">
-            <a:extLst>
-              <a:ext uri="{FF2B5EF4-FFF2-40B4-BE49-F238E27FC236}">
-                <a16:creationId xmlns:a16="http://schemas.microsoft.com/office/drawing/2014/main" id="{904F23B1-BE9A-2F74-5C6D-2EAB3C8A2036}"/>
-              </a:ext>
-            </a:extLst>
-          </p:cNvPr>
-          <p:cNvSpPr txBox="1"/>
-          <p:nvPr/>
-        </p:nvSpPr>
-        <p:spPr>
-          <a:xfrm>
-            <a:off x="3182111" y="57036"/>
-            <a:ext cx="9009889" cy="369332"/>
-          </a:xfrm>
-          <a:prstGeom prst="rect">
-            <a:avLst/>
-          </a:prstGeom>
-          <a:noFill/>
-        </p:spPr>
-        <p:txBody>
-          <a:bodyPr wrap="square" rtlCol="0">
-            <a:spAutoFit/>
-          </a:bodyPr>
-          <a:lstStyle/>
-          <a:p>
-            <a:pPr lvl="0" algn="r">
-              <a:defRPr/>
-            </a:pPr>
-            <a:r>
-              <a:rPr lang="en-IN" b="1" dirty="0">
-                <a:solidFill>
-                  <a:schemeClr val="bg1"/>
-                </a:solidFill>
-              </a:rPr>
-              <a:t>Signature-Driven Inventory: Profiling Shopper </a:t>
-            </a:r>
-            <a:r>
-              <a:rPr lang="en-IN" b="1" dirty="0" err="1">
-                <a:solidFill>
-                  <a:schemeClr val="bg1"/>
-                </a:solidFill>
-              </a:rPr>
-              <a:t>Behavior</a:t>
-            </a:r>
-            <a:r>
-              <a:rPr lang="en-IN" b="1" dirty="0">
-                <a:solidFill>
-                  <a:schemeClr val="bg1"/>
-                </a:solidFill>
-              </a:rPr>
-              <a:t> From Basket Data</a:t>
-            </a:r>
-            <a:endParaRPr lang="en-US" sz="3200" b="1" dirty="0">
-              <a:solidFill>
-                <a:schemeClr val="bg1"/>
-              </a:solidFill>
-              <a:latin typeface="Frutiger 45 bold"/>
-              <a:cs typeface="Calibri" panose="020F0502020204030204" pitchFamily="34" charset="0"/>
-            </a:endParaRPr>
-          </a:p>
-        </p:txBody>
-      </p:sp>
-    </p:spTree>
-    <p:extLst>
-      <p:ext uri="{BB962C8B-B14F-4D97-AF65-F5344CB8AC3E}">
-        <p14:creationId xmlns:p14="http://schemas.microsoft.com/office/powerpoint/2010/main" val="3377586287"/>
-      </p:ext>
-    </p:extLst>
-  </p:cSld>
-  <p:clrMapOvr>
-    <a:masterClrMapping/>
-  </p:clrMapOvr>
-  <mc:AlternateContent xmlns:mc="http://schemas.openxmlformats.org/markup-compatibility/2006" xmlns:p159="http://schemas.microsoft.com/office/powerpoint/2015/09/main">
-    <mc:Choice Requires="p159">
-      <p:transition xmlns:p14="http://schemas.microsoft.com/office/powerpoint/2010/main" spd="slow" p14:dur="2000">
-        <p159:morph option="byObject"/>
-      </p:transition>
-    </mc:Choice>
-    <mc:Fallback xmlns="">
-      <p:transition spd="slow">
-        <p:fade/>
-      </p:transition>
-    </mc:Fallback>
-  </mc:AlternateContent>
-  <p:timing>
-    <p:tnLst>
-      <p:par>
-        <p:cTn id="1" dur="indefinite" restart="never" nodeType="tmRoot">
-          <p:childTnLst>
-            <p:seq concurrent="1" nextAc="seek">
-              <p:cTn id="2" dur="indefinite" nodeType="mainSeq">
-                <p:childTnLst>
-                  <p:par>
-                    <p:cTn id="3" fill="hold">
-                      <p:stCondLst>
-                        <p:cond delay="indefinite"/>
-                        <p:cond evt="onBegin" delay="0">
-                          <p:tn val="2"/>
-                        </p:cond>
-                      </p:stCondLst>
-                      <p:childTnLst>
-                        <p:par>
-                          <p:cTn id="4" fill="hold">
-                            <p:stCondLst>
-                              <p:cond delay="0"/>
-                            </p:stCondLst>
-                            <p:childTnLst>
-                              <p:par>
-                                <p:cTn id="5" presetID="1" presetClass="entr" presetSubtype="0" fill="hold" nodeType="withEffect">
-                                  <p:stCondLst>
-                                    <p:cond delay="0"/>
-                                  </p:stCondLst>
-                                  <p:childTnLst>
-                                    <p:set>
-                                      <p:cBhvr>
-                                        <p:cTn id="6" dur="1" fill="hold">
-                                          <p:stCondLst>
-                                            <p:cond delay="0"/>
-                                          </p:stCondLst>
-                                        </p:cTn>
-                                        <p:tgtEl>
-                                          <p:spTgt spid="4"/>
-                                        </p:tgtEl>
-                                        <p:attrNameLst>
-                                          <p:attrName>style.visibility</p:attrName>
-                                        </p:attrNameLst>
-                                      </p:cBhvr>
-                                      <p:to>
-                                        <p:strVal val="visible"/>
-                                      </p:to>
-                                    </p:set>
-                                  </p:childTnLst>
-                                </p:cTn>
-                              </p:par>
-                            </p:childTnLst>
-                          </p:cTn>
-                        </p:par>
-                      </p:childTnLst>
-                    </p:cTn>
-                  </p:par>
-                  <p:par>
-                    <p:cTn id="7" fill="hold">
-                      <p:stCondLst>
-                        <p:cond delay="indefinite"/>
-                      </p:stCondLst>
-                      <p:childTnLst>
-                        <p:par>
-                          <p:cTn id="8" fill="hold">
-                            <p:stCondLst>
-                              <p:cond delay="0"/>
-                            </p:stCondLst>
-                            <p:childTnLst>
-                              <p:par>
-                                <p:cTn id="9" presetID="1" presetClass="entr" presetSubtype="0" fill="hold" grpId="0" nodeType="clickEffect">
-                                  <p:stCondLst>
-                                    <p:cond delay="0"/>
-                                  </p:stCondLst>
-                                  <p:childTnLst>
-                                    <p:set>
-                                      <p:cBhvr>
-                                        <p:cTn id="10" dur="1" fill="hold">
-                                          <p:stCondLst>
-                                            <p:cond delay="0"/>
-                                          </p:stCondLst>
-                                        </p:cTn>
-                                        <p:tgtEl>
-                                          <p:spTgt spid="2">
-                                            <p:txEl>
-                                              <p:pRg st="0" end="0"/>
-                                            </p:txEl>
-                                          </p:spTgt>
-                                        </p:tgtEl>
-                                        <p:attrNameLst>
-                                          <p:attrName>style.visibility</p:attrName>
-                                        </p:attrNameLst>
-                                      </p:cBhvr>
-                                      <p:to>
-                                        <p:strVal val="visible"/>
-                                      </p:to>
-                                    </p:set>
-                                  </p:childTnLst>
-                                </p:cTn>
-                              </p:par>
-                            </p:childTnLst>
-                          </p:cTn>
-                        </p:par>
-                      </p:childTnLst>
-                    </p:cTn>
-                  </p:par>
-                  <p:par>
-                    <p:cTn id="11" fill="hold">
-                      <p:stCondLst>
-                        <p:cond delay="indefinite"/>
-                      </p:stCondLst>
-                      <p:childTnLst>
-                        <p:par>
-                          <p:cTn id="12" fill="hold">
-                            <p:stCondLst>
-                              <p:cond delay="0"/>
-                            </p:stCondLst>
-                            <p:childTnLst>
-                              <p:par>
-                                <p:cTn id="13" presetID="1" presetClass="entr" presetSubtype="0" fill="hold" grpId="0" nodeType="clickEffect">
-                                  <p:stCondLst>
-                                    <p:cond delay="0"/>
-                                  </p:stCondLst>
-                                  <p:childTnLst>
-                                    <p:set>
-                                      <p:cBhvr>
-                                        <p:cTn id="14" dur="1" fill="hold">
-                                          <p:stCondLst>
-                                            <p:cond delay="0"/>
-                                          </p:stCondLst>
-                                        </p:cTn>
-                                        <p:tgtEl>
-                                          <p:spTgt spid="2">
-                                            <p:txEl>
-                                              <p:pRg st="1" end="1"/>
-                                            </p:txEl>
-                                          </p:spTgt>
-                                        </p:tgtEl>
-                                        <p:attrNameLst>
-                                          <p:attrName>style.visibility</p:attrName>
-                                        </p:attrNameLst>
-                                      </p:cBhvr>
-                                      <p:to>
-                                        <p:strVal val="visible"/>
-                                      </p:to>
-                                    </p:set>
-                                  </p:childTnLst>
-                                </p:cTn>
-                              </p:par>
-                              <p:par>
-                                <p:cTn id="15" presetID="1" presetClass="entr" presetSubtype="0" fill="hold" nodeType="withEffect">
-                                  <p:stCondLst>
-                                    <p:cond delay="0"/>
-                                  </p:stCondLst>
-                                  <p:childTnLst>
-                                    <p:set>
-                                      <p:cBhvr>
-                                        <p:cTn id="16" dur="1" fill="hold">
-                                          <p:stCondLst>
-                                            <p:cond delay="0"/>
-                                          </p:stCondLst>
-                                        </p:cTn>
-                                        <p:tgtEl>
-                                          <p:spTgt spid="8"/>
-                                        </p:tgtEl>
-                                        <p:attrNameLst>
-                                          <p:attrName>style.visibility</p:attrName>
-                                        </p:attrNameLst>
-                                      </p:cBhvr>
-                                      <p:to>
-                                        <p:strVal val="visible"/>
-                                      </p:to>
-                                    </p:set>
-                                  </p:childTnLst>
-                                </p:cTn>
-                              </p:par>
-                            </p:childTnLst>
-                          </p:cTn>
-                        </p:par>
-                      </p:childTnLst>
-                    </p:cTn>
-                  </p:par>
-                  <p:par>
-                    <p:cTn id="17" fill="hold">
-                      <p:stCondLst>
-                        <p:cond delay="indefinite"/>
-                      </p:stCondLst>
-                      <p:childTnLst>
-                        <p:par>
-                          <p:cTn id="18" fill="hold">
-                            <p:stCondLst>
-                              <p:cond delay="0"/>
-                            </p:stCondLst>
-                            <p:childTnLst>
-                              <p:par>
-                                <p:cTn id="19" presetID="1" presetClass="entr" presetSubtype="0" fill="hold" grpId="0" nodeType="clickEffect">
-                                  <p:stCondLst>
-                                    <p:cond delay="0"/>
-                                  </p:stCondLst>
-                                  <p:childTnLst>
-                                    <p:set>
-                                      <p:cBhvr>
-                                        <p:cTn id="20" dur="1" fill="hold">
-                                          <p:stCondLst>
-                                            <p:cond delay="0"/>
-                                          </p:stCondLst>
-                                        </p:cTn>
-                                        <p:tgtEl>
-                                          <p:spTgt spid="5">
-                                            <p:txEl>
-                                              <p:pRg st="0" end="0"/>
-                                            </p:txEl>
-                                          </p:spTgt>
-                                        </p:tgtEl>
-                                        <p:attrNameLst>
-                                          <p:attrName>style.visibility</p:attrName>
-                                        </p:attrNameLst>
-                                      </p:cBhvr>
-                                      <p:to>
-                                        <p:strVal val="visible"/>
-                                      </p:to>
-                                    </p:set>
-                                  </p:childTnLst>
-                                </p:cTn>
-                              </p:par>
-                            </p:childTnLst>
-                          </p:cTn>
-                        </p:par>
-                      </p:childTnLst>
-                    </p:cTn>
-                  </p:par>
-                  <p:par>
-                    <p:cTn id="21" fill="hold">
-                      <p:stCondLst>
-                        <p:cond delay="indefinite"/>
-                      </p:stCondLst>
-                      <p:childTnLst>
-                        <p:par>
-                          <p:cTn id="22" fill="hold">
-                            <p:stCondLst>
-                              <p:cond delay="0"/>
-                            </p:stCondLst>
-                            <p:childTnLst>
-                              <p:par>
-                                <p:cTn id="23" presetID="1" presetClass="entr" presetSubtype="0" fill="hold" grpId="0" nodeType="clickEffect">
-                                  <p:stCondLst>
-                                    <p:cond delay="0"/>
-                                  </p:stCondLst>
-                                  <p:childTnLst>
-                                    <p:set>
-                                      <p:cBhvr>
-                                        <p:cTn id="24" dur="1" fill="hold">
-                                          <p:stCondLst>
-                                            <p:cond delay="0"/>
-                                          </p:stCondLst>
-                                        </p:cTn>
-                                        <p:tgtEl>
-                                          <p:spTgt spid="5">
-                                            <p:txEl>
-                                              <p:pRg st="1" end="1"/>
-                                            </p:txEl>
-                                          </p:spTgt>
-                                        </p:tgtEl>
-                                        <p:attrNameLst>
-                                          <p:attrName>style.visibility</p:attrName>
-                                        </p:attrNameLst>
-                                      </p:cBhvr>
-                                      <p:to>
-                                        <p:strVal val="visible"/>
-                                      </p:to>
-                                    </p:set>
-                                  </p:childTnLst>
-                                </p:cTn>
-                              </p:par>
-                              <p:par>
-                                <p:cTn id="25" presetID="1" presetClass="entr" presetSubtype="0" fill="hold" nodeType="withEffect">
-                                  <p:stCondLst>
-                                    <p:cond delay="0"/>
-                                  </p:stCondLst>
-                                  <p:childTnLst>
-                                    <p:set>
-                                      <p:cBhvr>
-                                        <p:cTn id="26" dur="1" fill="hold">
-                                          <p:stCondLst>
-                                            <p:cond delay="0"/>
-                                          </p:stCondLst>
-                                        </p:cTn>
-                                        <p:tgtEl>
-                                          <p:spTgt spid="11"/>
-                                        </p:tgtEl>
-                                        <p:attrNameLst>
-                                          <p:attrName>style.visibility</p:attrName>
-                                        </p:attrNameLst>
-                                      </p:cBhvr>
-                                      <p:to>
-                                        <p:strVal val="visible"/>
-                                      </p:to>
-                                    </p:set>
-                                  </p:childTnLst>
-                                </p:cTn>
-                              </p:par>
-                            </p:childTnLst>
-                          </p:cTn>
-                        </p:par>
-                      </p:childTnLst>
-                    </p:cTn>
-                  </p:par>
-                  <p:par>
-                    <p:cTn id="27" fill="hold">
-                      <p:stCondLst>
-                        <p:cond delay="indefinite"/>
-                      </p:stCondLst>
-                      <p:childTnLst>
-                        <p:par>
-                          <p:cTn id="28" fill="hold">
-                            <p:stCondLst>
-                              <p:cond delay="0"/>
-                            </p:stCondLst>
-                            <p:childTnLst>
-                              <p:par>
-                                <p:cTn id="29" presetID="1" presetClass="entr" presetSubtype="0" fill="hold" grpId="0" nodeType="clickEffect">
-                                  <p:stCondLst>
-                                    <p:cond delay="0"/>
-                                  </p:stCondLst>
-                                  <p:childTnLst>
-                                    <p:set>
-                                      <p:cBhvr>
-                                        <p:cTn id="30" dur="1" fill="hold">
-                                          <p:stCondLst>
-                                            <p:cond delay="0"/>
-                                          </p:stCondLst>
-                                        </p:cTn>
-                                        <p:tgtEl>
-                                          <p:spTgt spid="9">
-                                            <p:txEl>
-                                              <p:pRg st="0" end="0"/>
-                                            </p:txEl>
-                                          </p:spTgt>
-                                        </p:tgtEl>
-                                        <p:attrNameLst>
-                                          <p:attrName>style.visibility</p:attrName>
-                                        </p:attrNameLst>
-                                      </p:cBhvr>
-                                      <p:to>
-                                        <p:strVal val="visible"/>
-                                      </p:to>
-                                    </p:set>
-                                  </p:childTnLst>
-                                </p:cTn>
-                              </p:par>
-                            </p:childTnLst>
-                          </p:cTn>
-                        </p:par>
-                      </p:childTnLst>
-                    </p:cTn>
-                  </p:par>
-                  <p:par>
-                    <p:cTn id="31" fill="hold">
-                      <p:stCondLst>
-                        <p:cond delay="indefinite"/>
-                      </p:stCondLst>
-                      <p:childTnLst>
-                        <p:par>
-                          <p:cTn id="32" fill="hold">
-                            <p:stCondLst>
-                              <p:cond delay="0"/>
-                            </p:stCondLst>
-                            <p:childTnLst>
-                              <p:par>
-                                <p:cTn id="33" presetID="1" presetClass="entr" presetSubtype="0" fill="hold" grpId="0" nodeType="clickEffect">
-                                  <p:stCondLst>
-                                    <p:cond delay="0"/>
-                                  </p:stCondLst>
-                                  <p:childTnLst>
-                                    <p:set>
-                                      <p:cBhvr>
-                                        <p:cTn id="34" dur="1" fill="hold">
-                                          <p:stCondLst>
-                                            <p:cond delay="0"/>
-                                          </p:stCondLst>
-                                        </p:cTn>
-                                        <p:tgtEl>
-                                          <p:spTgt spid="9">
-                                            <p:txEl>
-                                              <p:pRg st="1" end="1"/>
-                                            </p:txEl>
-                                          </p:spTgt>
-                                        </p:tgtEl>
-                                        <p:attrNameLst>
-                                          <p:attrName>style.visibility</p:attrName>
-                                        </p:attrNameLst>
-                                      </p:cBhvr>
-                                      <p:to>
-                                        <p:strVal val="visible"/>
-                                      </p:to>
-                                    </p:set>
-                                  </p:childTnLst>
-                                </p:cTn>
-                              </p:par>
-                            </p:childTnLst>
-                          </p:cTn>
-                        </p:par>
-                      </p:childTnLst>
-                    </p:cTn>
-                  </p:par>
-                </p:childTnLst>
-              </p:cTn>
-              <p:prevCondLst>
-                <p:cond evt="onPrev" delay="0">
-                  <p:tgtEl>
-                    <p:sldTgt/>
-                  </p:tgtEl>
-                </p:cond>
-              </p:prevCondLst>
-              <p:nextCondLst>
-                <p:cond evt="onNext" delay="0">
-                  <p:tgtEl>
-                    <p:sldTgt/>
-                  </p:tgtEl>
-                </p:cond>
-              </p:nextCondLst>
-            </p:seq>
-          </p:childTnLst>
-        </p:cTn>
-      </p:par>
-    </p:tnLst>
-    <p:bldLst>
-      <p:bldP spid="2" grpId="0" uiExpand="1" build="p"/>
-      <p:bldP spid="5" grpId="0" uiExpand="1" build="p"/>
-      <p:bldP spid="9" grpId="0" uiExpand="1" build="p"/>
-    </p:bldLst>
-  </p:timing>
-</p:sld>
-</file>
-
 <file path=ppt/theme/theme1.xml><?xml version="1.0" encoding="utf-8"?>
 <a:theme xmlns:a="http://schemas.openxmlformats.org/drawingml/2006/main" name="1_Office Theme">
   <a:themeElements>
